--- a/deliverables/Manga_DataHub_Deck.pptx
+++ b/deliverables/Manga_DataHub_Deck.pptx
@@ -2,24 +2,25 @@
 <file path=ppt/presentation.xml><?xml version="1.0" encoding="utf-8"?>
 <p:presentation xmlns:p="http://schemas.openxmlformats.org/presentationml/2006/main">
   <p:sldMasterIdLst>
-    <p:sldMasterId xmlns:r="http://schemas.openxmlformats.org/officeDocument/2006/relationships" id="2147483648" r:id="R523133af7c074e5f"/>
+    <p:sldMasterId xmlns:r="http://schemas.openxmlformats.org/officeDocument/2006/relationships" id="2147483648" r:id="R9d177244193e4529"/>
   </p:sldMasterIdLst>
   <p:notesMasterIdLst>
-    <p:notesMasterId xmlns:r="http://schemas.openxmlformats.org/officeDocument/2006/relationships" r:id="R65e3095dd88947c5"/>
+    <p:notesMasterId xmlns:r="http://schemas.openxmlformats.org/officeDocument/2006/relationships" r:id="R5c15de73d85340cb"/>
   </p:notesMasterIdLst>
   <p:sldIdLst>
-    <p:sldId xmlns:r="http://schemas.openxmlformats.org/officeDocument/2006/relationships" id="256" r:id="R2cecc092c8db48cd"/>
-    <p:sldId xmlns:r="http://schemas.openxmlformats.org/officeDocument/2006/relationships" id="257" r:id="R811a7e283036431f"/>
-    <p:sldId xmlns:r="http://schemas.openxmlformats.org/officeDocument/2006/relationships" id="258" r:id="R17d75f6320f14ada"/>
-    <p:sldId xmlns:r="http://schemas.openxmlformats.org/officeDocument/2006/relationships" id="259" r:id="R37a6722a7e744724"/>
-    <p:sldId xmlns:r="http://schemas.openxmlformats.org/officeDocument/2006/relationships" id="260" r:id="Rf6401ceef80e401d"/>
-    <p:sldId xmlns:r="http://schemas.openxmlformats.org/officeDocument/2006/relationships" id="261" r:id="Rdd9c7f5aea8b426c"/>
-    <p:sldId xmlns:r="http://schemas.openxmlformats.org/officeDocument/2006/relationships" id="262" r:id="Rf07f5443b579494b"/>
-    <p:sldId xmlns:r="http://schemas.openxmlformats.org/officeDocument/2006/relationships" id="263" r:id="Re0116597d78e429d"/>
-    <p:sldId xmlns:r="http://schemas.openxmlformats.org/officeDocument/2006/relationships" id="264" r:id="R60fdad60f70d4ad3"/>
-    <p:sldId xmlns:r="http://schemas.openxmlformats.org/officeDocument/2006/relationships" id="265" r:id="Rc65d707cdd794255"/>
-    <p:sldId xmlns:r="http://schemas.openxmlformats.org/officeDocument/2006/relationships" id="266" r:id="R98cc0aebc8b64230"/>
-    <p:sldId xmlns:r="http://schemas.openxmlformats.org/officeDocument/2006/relationships" id="267" r:id="R538e3e03222140bd"/>
+    <p:sldId xmlns:r="http://schemas.openxmlformats.org/officeDocument/2006/relationships" id="256" r:id="Rc577967e756642fd"/>
+    <p:sldId xmlns:r="http://schemas.openxmlformats.org/officeDocument/2006/relationships" id="257" r:id="R294f87c9d5b9411d"/>
+    <p:sldId xmlns:r="http://schemas.openxmlformats.org/officeDocument/2006/relationships" id="258" r:id="R363a21f28e544648"/>
+    <p:sldId xmlns:r="http://schemas.openxmlformats.org/officeDocument/2006/relationships" id="259" r:id="R4c5e64ac9825441d"/>
+    <p:sldId xmlns:r="http://schemas.openxmlformats.org/officeDocument/2006/relationships" id="260" r:id="R77169c3210c649b4"/>
+    <p:sldId xmlns:r="http://schemas.openxmlformats.org/officeDocument/2006/relationships" id="261" r:id="R3453024d3ccd4137"/>
+    <p:sldId xmlns:r="http://schemas.openxmlformats.org/officeDocument/2006/relationships" id="262" r:id="Rf1cc1e9adcd34b1e"/>
+    <p:sldId xmlns:r="http://schemas.openxmlformats.org/officeDocument/2006/relationships" id="263" r:id="Rc595c5fd514d4779"/>
+    <p:sldId xmlns:r="http://schemas.openxmlformats.org/officeDocument/2006/relationships" id="264" r:id="R80199640d9e84b22"/>
+    <p:sldId xmlns:r="http://schemas.openxmlformats.org/officeDocument/2006/relationships" id="265" r:id="R5807bb1d7d30449e"/>
+    <p:sldId xmlns:r="http://schemas.openxmlformats.org/officeDocument/2006/relationships" id="266" r:id="R9b922071d9d641da"/>
+    <p:sldId xmlns:r="http://schemas.openxmlformats.org/officeDocument/2006/relationships" id="267" r:id="R4be30c3bc8d94a1f"/>
+    <p:sldId xmlns:r="http://schemas.openxmlformats.org/officeDocument/2006/relationships" id="268" r:id="R0ec998386250458c"/>
   </p:sldIdLst>
   <p:sldSz cx="12192000" cy="6858000"/>
   <p:notesSz cx="6858000" cy="9144000"/>
@@ -658,7 +659,7 @@
           <a:lstStyle xmlns:a="http://schemas.openxmlformats.org/drawingml/2006/main"/>
           <a:p xmlns:a="http://schemas.openxmlformats.org/drawingml/2006/main">
             <a:r>
-              <a:t>SPEAKER: Luka. Three end-to-end use cases on Manga's actual data sources, each ingestion-to-outcome: demand forecasting (−30% stockouts), recommendations (+12–18% AOV), sentiment merchandising (2–3 weeks earlier). Two more extend the same platform. These directly attack the 1.2% online growth problem. Hand to Nicklas.</a:t>
+              <a:t>SPEAKER: Ricardo. Phased, controlled-risk delivery — Marta's priority. Production cutover in month 7, full handover by month 9. Risks are explicitly mitigated: DMS runs in parallel before cutover, open-source addresses lock-in, a DPIA precedes any personal data. Hand to Luka for use cases.</a:t>
             </a:r>
           </a:p>
         </p:txBody>
@@ -728,7 +729,7 @@
           <a:lstStyle xmlns:a="http://schemas.openxmlformats.org/drawingml/2006/main"/>
           <a:p xmlns:a="http://schemas.openxmlformats.org/drawingml/2006/main">
             <a:r>
-              <a:t>SPEAKER: Nicklas. The architecture is extensible by design. Short-term reuses existing infra for real-time personalisation and smart labels; medium-term adds a Bedrock shopping assistant and data monetisation; long-term, an AI-agent ecosystem and carbon-neutrality. Note the RFP explicitly asked for AI-agent data exposure — we have a path.</a:t>
+              <a:t>SPEAKER: Luka. Three end-to-end use cases on Manga's actual data sources, each ingestion-to-outcome: demand forecasting (−30% stockouts), recommendations (+12–18% AOV), sentiment merchandising (2–3 weeks earlier). Two more extend the same platform. These directly attack the 1.2% online growth problem. Hand to Nicklas.</a:t>
             </a:r>
           </a:p>
         </p:txBody>
@@ -798,6 +799,76 @@
           <a:lstStyle xmlns:a="http://schemas.openxmlformats.org/drawingml/2006/main"/>
           <a:p xmlns:a="http://schemas.openxmlformats.org/drawingml/2006/main">
             <a:r>
+              <a:t>SPEAKER: Nicklas. The architecture is extensible by design. Short-term reuses existing infra for real-time personalisation and smart labels; medium-term adds a Bedrock shopping assistant and data monetisation; long-term, an AI-agent ecosystem and carbon-neutrality. Note the RFP explicitly asked for AI-agent data exposure — we have a path.</a:t>
+            </a:r>
+          </a:p>
+        </p:txBody>
+      </p:sp>
+      <p:sp>
+        <p:nvSpPr>
+          <p:cNvPr id="4" name="Slide Number Placeholder 3"/>
+          <p:cNvSpPr>
+            <a:spLocks xmlns:a="http://schemas.openxmlformats.org/drawingml/2006/main" noGrp="1"/>
+          </p:cNvSpPr>
+          <p:nvPr>
+            <p:ph type="sldNum" idx="5"/>
+          </p:nvPr>
+        </p:nvSpPr>
+        <p:spPr/>
+        <p:txBody>
+          <a:bodyPr xmlns:a="http://schemas.openxmlformats.org/drawingml/2006/main"/>
+          <a:lstStyle xmlns:a="http://schemas.openxmlformats.org/drawingml/2006/main"/>
+          <a:p xmlns:a="http://schemas.openxmlformats.org/drawingml/2006/main"/>
+        </p:txBody>
+      </p:sp>
+    </p:spTree>
+  </p:cSld>
+  <p:clrMapOvr>
+    <a:masterClrMapping xmlns:a="http://schemas.openxmlformats.org/drawingml/2006/main"/>
+  </p:clrMapOvr>
+</p:notes>
+</file>
+
+<file path=ppt/notesSlides/notesSlide13.xml><?xml version="1.0" encoding="utf-8"?>
+<p:notes xmlns:p="http://schemas.openxmlformats.org/presentationml/2006/main">
+  <p:cSld>
+    <p:spTree>
+      <p:nvGrpSpPr>
+        <p:cNvPr id="1" name=""/>
+        <p:cNvGrpSpPr/>
+        <p:nvPr/>
+      </p:nvGrpSpPr>
+      <p:grpSpPr>
+        <a:xfrm xmlns:a="http://schemas.openxmlformats.org/drawingml/2006/main"/>
+      </p:grpSpPr>
+      <p:sp>
+        <p:nvSpPr>
+          <p:cNvPr id="2" name="Slide Image Placeholder 1"/>
+          <p:cNvSpPr>
+            <a:spLocks xmlns:a="http://schemas.openxmlformats.org/drawingml/2006/main" noGrp="1"/>
+          </p:cNvSpPr>
+          <p:nvPr>
+            <p:ph type="sldImg" idx="0"/>
+          </p:nvPr>
+        </p:nvSpPr>
+        <p:spPr/>
+      </p:sp>
+      <p:sp>
+        <p:nvSpPr>
+          <p:cNvPr id="3" name="Notes Placeholder 2"/>
+          <p:cNvSpPr>
+            <a:spLocks xmlns:a="http://schemas.openxmlformats.org/drawingml/2006/main" noGrp="1"/>
+          </p:cNvSpPr>
+          <p:nvPr>
+            <p:ph type="body" idx="1"/>
+          </p:nvPr>
+        </p:nvSpPr>
+        <p:spPr/>
+        <p:txBody>
+          <a:bodyPr xmlns:a="http://schemas.openxmlformats.org/drawingml/2006/main"/>
+          <a:lstStyle xmlns:a="http://schemas.openxmlformats.org/drawingml/2006/main"/>
+          <a:p xmlns:a="http://schemas.openxmlformats.org/drawingml/2006/main">
+            <a:r>
               <a:t>SPEAKER: Nicklas (close, all on stage for Q&amp;A). Invite them to open the live platform while we take questions. Anticipated Q&amp;A ownership: cost assumptions - Tina; security/GDPR and lifecycle controls - Ricardo/Mateus; RTO/RPO and HA/DR - Ricardo; sustainability metrics - Nicklas; vendor lock-in - Mateus; timeline feasibility - Ricardo.</a:t>
             </a:r>
           </a:p>
@@ -1358,7 +1429,7 @@
           <a:lstStyle xmlns:a="http://schemas.openxmlformats.org/drawingml/2006/main"/>
           <a:p xmlns:a="http://schemas.openxmlformats.org/drawingml/2006/main">
             <a:r>
-              <a:t>SPEAKER: Ricardo. Phased, controlled-risk delivery — Marta's priority. Production cutover in month 7, full handover by month 9. Risks are explicitly mitigated: DMS runs in parallel before cutover, open-source addresses lock-in, a DPIA precedes any personal data. Hand to Luka for use cases.</a:t>
+              <a:t>SPEAKER: Tina. This is the backup behind the 57% number. Explain that the current baseline starts from the RFP fact that Manga pays about 2x competitors; we assumed a competitor-normal EUR 650k/year, giving EUR 1.30M current. Then walk through the AWS budget bridge: EUR 217k direct AWS meter cost plus EUR 175k platform ops/FinOps, EUR 65k security/DR, and EUR 103k contingency equals EUR 560k/year. The reduction is EUR 740k, or 56.9%. The unit prices shown are the public AWS anchors; the full formulas are in the PDF appendix.</a:t>
             </a:r>
           </a:p>
         </p:txBody>
@@ -1426,7 +1497,7 @@
   </p:cSld>
   <p:clrMap bg1="lt1" tx1="dk1" bg2="lt2" tx2="dk2" accent1="accent1" accent2="accent2" accent3="accent3" accent4="accent4" accent5="accent5" accent6="accent6" hlink="hlink" folHlink="folHlink"/>
   <p:sldLayoutIdLst>
-    <p:sldLayoutId xmlns:r="http://schemas.openxmlformats.org/officeDocument/2006/relationships" id="2147483649" r:id="R10816a1a122d41c4"/>
+    <p:sldLayoutId xmlns:r="http://schemas.openxmlformats.org/officeDocument/2006/relationships" id="2147483649" r:id="Rfbaf25fcb0bf42ae"/>
   </p:sldLayoutIdLst>
   <p:hf sldNum="0" hdr="0" ftr="0" dt="0"/>
   <p:txStyles>
@@ -1970,7 +2041,7 @@
     <p:bg>
       <p:bgPr>
         <a:blipFill xmlns:a="http://schemas.openxmlformats.org/drawingml/2006/main" rotWithShape="1">
-          <a:blip xmlns:r="http://schemas.openxmlformats.org/officeDocument/2006/relationships" r:embed="R7c8f574f5bac401d">
+          <a:blip xmlns:r="http://schemas.openxmlformats.org/officeDocument/2006/relationships" r:embed="R0c5af888c85d4607">
             <a:lum/>
           </a:blip>
           <a:srcRect l="0" t="0" r="0" b="0"/>
@@ -2270,7 +2341,7 @@
           <p:cNvPr id="2" name="Text 0">
             <a:extLst xmlns:a="http://schemas.openxmlformats.org/drawingml/2006/main">
               <a:ext uri="{FF2B5EF4-FFF2-40B4-BE49-F238E27FC236}">
-                <a16:creationId xmlns:a16="http://schemas.microsoft.com/office/drawing/2014/main" id="{97F0F7BF-357F-46DE-BC94-1F49FBC2452C}"/>
+                <a16:creationId xmlns:a16="http://schemas.microsoft.com/office/drawing/2014/main" id="{FE238A48-E564-4A12-A16E-33229AEA48CF}"/>
               </a:ext>
             </a:extLst>
           </p:cNvPr>
@@ -2305,7 +2376,7 @@
                 <a:ea typeface="Calibri"/>
                 <a:cs typeface="Calibri"/>
               </a:rPr>
-              <a:t>SECTION 5</a:t>
+              <a:t>DELIVERY</a:t>
             </a:r>
           </a:p>
         </p:txBody>
@@ -2315,7 +2386,7 @@
           <p:cNvPr id="3" name="Text 1">
             <a:extLst xmlns:a="http://schemas.openxmlformats.org/drawingml/2006/main">
               <a:ext uri="{FF2B5EF4-FFF2-40B4-BE49-F238E27FC236}">
-                <a16:creationId xmlns:a16="http://schemas.microsoft.com/office/drawing/2014/main" id="{17144D56-D12A-4343-BD6E-92D50D24594A}"/>
+                <a16:creationId xmlns:a16="http://schemas.microsoft.com/office/drawing/2014/main" id="{6200C253-2B54-47B5-AE07-86A60EF0A297}"/>
               </a:ext>
             </a:extLst>
           </p:cNvPr>
@@ -2350,7 +2421,7 @@
                 <a:ea typeface="Calibri"/>
                 <a:cs typeface="Calibri"/>
               </a:rPr>
-              <a:t>What it unlocks — ML use cases on real data</a:t>
+              <a:t>Nine-month delivery in three phases</a:t>
             </a:r>
           </a:p>
         </p:txBody>
@@ -2360,7 +2431,7 @@
           <p:cNvPr id="4" name="Shape 2">
             <a:extLst xmlns:a="http://schemas.openxmlformats.org/drawingml/2006/main">
               <a:ext uri="{FF2B5EF4-FFF2-40B4-BE49-F238E27FC236}">
-                <a16:creationId xmlns:a16="http://schemas.microsoft.com/office/drawing/2014/main" id="{B2E16DC0-0EA0-489B-ABB8-30D85323337E}"/>
+                <a16:creationId xmlns:a16="http://schemas.microsoft.com/office/drawing/2014/main" id="{BDF7982D-8C4D-4A3F-A05A-2789B6FF2FFB}"/>
               </a:ext>
             </a:extLst>
           </p:cNvPr>
@@ -2372,11 +2443,11 @@
         <p:spPr>
           <a:xfrm xmlns:a="http://schemas.openxmlformats.org/drawingml/2006/main">
             <a:off x="640080" y="1737360"/>
-            <a:ext cx="3474720" cy="3566160"/>
+            <a:ext cx="3474720" cy="3383280"/>
           </a:xfrm>
           <a:prstGeom xmlns:a="http://schemas.openxmlformats.org/drawingml/2006/main" prst="roundRect">
             <a:avLst>
-              <a:gd name="adj" fmla="val 2368"/>
+              <a:gd name="adj" fmla="val 2432"/>
             </a:avLst>
           </a:prstGeom>
           <a:solidFill xmlns:a="http://schemas.openxmlformats.org/drawingml/2006/main">
@@ -2402,19 +2473,19 @@
           <p:cNvPr id="5" name="Text 3">
             <a:extLst xmlns:a="http://schemas.openxmlformats.org/drawingml/2006/main">
               <a:ext uri="{FF2B5EF4-FFF2-40B4-BE49-F238E27FC236}">
-                <a16:creationId xmlns:a16="http://schemas.microsoft.com/office/drawing/2014/main" id="{6019BEE5-FAB5-41F1-BE51-C7424DAC5A06}"/>
-              </a:ext>
-            </a:extLst>
-          </p:cNvPr>
-          <p:cNvSpPr>
-            <a:spLocks xmlns:a="http://schemas.openxmlformats.org/drawingml/2006/main" noGrp="1"/>
-          </p:cNvSpPr>
-          <p:nvPr/>
-        </p:nvSpPr>
-        <p:spPr>
-          <a:xfrm xmlns:a="http://schemas.openxmlformats.org/drawingml/2006/main">
-            <a:off x="896112" y="1993392"/>
-            <a:ext cx="2971800" cy="640080"/>
+                <a16:creationId xmlns:a16="http://schemas.microsoft.com/office/drawing/2014/main" id="{39E58C2F-AC5F-4918-89AC-ECC6DEE46F28}"/>
+              </a:ext>
+            </a:extLst>
+          </p:cNvPr>
+          <p:cNvSpPr>
+            <a:spLocks xmlns:a="http://schemas.openxmlformats.org/drawingml/2006/main" noGrp="1"/>
+          </p:cNvSpPr>
+          <p:nvPr/>
+        </p:nvSpPr>
+        <p:spPr>
+          <a:xfrm xmlns:a="http://schemas.openxmlformats.org/drawingml/2006/main">
+            <a:off x="896112" y="1965960"/>
+            <a:ext cx="3017520" cy="457200"/>
           </a:xfrm>
           <a:prstGeom xmlns:a="http://schemas.openxmlformats.org/drawingml/2006/main" prst="rect">
             <a:avLst/>
@@ -2431,13 +2502,13 @@
             <a:r>
               <a:rPr sz="1900" b="1">
                 <a:solidFill>
-                  <a:srgbClr val="FFFFFF"/>
-                </a:solidFill>
-                <a:latin typeface="Calibri"/>
-                <a:ea typeface="Calibri"/>
-                <a:cs typeface="Calibri"/>
-              </a:rPr>
-              <a:t>Demand Forecasting</a:t>
+                  <a:srgbClr val="2E9BFF"/>
+                </a:solidFill>
+                <a:latin typeface="Calibri"/>
+                <a:ea typeface="Calibri"/>
+                <a:cs typeface="Calibri"/>
+              </a:rPr>
+              <a:t>Phase 1 · Foundation</a:t>
             </a:r>
           </a:p>
         </p:txBody>
@@ -2447,19 +2518,64 @@
           <p:cNvPr id="6" name="Text 4">
             <a:extLst xmlns:a="http://schemas.openxmlformats.org/drawingml/2006/main">
               <a:ext uri="{FF2B5EF4-FFF2-40B4-BE49-F238E27FC236}">
-                <a16:creationId xmlns:a16="http://schemas.microsoft.com/office/drawing/2014/main" id="{E178227D-E73B-4633-9EB1-E76CA5928B5C}"/>
-              </a:ext>
-            </a:extLst>
-          </p:cNvPr>
-          <p:cNvSpPr>
-            <a:spLocks xmlns:a="http://schemas.openxmlformats.org/drawingml/2006/main" noGrp="1"/>
-          </p:cNvSpPr>
-          <p:nvPr/>
-        </p:nvSpPr>
-        <p:spPr>
-          <a:xfrm xmlns:a="http://schemas.openxmlformats.org/drawingml/2006/main">
-            <a:off x="896112" y="2697480"/>
-            <a:ext cx="2971800" cy="1280160"/>
+                <a16:creationId xmlns:a16="http://schemas.microsoft.com/office/drawing/2014/main" id="{4B67E3B5-B6CA-4E6C-8EFD-9AA14BC55959}"/>
+              </a:ext>
+            </a:extLst>
+          </p:cNvPr>
+          <p:cNvSpPr>
+            <a:spLocks xmlns:a="http://schemas.openxmlformats.org/drawingml/2006/main" noGrp="1"/>
+          </p:cNvSpPr>
+          <p:nvPr/>
+        </p:nvSpPr>
+        <p:spPr>
+          <a:xfrm xmlns:a="http://schemas.openxmlformats.org/drawingml/2006/main">
+            <a:off x="896112" y="2432304"/>
+            <a:ext cx="3017520" cy="320040"/>
+          </a:xfrm>
+          <a:prstGeom xmlns:a="http://schemas.openxmlformats.org/drawingml/2006/main" prst="rect">
+            <a:avLst/>
+          </a:prstGeom>
+          <a:noFill xmlns:a="http://schemas.openxmlformats.org/drawingml/2006/main"/>
+        </p:spPr>
+        <p:txBody>
+          <a:bodyPr xmlns:a="http://schemas.openxmlformats.org/drawingml/2006/main" wrap="square" lIns="0" tIns="0" rIns="0" bIns="0" anchor="ctr"/>
+          <a:lstStyle xmlns:a="http://schemas.openxmlformats.org/drawingml/2006/main"/>
+          <a:p xmlns:a="http://schemas.openxmlformats.org/drawingml/2006/main">
+            <a:pPr marL="0" indent="0">
+              <a:buNone/>
+            </a:pPr>
+            <a:r>
+              <a:rPr sz="1300" b="1">
+                <a:solidFill>
+                  <a:srgbClr val="9FB0C3"/>
+                </a:solidFill>
+                <a:latin typeface="Calibri"/>
+                <a:ea typeface="Calibri"/>
+                <a:cs typeface="Calibri"/>
+              </a:rPr>
+              <a:t>Months 1–3</a:t>
+            </a:r>
+          </a:p>
+        </p:txBody>
+      </p:sp>
+      <p:sp>
+        <p:nvSpPr>
+          <p:cNvPr id="7" name="Text 5">
+            <a:extLst xmlns:a="http://schemas.openxmlformats.org/drawingml/2006/main">
+              <a:ext uri="{FF2B5EF4-FFF2-40B4-BE49-F238E27FC236}">
+                <a16:creationId xmlns:a16="http://schemas.microsoft.com/office/drawing/2014/main" id="{B7410B09-221C-404E-A866-027A04BBBFC9}"/>
+              </a:ext>
+            </a:extLst>
+          </p:cNvPr>
+          <p:cNvSpPr>
+            <a:spLocks xmlns:a="http://schemas.openxmlformats.org/drawingml/2006/main" noGrp="1"/>
+          </p:cNvSpPr>
+          <p:nvPr/>
+        </p:nvSpPr>
+        <p:spPr>
+          <a:xfrm xmlns:a="http://schemas.openxmlformats.org/drawingml/2006/main">
+            <a:off x="896112" y="2834640"/>
+            <a:ext cx="3017520" cy="2103120"/>
           </a:xfrm>
           <a:prstGeom xmlns:a="http://schemas.openxmlformats.org/drawingml/2006/main" prst="rect">
             <a:avLst/>
@@ -2479,58 +2595,13 @@
             <a:r>
               <a:rPr sz="1450">
                 <a:solidFill>
-                  <a:srgbClr val="9FB0C3"/>
-                </a:solidFill>
-                <a:latin typeface="Calibri"/>
-                <a:ea typeface="Calibri"/>
-                <a:cs typeface="Calibri"/>
-              </a:rPr>
-              <a:t>SageMaker DeepAR on sales + weather + events</a:t>
-            </a:r>
-          </a:p>
-        </p:txBody>
-      </p:sp>
-      <p:sp>
-        <p:nvSpPr>
-          <p:cNvPr id="7" name="Text 5">
-            <a:extLst xmlns:a="http://schemas.openxmlformats.org/drawingml/2006/main">
-              <a:ext uri="{FF2B5EF4-FFF2-40B4-BE49-F238E27FC236}">
-                <a16:creationId xmlns:a16="http://schemas.microsoft.com/office/drawing/2014/main" id="{A7540500-FA0E-4FD1-A9D1-F2088A63EE44}"/>
-              </a:ext>
-            </a:extLst>
-          </p:cNvPr>
-          <p:cNvSpPr>
-            <a:spLocks xmlns:a="http://schemas.openxmlformats.org/drawingml/2006/main" noGrp="1"/>
-          </p:cNvSpPr>
-          <p:nvPr/>
-        </p:nvSpPr>
-        <p:spPr>
-          <a:xfrm xmlns:a="http://schemas.openxmlformats.org/drawingml/2006/main">
-            <a:off x="896112" y="4526280"/>
-            <a:ext cx="2971800" cy="640080"/>
-          </a:xfrm>
-          <a:prstGeom xmlns:a="http://schemas.openxmlformats.org/drawingml/2006/main" prst="rect">
-            <a:avLst/>
-          </a:prstGeom>
-          <a:noFill xmlns:a="http://schemas.openxmlformats.org/drawingml/2006/main"/>
-        </p:spPr>
-        <p:txBody>
-          <a:bodyPr xmlns:a="http://schemas.openxmlformats.org/drawingml/2006/main" wrap="square" lIns="0" tIns="0" rIns="0" bIns="0" anchor="ctr"/>
-          <a:lstStyle xmlns:a="http://schemas.openxmlformats.org/drawingml/2006/main"/>
-          <a:p xmlns:a="http://schemas.openxmlformats.org/drawingml/2006/main">
-            <a:pPr marL="0" indent="0">
-              <a:buNone/>
-            </a:pPr>
-            <a:r>
-              <a:rPr sz="1600" b="1">
-                <a:solidFill>
-                  <a:srgbClr val="4FD08A"/>
-                </a:solidFill>
-                <a:latin typeface="Calibri"/>
-                <a:ea typeface="Calibri"/>
-                <a:cs typeface="Calibri"/>
-              </a:rPr>
-              <a:t>−30% stockouts · −20% overstock</a:t>
+                  <a:srgbClr val="D6E2F2"/>
+                </a:solidFill>
+                <a:latin typeface="Calibri"/>
+                <a:ea typeface="Calibri"/>
+                <a:cs typeface="Calibri"/>
+              </a:rPr>
+              <a:t>AWS accounts, Terraform baseline, Dev live, DMS migration, Catalog + MWAA, first batch pipelines.</a:t>
             </a:r>
           </a:p>
         </p:txBody>
@@ -2540,7 +2611,7 @@
           <p:cNvPr id="8" name="Shape 6">
             <a:extLst xmlns:a="http://schemas.openxmlformats.org/drawingml/2006/main">
               <a:ext uri="{FF2B5EF4-FFF2-40B4-BE49-F238E27FC236}">
-                <a16:creationId xmlns:a16="http://schemas.microsoft.com/office/drawing/2014/main" id="{C4E41513-3C40-4572-BAE6-8709F31913DB}"/>
+                <a16:creationId xmlns:a16="http://schemas.microsoft.com/office/drawing/2014/main" id="{94C66EDE-B777-4654-813A-212B305D3258}"/>
               </a:ext>
             </a:extLst>
           </p:cNvPr>
@@ -2552,11 +2623,11 @@
         <p:spPr>
           <a:xfrm xmlns:a="http://schemas.openxmlformats.org/drawingml/2006/main">
             <a:off x="4361688" y="1737360"/>
-            <a:ext cx="3474720" cy="3566160"/>
+            <a:ext cx="3474720" cy="3383280"/>
           </a:xfrm>
           <a:prstGeom xmlns:a="http://schemas.openxmlformats.org/drawingml/2006/main" prst="roundRect">
             <a:avLst>
-              <a:gd name="adj" fmla="val 2368"/>
+              <a:gd name="adj" fmla="val 2432"/>
             </a:avLst>
           </a:prstGeom>
           <a:solidFill xmlns:a="http://schemas.openxmlformats.org/drawingml/2006/main">
@@ -2582,19 +2653,19 @@
           <p:cNvPr id="9" name="Text 7">
             <a:extLst xmlns:a="http://schemas.openxmlformats.org/drawingml/2006/main">
               <a:ext uri="{FF2B5EF4-FFF2-40B4-BE49-F238E27FC236}">
-                <a16:creationId xmlns:a16="http://schemas.microsoft.com/office/drawing/2014/main" id="{60EF4782-D9E1-4202-90DB-225BFCAFF5C3}"/>
-              </a:ext>
-            </a:extLst>
-          </p:cNvPr>
-          <p:cNvSpPr>
-            <a:spLocks xmlns:a="http://schemas.openxmlformats.org/drawingml/2006/main" noGrp="1"/>
-          </p:cNvSpPr>
-          <p:nvPr/>
-        </p:nvSpPr>
-        <p:spPr>
-          <a:xfrm xmlns:a="http://schemas.openxmlformats.org/drawingml/2006/main">
-            <a:off x="4617720" y="1993392"/>
-            <a:ext cx="2971800" cy="640080"/>
+                <a16:creationId xmlns:a16="http://schemas.microsoft.com/office/drawing/2014/main" id="{674FEA85-50D2-4997-ACEF-F4CDC10D0CEE}"/>
+              </a:ext>
+            </a:extLst>
+          </p:cNvPr>
+          <p:cNvSpPr>
+            <a:spLocks xmlns:a="http://schemas.openxmlformats.org/drawingml/2006/main" noGrp="1"/>
+          </p:cNvSpPr>
+          <p:nvPr/>
+        </p:nvSpPr>
+        <p:spPr>
+          <a:xfrm xmlns:a="http://schemas.openxmlformats.org/drawingml/2006/main">
+            <a:off x="4617720" y="1965960"/>
+            <a:ext cx="3017520" cy="457200"/>
           </a:xfrm>
           <a:prstGeom xmlns:a="http://schemas.openxmlformats.org/drawingml/2006/main" prst="rect">
             <a:avLst/>
@@ -2611,13 +2682,13 @@
             <a:r>
               <a:rPr sz="1900" b="1">
                 <a:solidFill>
-                  <a:srgbClr val="FFFFFF"/>
-                </a:solidFill>
-                <a:latin typeface="Calibri"/>
-                <a:ea typeface="Calibri"/>
-                <a:cs typeface="Calibri"/>
-              </a:rPr>
-              <a:t>Product Recommendations</a:t>
+                  <a:srgbClr val="8A6CF6"/>
+                </a:solidFill>
+                <a:latin typeface="Calibri"/>
+                <a:ea typeface="Calibri"/>
+                <a:cs typeface="Calibri"/>
+              </a:rPr>
+              <a:t>Phase 2 · Build &amp; Validate</a:t>
             </a:r>
           </a:p>
         </p:txBody>
@@ -2627,19 +2698,64 @@
           <p:cNvPr id="10" name="Text 8">
             <a:extLst xmlns:a="http://schemas.openxmlformats.org/drawingml/2006/main">
               <a:ext uri="{FF2B5EF4-FFF2-40B4-BE49-F238E27FC236}">
-                <a16:creationId xmlns:a16="http://schemas.microsoft.com/office/drawing/2014/main" id="{FD978B26-7877-4116-9051-D5C275654A68}"/>
-              </a:ext>
-            </a:extLst>
-          </p:cNvPr>
-          <p:cNvSpPr>
-            <a:spLocks xmlns:a="http://schemas.openxmlformats.org/drawingml/2006/main" noGrp="1"/>
-          </p:cNvSpPr>
-          <p:nvPr/>
-        </p:nvSpPr>
-        <p:spPr>
-          <a:xfrm xmlns:a="http://schemas.openxmlformats.org/drawingml/2006/main">
-            <a:off x="4617720" y="2697480"/>
-            <a:ext cx="2971800" cy="1280160"/>
+                <a16:creationId xmlns:a16="http://schemas.microsoft.com/office/drawing/2014/main" id="{F2AA2822-3AB2-4E4E-922E-0985B3BE6213}"/>
+              </a:ext>
+            </a:extLst>
+          </p:cNvPr>
+          <p:cNvSpPr>
+            <a:spLocks xmlns:a="http://schemas.openxmlformats.org/drawingml/2006/main" noGrp="1"/>
+          </p:cNvSpPr>
+          <p:nvPr/>
+        </p:nvSpPr>
+        <p:spPr>
+          <a:xfrm xmlns:a="http://schemas.openxmlformats.org/drawingml/2006/main">
+            <a:off x="4617720" y="2432304"/>
+            <a:ext cx="3017520" cy="320040"/>
+          </a:xfrm>
+          <a:prstGeom xmlns:a="http://schemas.openxmlformats.org/drawingml/2006/main" prst="rect">
+            <a:avLst/>
+          </a:prstGeom>
+          <a:noFill xmlns:a="http://schemas.openxmlformats.org/drawingml/2006/main"/>
+        </p:spPr>
+        <p:txBody>
+          <a:bodyPr xmlns:a="http://schemas.openxmlformats.org/drawingml/2006/main" wrap="square" lIns="0" tIns="0" rIns="0" bIns="0" anchor="ctr"/>
+          <a:lstStyle xmlns:a="http://schemas.openxmlformats.org/drawingml/2006/main"/>
+          <a:p xmlns:a="http://schemas.openxmlformats.org/drawingml/2006/main">
+            <a:pPr marL="0" indent="0">
+              <a:buNone/>
+            </a:pPr>
+            <a:r>
+              <a:rPr sz="1300" b="1">
+                <a:solidFill>
+                  <a:srgbClr val="9FB0C3"/>
+                </a:solidFill>
+                <a:latin typeface="Calibri"/>
+                <a:ea typeface="Calibri"/>
+                <a:cs typeface="Calibri"/>
+              </a:rPr>
+              <a:t>Months 4–6</a:t>
+            </a:r>
+          </a:p>
+        </p:txBody>
+      </p:sp>
+      <p:sp>
+        <p:nvSpPr>
+          <p:cNvPr id="11" name="Text 9">
+            <a:extLst xmlns:a="http://schemas.openxmlformats.org/drawingml/2006/main">
+              <a:ext uri="{FF2B5EF4-FFF2-40B4-BE49-F238E27FC236}">
+                <a16:creationId xmlns:a16="http://schemas.microsoft.com/office/drawing/2014/main" id="{96D7CA3F-8860-4E19-B1AA-10F2C3ADBFC7}"/>
+              </a:ext>
+            </a:extLst>
+          </p:cNvPr>
+          <p:cNvSpPr>
+            <a:spLocks xmlns:a="http://schemas.openxmlformats.org/drawingml/2006/main" noGrp="1"/>
+          </p:cNvSpPr>
+          <p:nvPr/>
+        </p:nvSpPr>
+        <p:spPr>
+          <a:xfrm xmlns:a="http://schemas.openxmlformats.org/drawingml/2006/main">
+            <a:off x="4617720" y="2834640"/>
+            <a:ext cx="3017520" cy="2103120"/>
           </a:xfrm>
           <a:prstGeom xmlns:a="http://schemas.openxmlformats.org/drawingml/2006/main" prst="rect">
             <a:avLst/>
@@ -2659,58 +2775,13 @@
             <a:r>
               <a:rPr sz="1450">
                 <a:solidFill>
-                  <a:srgbClr val="9FB0C3"/>
-                </a:solidFill>
-                <a:latin typeface="Calibri"/>
-                <a:ea typeface="Calibri"/>
-                <a:cs typeface="Calibri"/>
-              </a:rPr>
-              <a:t>Collaborative filtering, served at ≤5ms via DynamoDB</a:t>
-            </a:r>
-          </a:p>
-        </p:txBody>
-      </p:sp>
-      <p:sp>
-        <p:nvSpPr>
-          <p:cNvPr id="11" name="Text 9">
-            <a:extLst xmlns:a="http://schemas.openxmlformats.org/drawingml/2006/main">
-              <a:ext uri="{FF2B5EF4-FFF2-40B4-BE49-F238E27FC236}">
-                <a16:creationId xmlns:a16="http://schemas.microsoft.com/office/drawing/2014/main" id="{F783C6FB-642F-4C2F-95DC-A9776D779F33}"/>
-              </a:ext>
-            </a:extLst>
-          </p:cNvPr>
-          <p:cNvSpPr>
-            <a:spLocks xmlns:a="http://schemas.openxmlformats.org/drawingml/2006/main" noGrp="1"/>
-          </p:cNvSpPr>
-          <p:nvPr/>
-        </p:nvSpPr>
-        <p:spPr>
-          <a:xfrm xmlns:a="http://schemas.openxmlformats.org/drawingml/2006/main">
-            <a:off x="4617720" y="4526280"/>
-            <a:ext cx="2971800" cy="640080"/>
-          </a:xfrm>
-          <a:prstGeom xmlns:a="http://schemas.openxmlformats.org/drawingml/2006/main" prst="rect">
-            <a:avLst/>
-          </a:prstGeom>
-          <a:noFill xmlns:a="http://schemas.openxmlformats.org/drawingml/2006/main"/>
-        </p:spPr>
-        <p:txBody>
-          <a:bodyPr xmlns:a="http://schemas.openxmlformats.org/drawingml/2006/main" wrap="square" lIns="0" tIns="0" rIns="0" bIns="0" anchor="ctr"/>
-          <a:lstStyle xmlns:a="http://schemas.openxmlformats.org/drawingml/2006/main"/>
-          <a:p xmlns:a="http://schemas.openxmlformats.org/drawingml/2006/main">
-            <a:pPr marL="0" indent="0">
-              <a:buNone/>
-            </a:pPr>
-            <a:r>
-              <a:rPr sz="1600" b="1">
-                <a:solidFill>
-                  <a:srgbClr val="2E9BFF"/>
-                </a:solidFill>
-                <a:latin typeface="Calibri"/>
-                <a:ea typeface="Calibri"/>
-                <a:cs typeface="Calibri"/>
-              </a:rPr>
-              <a:t>+12–18% average order value</a:t>
+                  <a:srgbClr val="D6E2F2"/>
+                </a:solidFill>
+                <a:latin typeface="Calibri"/>
+                <a:ea typeface="Calibri"/>
+                <a:cs typeface="Calibri"/>
+              </a:rPr>
+              <a:t>Pre-Prod live, Kinesis streaming, Glue DQ + Lake Formation, QuickSight replacing Excel, first ML model.</a:t>
             </a:r>
           </a:p>
         </p:txBody>
@@ -2720,7 +2791,7 @@
           <p:cNvPr id="12" name="Shape 10">
             <a:extLst xmlns:a="http://schemas.openxmlformats.org/drawingml/2006/main">
               <a:ext uri="{FF2B5EF4-FFF2-40B4-BE49-F238E27FC236}">
-                <a16:creationId xmlns:a16="http://schemas.microsoft.com/office/drawing/2014/main" id="{C1237148-C9FC-480C-843A-4AB34DF41243}"/>
+                <a16:creationId xmlns:a16="http://schemas.microsoft.com/office/drawing/2014/main" id="{7DD6A566-276A-48CC-A5B7-44975A040F95}"/>
               </a:ext>
             </a:extLst>
           </p:cNvPr>
@@ -2732,11 +2803,11 @@
         <p:spPr>
           <a:xfrm xmlns:a="http://schemas.openxmlformats.org/drawingml/2006/main">
             <a:off x="8083296" y="1737360"/>
-            <a:ext cx="3474720" cy="3566160"/>
+            <a:ext cx="3474720" cy="3383280"/>
           </a:xfrm>
           <a:prstGeom xmlns:a="http://schemas.openxmlformats.org/drawingml/2006/main" prst="roundRect">
             <a:avLst>
-              <a:gd name="adj" fmla="val 2368"/>
+              <a:gd name="adj" fmla="val 2432"/>
             </a:avLst>
           </a:prstGeom>
           <a:solidFill xmlns:a="http://schemas.openxmlformats.org/drawingml/2006/main">
@@ -2762,19 +2833,19 @@
           <p:cNvPr id="13" name="Text 11">
             <a:extLst xmlns:a="http://schemas.openxmlformats.org/drawingml/2006/main">
               <a:ext uri="{FF2B5EF4-FFF2-40B4-BE49-F238E27FC236}">
-                <a16:creationId xmlns:a16="http://schemas.microsoft.com/office/drawing/2014/main" id="{8A20581C-0531-4BB4-AB20-6CC845062AD2}"/>
-              </a:ext>
-            </a:extLst>
-          </p:cNvPr>
-          <p:cNvSpPr>
-            <a:spLocks xmlns:a="http://schemas.openxmlformats.org/drawingml/2006/main" noGrp="1"/>
-          </p:cNvSpPr>
-          <p:nvPr/>
-        </p:nvSpPr>
-        <p:spPr>
-          <a:xfrm xmlns:a="http://schemas.openxmlformats.org/drawingml/2006/main">
-            <a:off x="8339328" y="1993392"/>
-            <a:ext cx="2971800" cy="640080"/>
+                <a16:creationId xmlns:a16="http://schemas.microsoft.com/office/drawing/2014/main" id="{F7206F50-4D2D-43F8-B583-9C8F2EDBEE37}"/>
+              </a:ext>
+            </a:extLst>
+          </p:cNvPr>
+          <p:cNvSpPr>
+            <a:spLocks xmlns:a="http://schemas.openxmlformats.org/drawingml/2006/main" noGrp="1"/>
+          </p:cNvSpPr>
+          <p:nvPr/>
+        </p:nvSpPr>
+        <p:spPr>
+          <a:xfrm xmlns:a="http://schemas.openxmlformats.org/drawingml/2006/main">
+            <a:off x="8339328" y="1965960"/>
+            <a:ext cx="3017520" cy="457200"/>
           </a:xfrm>
           <a:prstGeom xmlns:a="http://schemas.openxmlformats.org/drawingml/2006/main" prst="rect">
             <a:avLst/>
@@ -2791,13 +2862,13 @@
             <a:r>
               <a:rPr sz="1900" b="1">
                 <a:solidFill>
-                  <a:srgbClr val="FFFFFF"/>
-                </a:solidFill>
-                <a:latin typeface="Calibri"/>
-                <a:ea typeface="Calibri"/>
-                <a:cs typeface="Calibri"/>
-              </a:rPr>
-              <a:t>Sentiment Merchandising</a:t>
+                  <a:srgbClr val="4FD08A"/>
+                </a:solidFill>
+                <a:latin typeface="Calibri"/>
+                <a:ea typeface="Calibri"/>
+                <a:cs typeface="Calibri"/>
+              </a:rPr>
+              <a:t>Phase 3 · Cutover &amp; ML</a:t>
             </a:r>
           </a:p>
         </p:txBody>
@@ -2807,19 +2878,64 @@
           <p:cNvPr id="14" name="Text 12">
             <a:extLst xmlns:a="http://schemas.openxmlformats.org/drawingml/2006/main">
               <a:ext uri="{FF2B5EF4-FFF2-40B4-BE49-F238E27FC236}">
-                <a16:creationId xmlns:a16="http://schemas.microsoft.com/office/drawing/2014/main" id="{12CB2AA0-CFCE-4A7A-AA35-3545473AAE3B}"/>
-              </a:ext>
-            </a:extLst>
-          </p:cNvPr>
-          <p:cNvSpPr>
-            <a:spLocks xmlns:a="http://schemas.openxmlformats.org/drawingml/2006/main" noGrp="1"/>
-          </p:cNvSpPr>
-          <p:nvPr/>
-        </p:nvSpPr>
-        <p:spPr>
-          <a:xfrm xmlns:a="http://schemas.openxmlformats.org/drawingml/2006/main">
-            <a:off x="8339328" y="2697480"/>
-            <a:ext cx="2971800" cy="1280160"/>
+                <a16:creationId xmlns:a16="http://schemas.microsoft.com/office/drawing/2014/main" id="{2841B3B2-85C4-4668-99E8-95364584EA52}"/>
+              </a:ext>
+            </a:extLst>
+          </p:cNvPr>
+          <p:cNvSpPr>
+            <a:spLocks xmlns:a="http://schemas.openxmlformats.org/drawingml/2006/main" noGrp="1"/>
+          </p:cNvSpPr>
+          <p:nvPr/>
+        </p:nvSpPr>
+        <p:spPr>
+          <a:xfrm xmlns:a="http://schemas.openxmlformats.org/drawingml/2006/main">
+            <a:off x="8339328" y="2432304"/>
+            <a:ext cx="3017520" cy="320040"/>
+          </a:xfrm>
+          <a:prstGeom xmlns:a="http://schemas.openxmlformats.org/drawingml/2006/main" prst="rect">
+            <a:avLst/>
+          </a:prstGeom>
+          <a:noFill xmlns:a="http://schemas.openxmlformats.org/drawingml/2006/main"/>
+        </p:spPr>
+        <p:txBody>
+          <a:bodyPr xmlns:a="http://schemas.openxmlformats.org/drawingml/2006/main" wrap="square" lIns="0" tIns="0" rIns="0" bIns="0" anchor="ctr"/>
+          <a:lstStyle xmlns:a="http://schemas.openxmlformats.org/drawingml/2006/main"/>
+          <a:p xmlns:a="http://schemas.openxmlformats.org/drawingml/2006/main">
+            <a:pPr marL="0" indent="0">
+              <a:buNone/>
+            </a:pPr>
+            <a:r>
+              <a:rPr sz="1300" b="1">
+                <a:solidFill>
+                  <a:srgbClr val="9FB0C3"/>
+                </a:solidFill>
+                <a:latin typeface="Calibri"/>
+                <a:ea typeface="Calibri"/>
+                <a:cs typeface="Calibri"/>
+              </a:rPr>
+              <a:t>Months 7–9</a:t>
+            </a:r>
+          </a:p>
+        </p:txBody>
+      </p:sp>
+      <p:sp>
+        <p:nvSpPr>
+          <p:cNvPr id="15" name="Text 13">
+            <a:extLst xmlns:a="http://schemas.openxmlformats.org/drawingml/2006/main">
+              <a:ext uri="{FF2B5EF4-FFF2-40B4-BE49-F238E27FC236}">
+                <a16:creationId xmlns:a16="http://schemas.microsoft.com/office/drawing/2014/main" id="{0DB17314-8A89-424A-8DB8-92DA8DEECCFF}"/>
+              </a:ext>
+            </a:extLst>
+          </p:cNvPr>
+          <p:cNvSpPr>
+            <a:spLocks xmlns:a="http://schemas.openxmlformats.org/drawingml/2006/main" noGrp="1"/>
+          </p:cNvSpPr>
+          <p:nvPr/>
+        </p:nvSpPr>
+        <p:spPr>
+          <a:xfrm xmlns:a="http://schemas.openxmlformats.org/drawingml/2006/main">
+            <a:off x="8339328" y="2834640"/>
+            <a:ext cx="3017520" cy="2103120"/>
           </a:xfrm>
           <a:prstGeom xmlns:a="http://schemas.openxmlformats.org/drawingml/2006/main" prst="rect">
             <a:avLst/>
@@ -2839,103 +2955,58 @@
             <a:r>
               <a:rPr sz="1450">
                 <a:solidFill>
+                  <a:srgbClr val="D6E2F2"/>
+                </a:solidFill>
+                <a:latin typeface="Calibri"/>
+                <a:ea typeface="Calibri"/>
+                <a:cs typeface="Calibri"/>
+              </a:rPr>
+              <a:t>Production live, colocation decommissioned, recommendations + dynamic pricing, security audit, handover.</a:t>
+            </a:r>
+          </a:p>
+        </p:txBody>
+      </p:sp>
+      <p:sp>
+        <p:nvSpPr>
+          <p:cNvPr id="16" name="Text 14">
+            <a:extLst xmlns:a="http://schemas.openxmlformats.org/drawingml/2006/main">
+              <a:ext uri="{FF2B5EF4-FFF2-40B4-BE49-F238E27FC236}">
+                <a16:creationId xmlns:a16="http://schemas.microsoft.com/office/drawing/2014/main" id="{30F4A855-D73A-43A8-8B5A-7B6213424807}"/>
+              </a:ext>
+            </a:extLst>
+          </p:cNvPr>
+          <p:cNvSpPr>
+            <a:spLocks xmlns:a="http://schemas.openxmlformats.org/drawingml/2006/main" noGrp="1"/>
+          </p:cNvSpPr>
+          <p:nvPr/>
+        </p:nvSpPr>
+        <p:spPr>
+          <a:xfrm xmlns:a="http://schemas.openxmlformats.org/drawingml/2006/main">
+            <a:off x="640080" y="5440680"/>
+            <a:ext cx="10972800" cy="457200"/>
+          </a:xfrm>
+          <a:prstGeom xmlns:a="http://schemas.openxmlformats.org/drawingml/2006/main" prst="rect">
+            <a:avLst/>
+          </a:prstGeom>
+          <a:noFill xmlns:a="http://schemas.openxmlformats.org/drawingml/2006/main"/>
+        </p:spPr>
+        <p:txBody>
+          <a:bodyPr xmlns:a="http://schemas.openxmlformats.org/drawingml/2006/main" wrap="square" lIns="0" tIns="0" rIns="0" bIns="0" anchor="ctr"/>
+          <a:lstStyle xmlns:a="http://schemas.openxmlformats.org/drawingml/2006/main"/>
+          <a:p xmlns:a="http://schemas.openxmlformats.org/drawingml/2006/main">
+            <a:pPr marL="0" indent="0">
+              <a:buNone/>
+            </a:pPr>
+            <a:r>
+              <a:rPr sz="1400" i="1">
+                <a:solidFill>
                   <a:srgbClr val="9FB0C3"/>
                 </a:solidFill>
                 <a:latin typeface="Calibri"/>
                 <a:ea typeface="Calibri"/>
                 <a:cs typeface="Calibri"/>
               </a:rPr>
-              <a:t>Comprehend NLP on reviews, alerts to buyers</a:t>
-            </a:r>
-          </a:p>
-        </p:txBody>
-      </p:sp>
-      <p:sp>
-        <p:nvSpPr>
-          <p:cNvPr id="15" name="Text 13">
-            <a:extLst xmlns:a="http://schemas.openxmlformats.org/drawingml/2006/main">
-              <a:ext uri="{FF2B5EF4-FFF2-40B4-BE49-F238E27FC236}">
-                <a16:creationId xmlns:a16="http://schemas.microsoft.com/office/drawing/2014/main" id="{B7B68124-7266-46EA-9BC3-DBF7563260FC}"/>
-              </a:ext>
-            </a:extLst>
-          </p:cNvPr>
-          <p:cNvSpPr>
-            <a:spLocks xmlns:a="http://schemas.openxmlformats.org/drawingml/2006/main" noGrp="1"/>
-          </p:cNvSpPr>
-          <p:nvPr/>
-        </p:nvSpPr>
-        <p:spPr>
-          <a:xfrm xmlns:a="http://schemas.openxmlformats.org/drawingml/2006/main">
-            <a:off x="8339328" y="4526280"/>
-            <a:ext cx="2971800" cy="640080"/>
-          </a:xfrm>
-          <a:prstGeom xmlns:a="http://schemas.openxmlformats.org/drawingml/2006/main" prst="rect">
-            <a:avLst/>
-          </a:prstGeom>
-          <a:noFill xmlns:a="http://schemas.openxmlformats.org/drawingml/2006/main"/>
-        </p:spPr>
-        <p:txBody>
-          <a:bodyPr xmlns:a="http://schemas.openxmlformats.org/drawingml/2006/main" wrap="square" lIns="0" tIns="0" rIns="0" bIns="0" anchor="ctr"/>
-          <a:lstStyle xmlns:a="http://schemas.openxmlformats.org/drawingml/2006/main"/>
-          <a:p xmlns:a="http://schemas.openxmlformats.org/drawingml/2006/main">
-            <a:pPr marL="0" indent="0">
-              <a:buNone/>
-            </a:pPr>
-            <a:r>
-              <a:rPr sz="1600" b="1">
-                <a:solidFill>
-                  <a:srgbClr val="8A6CF6"/>
-                </a:solidFill>
-                <a:latin typeface="Calibri"/>
-                <a:ea typeface="Calibri"/>
-                <a:cs typeface="Calibri"/>
-              </a:rPr>
-              <a:t>2–3 weeks' earlier warning</a:t>
-            </a:r>
-          </a:p>
-        </p:txBody>
-      </p:sp>
-      <p:sp>
-        <p:nvSpPr>
-          <p:cNvPr id="16" name="Text 14">
-            <a:extLst xmlns:a="http://schemas.openxmlformats.org/drawingml/2006/main">
-              <a:ext uri="{FF2B5EF4-FFF2-40B4-BE49-F238E27FC236}">
-                <a16:creationId xmlns:a16="http://schemas.microsoft.com/office/drawing/2014/main" id="{B4248B0E-AE44-4AD0-9016-0105B3E4B4BB}"/>
-              </a:ext>
-            </a:extLst>
-          </p:cNvPr>
-          <p:cNvSpPr>
-            <a:spLocks xmlns:a="http://schemas.openxmlformats.org/drawingml/2006/main" noGrp="1"/>
-          </p:cNvSpPr>
-          <p:nvPr/>
-        </p:nvSpPr>
-        <p:spPr>
-          <a:xfrm xmlns:a="http://schemas.openxmlformats.org/drawingml/2006/main">
-            <a:off x="640080" y="5486400"/>
-            <a:ext cx="10972800" cy="457200"/>
-          </a:xfrm>
-          <a:prstGeom xmlns:a="http://schemas.openxmlformats.org/drawingml/2006/main" prst="rect">
-            <a:avLst/>
-          </a:prstGeom>
-          <a:noFill xmlns:a="http://schemas.openxmlformats.org/drawingml/2006/main"/>
-        </p:spPr>
-        <p:txBody>
-          <a:bodyPr xmlns:a="http://schemas.openxmlformats.org/drawingml/2006/main" wrap="square" lIns="0" tIns="0" rIns="0" bIns="0" anchor="ctr"/>
-          <a:lstStyle xmlns:a="http://schemas.openxmlformats.org/drawingml/2006/main"/>
-          <a:p xmlns:a="http://schemas.openxmlformats.org/drawingml/2006/main">
-            <a:pPr marL="0" indent="0">
-              <a:buNone/>
-            </a:pPr>
-            <a:r>
-              <a:rPr sz="1400" i="1">
-                <a:solidFill>
-                  <a:srgbClr val="9FB0C3"/>
-                </a:solidFill>
-                <a:latin typeface="Calibri"/>
-                <a:ea typeface="Calibri"/>
-                <a:cs typeface="Calibri"/>
-              </a:rPr>
-              <a:t>Plus dynamic pricing (+3–7% margin) and return-rate optimisation (−10–15% processing cost).</a:t>
+              <a:t>Key risks mitigated: parallel DMS CDC before cutover · open-source for lock-in · DPIA before any personal data.</a:t>
             </a:r>
           </a:p>
         </p:txBody>
@@ -2943,7 +3014,7 @@
     </p:spTree>
     <p:extLst>
       <p:ext uri="{BB962C8B-B14F-4D97-AF65-F5344CB8AC3E}">
-        <p14:creationId xmlns:p14="http://schemas.microsoft.com/office/powerpoint/2010/main" val="1124199445"/>
+        <p14:creationId xmlns:p14="http://schemas.microsoft.com/office/powerpoint/2010/main" val="2078827544"/>
       </p:ext>
     </p:extLst>
   </p:cSld>
@@ -2974,7 +3045,7 @@
           <p:cNvPr id="2" name="Text 0">
             <a:extLst xmlns:a="http://schemas.openxmlformats.org/drawingml/2006/main">
               <a:ext uri="{FF2B5EF4-FFF2-40B4-BE49-F238E27FC236}">
-                <a16:creationId xmlns:a16="http://schemas.microsoft.com/office/drawing/2014/main" id="{AF39D247-FB22-4FDE-A97C-96540A95B0AA}"/>
+                <a16:creationId xmlns:a16="http://schemas.microsoft.com/office/drawing/2014/main" id="{97F0F7BF-357F-46DE-BC94-1F49FBC2452C}"/>
               </a:ext>
             </a:extLst>
           </p:cNvPr>
@@ -3009,7 +3080,7 @@
                 <a:ea typeface="Calibri"/>
                 <a:cs typeface="Calibri"/>
               </a:rPr>
-              <a:t>SECTION 6</a:t>
+              <a:t>SECTION 5</a:t>
             </a:r>
           </a:p>
         </p:txBody>
@@ -3019,7 +3090,7 @@
           <p:cNvPr id="3" name="Text 1">
             <a:extLst xmlns:a="http://schemas.openxmlformats.org/drawingml/2006/main">
               <a:ext uri="{FF2B5EF4-FFF2-40B4-BE49-F238E27FC236}">
-                <a16:creationId xmlns:a16="http://schemas.microsoft.com/office/drawing/2014/main" id="{B62B0775-A3F9-4BA7-9A98-27ACF4D66347}"/>
+                <a16:creationId xmlns:a16="http://schemas.microsoft.com/office/drawing/2014/main" id="{17144D56-D12A-4343-BD6E-92D50D24594A}"/>
               </a:ext>
             </a:extLst>
           </p:cNvPr>
@@ -3054,7 +3125,7 @@
                 <a:ea typeface="Calibri"/>
                 <a:cs typeface="Calibri"/>
               </a:rPr>
-              <a:t>A platform that keeps compounding value</a:t>
+              <a:t>What it unlocks — ML use cases on real data</a:t>
             </a:r>
           </a:p>
         </p:txBody>
@@ -3064,7 +3135,7 @@
           <p:cNvPr id="4" name="Shape 2">
             <a:extLst xmlns:a="http://schemas.openxmlformats.org/drawingml/2006/main">
               <a:ext uri="{FF2B5EF4-FFF2-40B4-BE49-F238E27FC236}">
-                <a16:creationId xmlns:a16="http://schemas.microsoft.com/office/drawing/2014/main" id="{F18A246D-9343-4372-8929-48BE6101C058}"/>
+                <a16:creationId xmlns:a16="http://schemas.microsoft.com/office/drawing/2014/main" id="{B2E16DC0-0EA0-489B-ABB8-30D85323337E}"/>
               </a:ext>
             </a:extLst>
           </p:cNvPr>
@@ -3076,11 +3147,11 @@
         <p:spPr>
           <a:xfrm xmlns:a="http://schemas.openxmlformats.org/drawingml/2006/main">
             <a:off x="640080" y="1737360"/>
-            <a:ext cx="10972800" cy="1298448"/>
+            <a:ext cx="3474720" cy="3566160"/>
           </a:xfrm>
           <a:prstGeom xmlns:a="http://schemas.openxmlformats.org/drawingml/2006/main" prst="roundRect">
             <a:avLst>
-              <a:gd name="adj" fmla="val 6338"/>
+              <a:gd name="adj" fmla="val 2368"/>
             </a:avLst>
           </a:prstGeom>
           <a:solidFill xmlns:a="http://schemas.openxmlformats.org/drawingml/2006/main">
@@ -3106,19 +3177,19 @@
           <p:cNvPr id="5" name="Text 3">
             <a:extLst xmlns:a="http://schemas.openxmlformats.org/drawingml/2006/main">
               <a:ext uri="{FF2B5EF4-FFF2-40B4-BE49-F238E27FC236}">
-                <a16:creationId xmlns:a16="http://schemas.microsoft.com/office/drawing/2014/main" id="{0BAF6590-10C1-4CA4-B7FF-DE15396B0CFC}"/>
-              </a:ext>
-            </a:extLst>
-          </p:cNvPr>
-          <p:cNvSpPr>
-            <a:spLocks xmlns:a="http://schemas.openxmlformats.org/drawingml/2006/main" noGrp="1"/>
-          </p:cNvSpPr>
-          <p:nvPr/>
-        </p:nvSpPr>
-        <p:spPr>
-          <a:xfrm xmlns:a="http://schemas.openxmlformats.org/drawingml/2006/main">
-            <a:off x="960120" y="1920240"/>
-            <a:ext cx="3291840" cy="914400"/>
+                <a16:creationId xmlns:a16="http://schemas.microsoft.com/office/drawing/2014/main" id="{6019BEE5-FAB5-41F1-BE51-C7424DAC5A06}"/>
+              </a:ext>
+            </a:extLst>
+          </p:cNvPr>
+          <p:cNvSpPr>
+            <a:spLocks xmlns:a="http://schemas.openxmlformats.org/drawingml/2006/main" noGrp="1"/>
+          </p:cNvSpPr>
+          <p:nvPr/>
+        </p:nvSpPr>
+        <p:spPr>
+          <a:xfrm xmlns:a="http://schemas.openxmlformats.org/drawingml/2006/main">
+            <a:off x="896112" y="1993392"/>
+            <a:ext cx="2971800" cy="640080"/>
           </a:xfrm>
           <a:prstGeom xmlns:a="http://schemas.openxmlformats.org/drawingml/2006/main" prst="rect">
             <a:avLst/>
@@ -3133,15 +3204,15 @@
               <a:buNone/>
             </a:pPr>
             <a:r>
-              <a:rPr sz="1800" b="1">
-                <a:solidFill>
-                  <a:srgbClr val="2E9BFF"/>
-                </a:solidFill>
-                <a:latin typeface="Calibri"/>
-                <a:ea typeface="Calibri"/>
-                <a:cs typeface="Calibri"/>
-              </a:rPr>
-              <a:t>Short-term · 10–18 mo</a:t>
+              <a:rPr sz="1900" b="1">
+                <a:solidFill>
+                  <a:srgbClr val="FFFFFF"/>
+                </a:solidFill>
+                <a:latin typeface="Calibri"/>
+                <a:ea typeface="Calibri"/>
+                <a:cs typeface="Calibri"/>
+              </a:rPr>
+              <a:t>Demand Forecasting</a:t>
             </a:r>
           </a:p>
         </p:txBody>
@@ -3151,19 +3222,19 @@
           <p:cNvPr id="6" name="Text 4">
             <a:extLst xmlns:a="http://schemas.openxmlformats.org/drawingml/2006/main">
               <a:ext uri="{FF2B5EF4-FFF2-40B4-BE49-F238E27FC236}">
-                <a16:creationId xmlns:a16="http://schemas.microsoft.com/office/drawing/2014/main" id="{2C3F2881-9357-48C1-BA34-02E2A4DDA481}"/>
-              </a:ext>
-            </a:extLst>
-          </p:cNvPr>
-          <p:cNvSpPr>
-            <a:spLocks xmlns:a="http://schemas.openxmlformats.org/drawingml/2006/main" noGrp="1"/>
-          </p:cNvSpPr>
-          <p:nvPr/>
-        </p:nvSpPr>
-        <p:spPr>
-          <a:xfrm xmlns:a="http://schemas.openxmlformats.org/drawingml/2006/main">
-            <a:off x="4389120" y="1920240"/>
-            <a:ext cx="6949440" cy="914400"/>
+                <a16:creationId xmlns:a16="http://schemas.microsoft.com/office/drawing/2014/main" id="{E178227D-E73B-4633-9EB1-E76CA5928B5C}"/>
+              </a:ext>
+            </a:extLst>
+          </p:cNvPr>
+          <p:cNvSpPr>
+            <a:spLocks xmlns:a="http://schemas.openxmlformats.org/drawingml/2006/main" noGrp="1"/>
+          </p:cNvSpPr>
+          <p:nvPr/>
+        </p:nvSpPr>
+        <p:spPr>
+          <a:xfrm xmlns:a="http://schemas.openxmlformats.org/drawingml/2006/main">
+            <a:off x="896112" y="2697480"/>
+            <a:ext cx="2971800" cy="1280160"/>
           </a:xfrm>
           <a:prstGeom xmlns:a="http://schemas.openxmlformats.org/drawingml/2006/main" prst="rect">
             <a:avLst/>
@@ -3176,46 +3247,91 @@
           <a:p xmlns:a="http://schemas.openxmlformats.org/drawingml/2006/main">
             <a:pPr marL="0" indent="0">
               <a:lnSpc>
-                <a:spcPct val="110000"/>
+                <a:spcPct val="115000"/>
               </a:lnSpc>
               <a:buNone/>
             </a:pPr>
             <a:r>
-              <a:rPr sz="1550">
-                <a:solidFill>
-                  <a:srgbClr val="D6E2F2"/>
-                </a:solidFill>
-                <a:latin typeface="Calibri"/>
-                <a:ea typeface="Calibri"/>
-                <a:cs typeface="Calibri"/>
-              </a:rPr>
-              <a:t>Real-time personalisation · supply-chain smart labels · advanced data-quality suites</a:t>
-            </a:r>
-          </a:p>
-        </p:txBody>
-      </p:sp>
-      <p:sp>
-        <p:nvSpPr>
-          <p:cNvPr id="7" name="Shape 5">
-            <a:extLst xmlns:a="http://schemas.openxmlformats.org/drawingml/2006/main">
-              <a:ext uri="{FF2B5EF4-FFF2-40B4-BE49-F238E27FC236}">
-                <a16:creationId xmlns:a16="http://schemas.microsoft.com/office/drawing/2014/main" id="{A9C4D3CA-AC8E-48E2-B20C-B0A025A403A5}"/>
-              </a:ext>
-            </a:extLst>
-          </p:cNvPr>
-          <p:cNvSpPr>
-            <a:spLocks xmlns:a="http://schemas.openxmlformats.org/drawingml/2006/main" noGrp="1"/>
-          </p:cNvSpPr>
-          <p:nvPr/>
-        </p:nvSpPr>
-        <p:spPr>
-          <a:xfrm xmlns:a="http://schemas.openxmlformats.org/drawingml/2006/main">
-            <a:off x="640080" y="3218688"/>
-            <a:ext cx="10972800" cy="1298448"/>
+              <a:rPr sz="1450">
+                <a:solidFill>
+                  <a:srgbClr val="9FB0C3"/>
+                </a:solidFill>
+                <a:latin typeface="Calibri"/>
+                <a:ea typeface="Calibri"/>
+                <a:cs typeface="Calibri"/>
+              </a:rPr>
+              <a:t>SageMaker DeepAR on sales + weather + events</a:t>
+            </a:r>
+          </a:p>
+        </p:txBody>
+      </p:sp>
+      <p:sp>
+        <p:nvSpPr>
+          <p:cNvPr id="7" name="Text 5">
+            <a:extLst xmlns:a="http://schemas.openxmlformats.org/drawingml/2006/main">
+              <a:ext uri="{FF2B5EF4-FFF2-40B4-BE49-F238E27FC236}">
+                <a16:creationId xmlns:a16="http://schemas.microsoft.com/office/drawing/2014/main" id="{A7540500-FA0E-4FD1-A9D1-F2088A63EE44}"/>
+              </a:ext>
+            </a:extLst>
+          </p:cNvPr>
+          <p:cNvSpPr>
+            <a:spLocks xmlns:a="http://schemas.openxmlformats.org/drawingml/2006/main" noGrp="1"/>
+          </p:cNvSpPr>
+          <p:nvPr/>
+        </p:nvSpPr>
+        <p:spPr>
+          <a:xfrm xmlns:a="http://schemas.openxmlformats.org/drawingml/2006/main">
+            <a:off x="896112" y="4526280"/>
+            <a:ext cx="2971800" cy="640080"/>
+          </a:xfrm>
+          <a:prstGeom xmlns:a="http://schemas.openxmlformats.org/drawingml/2006/main" prst="rect">
+            <a:avLst/>
+          </a:prstGeom>
+          <a:noFill xmlns:a="http://schemas.openxmlformats.org/drawingml/2006/main"/>
+        </p:spPr>
+        <p:txBody>
+          <a:bodyPr xmlns:a="http://schemas.openxmlformats.org/drawingml/2006/main" wrap="square" lIns="0" tIns="0" rIns="0" bIns="0" anchor="ctr"/>
+          <a:lstStyle xmlns:a="http://schemas.openxmlformats.org/drawingml/2006/main"/>
+          <a:p xmlns:a="http://schemas.openxmlformats.org/drawingml/2006/main">
+            <a:pPr marL="0" indent="0">
+              <a:buNone/>
+            </a:pPr>
+            <a:r>
+              <a:rPr sz="1600" b="1">
+                <a:solidFill>
+                  <a:srgbClr val="4FD08A"/>
+                </a:solidFill>
+                <a:latin typeface="Calibri"/>
+                <a:ea typeface="Calibri"/>
+                <a:cs typeface="Calibri"/>
+              </a:rPr>
+              <a:t>−30% stockouts · −20% overstock</a:t>
+            </a:r>
+          </a:p>
+        </p:txBody>
+      </p:sp>
+      <p:sp>
+        <p:nvSpPr>
+          <p:cNvPr id="8" name="Shape 6">
+            <a:extLst xmlns:a="http://schemas.openxmlformats.org/drawingml/2006/main">
+              <a:ext uri="{FF2B5EF4-FFF2-40B4-BE49-F238E27FC236}">
+                <a16:creationId xmlns:a16="http://schemas.microsoft.com/office/drawing/2014/main" id="{C4E41513-3C40-4572-BAE6-8709F31913DB}"/>
+              </a:ext>
+            </a:extLst>
+          </p:cNvPr>
+          <p:cNvSpPr>
+            <a:spLocks xmlns:a="http://schemas.openxmlformats.org/drawingml/2006/main" noGrp="1"/>
+          </p:cNvSpPr>
+          <p:nvPr/>
+        </p:nvSpPr>
+        <p:spPr>
+          <a:xfrm xmlns:a="http://schemas.openxmlformats.org/drawingml/2006/main">
+            <a:off x="4361688" y="1737360"/>
+            <a:ext cx="3474720" cy="3566160"/>
           </a:xfrm>
           <a:prstGeom xmlns:a="http://schemas.openxmlformats.org/drawingml/2006/main" prst="roundRect">
             <a:avLst>
-              <a:gd name="adj" fmla="val 6338"/>
+              <a:gd name="adj" fmla="val 2368"/>
             </a:avLst>
           </a:prstGeom>
           <a:solidFill xmlns:a="http://schemas.openxmlformats.org/drawingml/2006/main">
@@ -3238,22 +3354,22 @@
       </p:sp>
       <p:sp>
         <p:nvSpPr>
-          <p:cNvPr id="8" name="Text 6">
-            <a:extLst xmlns:a="http://schemas.openxmlformats.org/drawingml/2006/main">
-              <a:ext uri="{FF2B5EF4-FFF2-40B4-BE49-F238E27FC236}">
-                <a16:creationId xmlns:a16="http://schemas.microsoft.com/office/drawing/2014/main" id="{E1FE9C99-E80E-469C-AD97-5B8D1A4CA9E5}"/>
-              </a:ext>
-            </a:extLst>
-          </p:cNvPr>
-          <p:cNvSpPr>
-            <a:spLocks xmlns:a="http://schemas.openxmlformats.org/drawingml/2006/main" noGrp="1"/>
-          </p:cNvSpPr>
-          <p:nvPr/>
-        </p:nvSpPr>
-        <p:spPr>
-          <a:xfrm xmlns:a="http://schemas.openxmlformats.org/drawingml/2006/main">
-            <a:off x="960120" y="3401568"/>
-            <a:ext cx="3291840" cy="914400"/>
+          <p:cNvPr id="9" name="Text 7">
+            <a:extLst xmlns:a="http://schemas.openxmlformats.org/drawingml/2006/main">
+              <a:ext uri="{FF2B5EF4-FFF2-40B4-BE49-F238E27FC236}">
+                <a16:creationId xmlns:a16="http://schemas.microsoft.com/office/drawing/2014/main" id="{60EF4782-D9E1-4202-90DB-225BFCAFF5C3}"/>
+              </a:ext>
+            </a:extLst>
+          </p:cNvPr>
+          <p:cNvSpPr>
+            <a:spLocks xmlns:a="http://schemas.openxmlformats.org/drawingml/2006/main" noGrp="1"/>
+          </p:cNvSpPr>
+          <p:nvPr/>
+        </p:nvSpPr>
+        <p:spPr>
+          <a:xfrm xmlns:a="http://schemas.openxmlformats.org/drawingml/2006/main">
+            <a:off x="4617720" y="1993392"/>
+            <a:ext cx="2971800" cy="640080"/>
           </a:xfrm>
           <a:prstGeom xmlns:a="http://schemas.openxmlformats.org/drawingml/2006/main" prst="rect">
             <a:avLst/>
@@ -3268,37 +3384,37 @@
               <a:buNone/>
             </a:pPr>
             <a:r>
-              <a:rPr sz="1800" b="1">
-                <a:solidFill>
-                  <a:srgbClr val="8A6CF6"/>
-                </a:solidFill>
-                <a:latin typeface="Calibri"/>
-                <a:ea typeface="Calibri"/>
-                <a:cs typeface="Calibri"/>
-              </a:rPr>
-              <a:t>Medium-term · 18–30 mo</a:t>
-            </a:r>
-          </a:p>
-        </p:txBody>
-      </p:sp>
-      <p:sp>
-        <p:nvSpPr>
-          <p:cNvPr id="9" name="Text 7">
-            <a:extLst xmlns:a="http://schemas.openxmlformats.org/drawingml/2006/main">
-              <a:ext uri="{FF2B5EF4-FFF2-40B4-BE49-F238E27FC236}">
-                <a16:creationId xmlns:a16="http://schemas.microsoft.com/office/drawing/2014/main" id="{CB789598-390D-4A0E-A1B4-388731EBBE80}"/>
-              </a:ext>
-            </a:extLst>
-          </p:cNvPr>
-          <p:cNvSpPr>
-            <a:spLocks xmlns:a="http://schemas.openxmlformats.org/drawingml/2006/main" noGrp="1"/>
-          </p:cNvSpPr>
-          <p:nvPr/>
-        </p:nvSpPr>
-        <p:spPr>
-          <a:xfrm xmlns:a="http://schemas.openxmlformats.org/drawingml/2006/main">
-            <a:off x="4389120" y="3401568"/>
-            <a:ext cx="6949440" cy="914400"/>
+              <a:rPr sz="1900" b="1">
+                <a:solidFill>
+                  <a:srgbClr val="FFFFFF"/>
+                </a:solidFill>
+                <a:latin typeface="Calibri"/>
+                <a:ea typeface="Calibri"/>
+                <a:cs typeface="Calibri"/>
+              </a:rPr>
+              <a:t>Product Recommendations</a:t>
+            </a:r>
+          </a:p>
+        </p:txBody>
+      </p:sp>
+      <p:sp>
+        <p:nvSpPr>
+          <p:cNvPr id="10" name="Text 8">
+            <a:extLst xmlns:a="http://schemas.openxmlformats.org/drawingml/2006/main">
+              <a:ext uri="{FF2B5EF4-FFF2-40B4-BE49-F238E27FC236}">
+                <a16:creationId xmlns:a16="http://schemas.microsoft.com/office/drawing/2014/main" id="{FD978B26-7877-4116-9051-D5C275654A68}"/>
+              </a:ext>
+            </a:extLst>
+          </p:cNvPr>
+          <p:cNvSpPr>
+            <a:spLocks xmlns:a="http://schemas.openxmlformats.org/drawingml/2006/main" noGrp="1"/>
+          </p:cNvSpPr>
+          <p:nvPr/>
+        </p:nvSpPr>
+        <p:spPr>
+          <a:xfrm xmlns:a="http://schemas.openxmlformats.org/drawingml/2006/main">
+            <a:off x="4617720" y="2697480"/>
+            <a:ext cx="2971800" cy="1280160"/>
           </a:xfrm>
           <a:prstGeom xmlns:a="http://schemas.openxmlformats.org/drawingml/2006/main" prst="rect">
             <a:avLst/>
@@ -3311,46 +3427,91 @@
           <a:p xmlns:a="http://schemas.openxmlformats.org/drawingml/2006/main">
             <a:pPr marL="0" indent="0">
               <a:lnSpc>
-                <a:spcPct val="110000"/>
+                <a:spcPct val="115000"/>
               </a:lnSpc>
               <a:buNone/>
             </a:pPr>
             <a:r>
-              <a:rPr sz="1550">
-                <a:solidFill>
-                  <a:srgbClr val="D6E2F2"/>
-                </a:solidFill>
-                <a:latin typeface="Calibri"/>
-                <a:ea typeface="Calibri"/>
-                <a:cs typeface="Calibri"/>
-              </a:rPr>
-              <a:t>Bedrock virtual shopping assistant · external data monetisation · data mesh</a:t>
-            </a:r>
-          </a:p>
-        </p:txBody>
-      </p:sp>
-      <p:sp>
-        <p:nvSpPr>
-          <p:cNvPr id="10" name="Shape 8">
-            <a:extLst xmlns:a="http://schemas.openxmlformats.org/drawingml/2006/main">
-              <a:ext uri="{FF2B5EF4-FFF2-40B4-BE49-F238E27FC236}">
-                <a16:creationId xmlns:a16="http://schemas.microsoft.com/office/drawing/2014/main" id="{921DF04D-CFE7-4434-986F-C044A5EE6A08}"/>
-              </a:ext>
-            </a:extLst>
-          </p:cNvPr>
-          <p:cNvSpPr>
-            <a:spLocks xmlns:a="http://schemas.openxmlformats.org/drawingml/2006/main" noGrp="1"/>
-          </p:cNvSpPr>
-          <p:nvPr/>
-        </p:nvSpPr>
-        <p:spPr>
-          <a:xfrm xmlns:a="http://schemas.openxmlformats.org/drawingml/2006/main">
-            <a:off x="640080" y="4700016"/>
-            <a:ext cx="10972800" cy="1298448"/>
+              <a:rPr sz="1450">
+                <a:solidFill>
+                  <a:srgbClr val="9FB0C3"/>
+                </a:solidFill>
+                <a:latin typeface="Calibri"/>
+                <a:ea typeface="Calibri"/>
+                <a:cs typeface="Calibri"/>
+              </a:rPr>
+              <a:t>Collaborative filtering, served at ≤5ms via DynamoDB</a:t>
+            </a:r>
+          </a:p>
+        </p:txBody>
+      </p:sp>
+      <p:sp>
+        <p:nvSpPr>
+          <p:cNvPr id="11" name="Text 9">
+            <a:extLst xmlns:a="http://schemas.openxmlformats.org/drawingml/2006/main">
+              <a:ext uri="{FF2B5EF4-FFF2-40B4-BE49-F238E27FC236}">
+                <a16:creationId xmlns:a16="http://schemas.microsoft.com/office/drawing/2014/main" id="{F783C6FB-642F-4C2F-95DC-A9776D779F33}"/>
+              </a:ext>
+            </a:extLst>
+          </p:cNvPr>
+          <p:cNvSpPr>
+            <a:spLocks xmlns:a="http://schemas.openxmlformats.org/drawingml/2006/main" noGrp="1"/>
+          </p:cNvSpPr>
+          <p:nvPr/>
+        </p:nvSpPr>
+        <p:spPr>
+          <a:xfrm xmlns:a="http://schemas.openxmlformats.org/drawingml/2006/main">
+            <a:off x="4617720" y="4526280"/>
+            <a:ext cx="2971800" cy="640080"/>
+          </a:xfrm>
+          <a:prstGeom xmlns:a="http://schemas.openxmlformats.org/drawingml/2006/main" prst="rect">
+            <a:avLst/>
+          </a:prstGeom>
+          <a:noFill xmlns:a="http://schemas.openxmlformats.org/drawingml/2006/main"/>
+        </p:spPr>
+        <p:txBody>
+          <a:bodyPr xmlns:a="http://schemas.openxmlformats.org/drawingml/2006/main" wrap="square" lIns="0" tIns="0" rIns="0" bIns="0" anchor="ctr"/>
+          <a:lstStyle xmlns:a="http://schemas.openxmlformats.org/drawingml/2006/main"/>
+          <a:p xmlns:a="http://schemas.openxmlformats.org/drawingml/2006/main">
+            <a:pPr marL="0" indent="0">
+              <a:buNone/>
+            </a:pPr>
+            <a:r>
+              <a:rPr sz="1600" b="1">
+                <a:solidFill>
+                  <a:srgbClr val="2E9BFF"/>
+                </a:solidFill>
+                <a:latin typeface="Calibri"/>
+                <a:ea typeface="Calibri"/>
+                <a:cs typeface="Calibri"/>
+              </a:rPr>
+              <a:t>+12–18% average order value</a:t>
+            </a:r>
+          </a:p>
+        </p:txBody>
+      </p:sp>
+      <p:sp>
+        <p:nvSpPr>
+          <p:cNvPr id="12" name="Shape 10">
+            <a:extLst xmlns:a="http://schemas.openxmlformats.org/drawingml/2006/main">
+              <a:ext uri="{FF2B5EF4-FFF2-40B4-BE49-F238E27FC236}">
+                <a16:creationId xmlns:a16="http://schemas.microsoft.com/office/drawing/2014/main" id="{C1237148-C9FC-480C-843A-4AB34DF41243}"/>
+              </a:ext>
+            </a:extLst>
+          </p:cNvPr>
+          <p:cNvSpPr>
+            <a:spLocks xmlns:a="http://schemas.openxmlformats.org/drawingml/2006/main" noGrp="1"/>
+          </p:cNvSpPr>
+          <p:nvPr/>
+        </p:nvSpPr>
+        <p:spPr>
+          <a:xfrm xmlns:a="http://schemas.openxmlformats.org/drawingml/2006/main">
+            <a:off x="8083296" y="1737360"/>
+            <a:ext cx="3474720" cy="3566160"/>
           </a:xfrm>
           <a:prstGeom xmlns:a="http://schemas.openxmlformats.org/drawingml/2006/main" prst="roundRect">
             <a:avLst>
-              <a:gd name="adj" fmla="val 6338"/>
+              <a:gd name="adj" fmla="val 2368"/>
             </a:avLst>
           </a:prstGeom>
           <a:solidFill xmlns:a="http://schemas.openxmlformats.org/drawingml/2006/main">
@@ -3373,22 +3534,22 @@
       </p:sp>
       <p:sp>
         <p:nvSpPr>
-          <p:cNvPr id="11" name="Text 9">
-            <a:extLst xmlns:a="http://schemas.openxmlformats.org/drawingml/2006/main">
-              <a:ext uri="{FF2B5EF4-FFF2-40B4-BE49-F238E27FC236}">
-                <a16:creationId xmlns:a16="http://schemas.microsoft.com/office/drawing/2014/main" id="{C8C19642-8362-4361-801D-5046CC38012D}"/>
-              </a:ext>
-            </a:extLst>
-          </p:cNvPr>
-          <p:cNvSpPr>
-            <a:spLocks xmlns:a="http://schemas.openxmlformats.org/drawingml/2006/main" noGrp="1"/>
-          </p:cNvSpPr>
-          <p:nvPr/>
-        </p:nvSpPr>
-        <p:spPr>
-          <a:xfrm xmlns:a="http://schemas.openxmlformats.org/drawingml/2006/main">
-            <a:off x="960120" y="4882896"/>
-            <a:ext cx="3291840" cy="914400"/>
+          <p:cNvPr id="13" name="Text 11">
+            <a:extLst xmlns:a="http://schemas.openxmlformats.org/drawingml/2006/main">
+              <a:ext uri="{FF2B5EF4-FFF2-40B4-BE49-F238E27FC236}">
+                <a16:creationId xmlns:a16="http://schemas.microsoft.com/office/drawing/2014/main" id="{8A20581C-0531-4BB4-AB20-6CC845062AD2}"/>
+              </a:ext>
+            </a:extLst>
+          </p:cNvPr>
+          <p:cNvSpPr>
+            <a:spLocks xmlns:a="http://schemas.openxmlformats.org/drawingml/2006/main" noGrp="1"/>
+          </p:cNvSpPr>
+          <p:nvPr/>
+        </p:nvSpPr>
+        <p:spPr>
+          <a:xfrm xmlns:a="http://schemas.openxmlformats.org/drawingml/2006/main">
+            <a:off x="8339328" y="1993392"/>
+            <a:ext cx="2971800" cy="640080"/>
           </a:xfrm>
           <a:prstGeom xmlns:a="http://schemas.openxmlformats.org/drawingml/2006/main" prst="rect">
             <a:avLst/>
@@ -3403,37 +3564,37 @@
               <a:buNone/>
             </a:pPr>
             <a:r>
-              <a:rPr sz="1800" b="1">
-                <a:solidFill>
-                  <a:srgbClr val="4FD08A"/>
-                </a:solidFill>
-                <a:latin typeface="Calibri"/>
-                <a:ea typeface="Calibri"/>
-                <a:cs typeface="Calibri"/>
-              </a:rPr>
-              <a:t>Long-term · 30+ mo</a:t>
-            </a:r>
-          </a:p>
-        </p:txBody>
-      </p:sp>
-      <p:sp>
-        <p:nvSpPr>
-          <p:cNvPr id="12" name="Text 10">
-            <a:extLst xmlns:a="http://schemas.openxmlformats.org/drawingml/2006/main">
-              <a:ext uri="{FF2B5EF4-FFF2-40B4-BE49-F238E27FC236}">
-                <a16:creationId xmlns:a16="http://schemas.microsoft.com/office/drawing/2014/main" id="{66137B0A-52A8-4F0E-A42E-C3BA79762296}"/>
-              </a:ext>
-            </a:extLst>
-          </p:cNvPr>
-          <p:cNvSpPr>
-            <a:spLocks xmlns:a="http://schemas.openxmlformats.org/drawingml/2006/main" noGrp="1"/>
-          </p:cNvSpPr>
-          <p:nvPr/>
-        </p:nvSpPr>
-        <p:spPr>
-          <a:xfrm xmlns:a="http://schemas.openxmlformats.org/drawingml/2006/main">
-            <a:off x="4389120" y="4882896"/>
-            <a:ext cx="6949440" cy="914400"/>
+              <a:rPr sz="1900" b="1">
+                <a:solidFill>
+                  <a:srgbClr val="FFFFFF"/>
+                </a:solidFill>
+                <a:latin typeface="Calibri"/>
+                <a:ea typeface="Calibri"/>
+                <a:cs typeface="Calibri"/>
+              </a:rPr>
+              <a:t>Sentiment Merchandising</a:t>
+            </a:r>
+          </a:p>
+        </p:txBody>
+      </p:sp>
+      <p:sp>
+        <p:nvSpPr>
+          <p:cNvPr id="14" name="Text 12">
+            <a:extLst xmlns:a="http://schemas.openxmlformats.org/drawingml/2006/main">
+              <a:ext uri="{FF2B5EF4-FFF2-40B4-BE49-F238E27FC236}">
+                <a16:creationId xmlns:a16="http://schemas.microsoft.com/office/drawing/2014/main" id="{12CB2AA0-CFCE-4A7A-AA35-3545473AAE3B}"/>
+              </a:ext>
+            </a:extLst>
+          </p:cNvPr>
+          <p:cNvSpPr>
+            <a:spLocks xmlns:a="http://schemas.openxmlformats.org/drawingml/2006/main" noGrp="1"/>
+          </p:cNvSpPr>
+          <p:nvPr/>
+        </p:nvSpPr>
+        <p:spPr>
+          <a:xfrm xmlns:a="http://schemas.openxmlformats.org/drawingml/2006/main">
+            <a:off x="8339328" y="2697480"/>
+            <a:ext cx="2971800" cy="1280160"/>
           </a:xfrm>
           <a:prstGeom xmlns:a="http://schemas.openxmlformats.org/drawingml/2006/main" prst="rect">
             <a:avLst/>
@@ -3446,20 +3607,110 @@
           <a:p xmlns:a="http://schemas.openxmlformats.org/drawingml/2006/main">
             <a:pPr marL="0" indent="0">
               <a:lnSpc>
-                <a:spcPct val="110000"/>
+                <a:spcPct val="115000"/>
               </a:lnSpc>
               <a:buNone/>
             </a:pPr>
             <a:r>
-              <a:rPr sz="1550">
-                <a:solidFill>
-                  <a:srgbClr val="D6E2F2"/>
-                </a:solidFill>
-                <a:latin typeface="Calibri"/>
-                <a:ea typeface="Calibri"/>
-                <a:cs typeface="Calibri"/>
-              </a:rPr>
-              <a:t>AI-agent ecosystem · federated ML across partners · carbon-neutrality roadmap</a:t>
+              <a:rPr sz="1450">
+                <a:solidFill>
+                  <a:srgbClr val="9FB0C3"/>
+                </a:solidFill>
+                <a:latin typeface="Calibri"/>
+                <a:ea typeface="Calibri"/>
+                <a:cs typeface="Calibri"/>
+              </a:rPr>
+              <a:t>Comprehend NLP on reviews, alerts to buyers</a:t>
+            </a:r>
+          </a:p>
+        </p:txBody>
+      </p:sp>
+      <p:sp>
+        <p:nvSpPr>
+          <p:cNvPr id="15" name="Text 13">
+            <a:extLst xmlns:a="http://schemas.openxmlformats.org/drawingml/2006/main">
+              <a:ext uri="{FF2B5EF4-FFF2-40B4-BE49-F238E27FC236}">
+                <a16:creationId xmlns:a16="http://schemas.microsoft.com/office/drawing/2014/main" id="{B7B68124-7266-46EA-9BC3-DBF7563260FC}"/>
+              </a:ext>
+            </a:extLst>
+          </p:cNvPr>
+          <p:cNvSpPr>
+            <a:spLocks xmlns:a="http://schemas.openxmlformats.org/drawingml/2006/main" noGrp="1"/>
+          </p:cNvSpPr>
+          <p:nvPr/>
+        </p:nvSpPr>
+        <p:spPr>
+          <a:xfrm xmlns:a="http://schemas.openxmlformats.org/drawingml/2006/main">
+            <a:off x="8339328" y="4526280"/>
+            <a:ext cx="2971800" cy="640080"/>
+          </a:xfrm>
+          <a:prstGeom xmlns:a="http://schemas.openxmlformats.org/drawingml/2006/main" prst="rect">
+            <a:avLst/>
+          </a:prstGeom>
+          <a:noFill xmlns:a="http://schemas.openxmlformats.org/drawingml/2006/main"/>
+        </p:spPr>
+        <p:txBody>
+          <a:bodyPr xmlns:a="http://schemas.openxmlformats.org/drawingml/2006/main" wrap="square" lIns="0" tIns="0" rIns="0" bIns="0" anchor="ctr"/>
+          <a:lstStyle xmlns:a="http://schemas.openxmlformats.org/drawingml/2006/main"/>
+          <a:p xmlns:a="http://schemas.openxmlformats.org/drawingml/2006/main">
+            <a:pPr marL="0" indent="0">
+              <a:buNone/>
+            </a:pPr>
+            <a:r>
+              <a:rPr sz="1600" b="1">
+                <a:solidFill>
+                  <a:srgbClr val="8A6CF6"/>
+                </a:solidFill>
+                <a:latin typeface="Calibri"/>
+                <a:ea typeface="Calibri"/>
+                <a:cs typeface="Calibri"/>
+              </a:rPr>
+              <a:t>2–3 weeks' earlier warning</a:t>
+            </a:r>
+          </a:p>
+        </p:txBody>
+      </p:sp>
+      <p:sp>
+        <p:nvSpPr>
+          <p:cNvPr id="16" name="Text 14">
+            <a:extLst xmlns:a="http://schemas.openxmlformats.org/drawingml/2006/main">
+              <a:ext uri="{FF2B5EF4-FFF2-40B4-BE49-F238E27FC236}">
+                <a16:creationId xmlns:a16="http://schemas.microsoft.com/office/drawing/2014/main" id="{B4248B0E-AE44-4AD0-9016-0105B3E4B4BB}"/>
+              </a:ext>
+            </a:extLst>
+          </p:cNvPr>
+          <p:cNvSpPr>
+            <a:spLocks xmlns:a="http://schemas.openxmlformats.org/drawingml/2006/main" noGrp="1"/>
+          </p:cNvSpPr>
+          <p:nvPr/>
+        </p:nvSpPr>
+        <p:spPr>
+          <a:xfrm xmlns:a="http://schemas.openxmlformats.org/drawingml/2006/main">
+            <a:off x="640080" y="5486400"/>
+            <a:ext cx="10972800" cy="457200"/>
+          </a:xfrm>
+          <a:prstGeom xmlns:a="http://schemas.openxmlformats.org/drawingml/2006/main" prst="rect">
+            <a:avLst/>
+          </a:prstGeom>
+          <a:noFill xmlns:a="http://schemas.openxmlformats.org/drawingml/2006/main"/>
+        </p:spPr>
+        <p:txBody>
+          <a:bodyPr xmlns:a="http://schemas.openxmlformats.org/drawingml/2006/main" wrap="square" lIns="0" tIns="0" rIns="0" bIns="0" anchor="ctr"/>
+          <a:lstStyle xmlns:a="http://schemas.openxmlformats.org/drawingml/2006/main"/>
+          <a:p xmlns:a="http://schemas.openxmlformats.org/drawingml/2006/main">
+            <a:pPr marL="0" indent="0">
+              <a:buNone/>
+            </a:pPr>
+            <a:r>
+              <a:rPr sz="1400" i="1">
+                <a:solidFill>
+                  <a:srgbClr val="9FB0C3"/>
+                </a:solidFill>
+                <a:latin typeface="Calibri"/>
+                <a:ea typeface="Calibri"/>
+                <a:cs typeface="Calibri"/>
+              </a:rPr>
+              <a:t>Plus dynamic pricing (+3–7% margin) and return-rate optimisation (−10–15% processing cost).</a:t>
             </a:r>
           </a:p>
         </p:txBody>
@@ -3467,7 +3718,7 @@
     </p:spTree>
     <p:extLst>
       <p:ext uri="{BB962C8B-B14F-4D97-AF65-F5344CB8AC3E}">
-        <p14:creationId xmlns:p14="http://schemas.microsoft.com/office/powerpoint/2010/main" val="226776170"/>
+        <p14:creationId xmlns:p14="http://schemas.microsoft.com/office/powerpoint/2010/main" val="1124199445"/>
       </p:ext>
     </p:extLst>
   </p:cSld>
@@ -3479,8 +3730,532 @@
   <p:cSld>
     <p:bg>
       <p:bgPr>
+        <a:solidFill xmlns:a="http://schemas.openxmlformats.org/drawingml/2006/main">
+          <a:srgbClr val="0B0E14"/>
+        </a:solidFill>
+      </p:bgPr>
+    </p:bg>
+    <p:spTree>
+      <p:nvGrpSpPr>
+        <p:cNvPr id="1" name=""/>
+        <p:cNvGrpSpPr/>
+        <p:nvPr/>
+      </p:nvGrpSpPr>
+      <p:grpSpPr>
+        <a:xfrm xmlns:a="http://schemas.openxmlformats.org/drawingml/2006/main"/>
+      </p:grpSpPr>
+      <p:sp>
+        <p:nvSpPr>
+          <p:cNvPr id="2" name="Text 0">
+            <a:extLst xmlns:a="http://schemas.openxmlformats.org/drawingml/2006/main">
+              <a:ext uri="{FF2B5EF4-FFF2-40B4-BE49-F238E27FC236}">
+                <a16:creationId xmlns:a16="http://schemas.microsoft.com/office/drawing/2014/main" id="{AF39D247-FB22-4FDE-A97C-96540A95B0AA}"/>
+              </a:ext>
+            </a:extLst>
+          </p:cNvPr>
+          <p:cNvSpPr>
+            <a:spLocks xmlns:a="http://schemas.openxmlformats.org/drawingml/2006/main" noGrp="1"/>
+          </p:cNvSpPr>
+          <p:nvPr/>
+        </p:nvSpPr>
+        <p:spPr>
+          <a:xfrm xmlns:a="http://schemas.openxmlformats.org/drawingml/2006/main">
+            <a:off x="640080" y="420624"/>
+            <a:ext cx="10058400" cy="274320"/>
+          </a:xfrm>
+          <a:prstGeom xmlns:a="http://schemas.openxmlformats.org/drawingml/2006/main" prst="rect">
+            <a:avLst/>
+          </a:prstGeom>
+          <a:noFill xmlns:a="http://schemas.openxmlformats.org/drawingml/2006/main"/>
+        </p:spPr>
+        <p:txBody>
+          <a:bodyPr xmlns:a="http://schemas.openxmlformats.org/drawingml/2006/main" wrap="square" lIns="0" tIns="0" rIns="0" bIns="0" anchor="ctr"/>
+          <a:lstStyle xmlns:a="http://schemas.openxmlformats.org/drawingml/2006/main"/>
+          <a:p xmlns:a="http://schemas.openxmlformats.org/drawingml/2006/main">
+            <a:pPr marL="0" indent="0">
+              <a:buNone/>
+            </a:pPr>
+            <a:r>
+              <a:rPr sz="1200" b="1" spc="300">
+                <a:solidFill>
+                  <a:srgbClr val="2E9BFF"/>
+                </a:solidFill>
+                <a:latin typeface="Calibri"/>
+                <a:ea typeface="Calibri"/>
+                <a:cs typeface="Calibri"/>
+              </a:rPr>
+              <a:t>SECTION 6</a:t>
+            </a:r>
+          </a:p>
+        </p:txBody>
+      </p:sp>
+      <p:sp>
+        <p:nvSpPr>
+          <p:cNvPr id="3" name="Text 1">
+            <a:extLst xmlns:a="http://schemas.openxmlformats.org/drawingml/2006/main">
+              <a:ext uri="{FF2B5EF4-FFF2-40B4-BE49-F238E27FC236}">
+                <a16:creationId xmlns:a16="http://schemas.microsoft.com/office/drawing/2014/main" id="{B62B0775-A3F9-4BA7-9A98-27ACF4D66347}"/>
+              </a:ext>
+            </a:extLst>
+          </p:cNvPr>
+          <p:cNvSpPr>
+            <a:spLocks xmlns:a="http://schemas.openxmlformats.org/drawingml/2006/main" noGrp="1"/>
+          </p:cNvSpPr>
+          <p:nvPr/>
+        </p:nvSpPr>
+        <p:spPr>
+          <a:xfrm xmlns:a="http://schemas.openxmlformats.org/drawingml/2006/main">
+            <a:off x="640080" y="676656"/>
+            <a:ext cx="10972800" cy="822960"/>
+          </a:xfrm>
+          <a:prstGeom xmlns:a="http://schemas.openxmlformats.org/drawingml/2006/main" prst="rect">
+            <a:avLst/>
+          </a:prstGeom>
+          <a:noFill xmlns:a="http://schemas.openxmlformats.org/drawingml/2006/main"/>
+        </p:spPr>
+        <p:txBody>
+          <a:bodyPr xmlns:a="http://schemas.openxmlformats.org/drawingml/2006/main" wrap="square" lIns="0" tIns="0" rIns="0" bIns="0" anchor="ctr"/>
+          <a:lstStyle xmlns:a="http://schemas.openxmlformats.org/drawingml/2006/main"/>
+          <a:p xmlns:a="http://schemas.openxmlformats.org/drawingml/2006/main">
+            <a:pPr marL="0" indent="0">
+              <a:buNone/>
+            </a:pPr>
+            <a:r>
+              <a:rPr sz="3200" b="1">
+                <a:solidFill>
+                  <a:srgbClr val="FFFFFF"/>
+                </a:solidFill>
+                <a:latin typeface="Calibri"/>
+                <a:ea typeface="Calibri"/>
+                <a:cs typeface="Calibri"/>
+              </a:rPr>
+              <a:t>A platform that keeps compounding value</a:t>
+            </a:r>
+          </a:p>
+        </p:txBody>
+      </p:sp>
+      <p:sp>
+        <p:nvSpPr>
+          <p:cNvPr id="4" name="Shape 2">
+            <a:extLst xmlns:a="http://schemas.openxmlformats.org/drawingml/2006/main">
+              <a:ext uri="{FF2B5EF4-FFF2-40B4-BE49-F238E27FC236}">
+                <a16:creationId xmlns:a16="http://schemas.microsoft.com/office/drawing/2014/main" id="{F18A246D-9343-4372-8929-48BE6101C058}"/>
+              </a:ext>
+            </a:extLst>
+          </p:cNvPr>
+          <p:cNvSpPr>
+            <a:spLocks xmlns:a="http://schemas.openxmlformats.org/drawingml/2006/main" noGrp="1"/>
+          </p:cNvSpPr>
+          <p:nvPr/>
+        </p:nvSpPr>
+        <p:spPr>
+          <a:xfrm xmlns:a="http://schemas.openxmlformats.org/drawingml/2006/main">
+            <a:off x="640080" y="1737360"/>
+            <a:ext cx="10972800" cy="1298448"/>
+          </a:xfrm>
+          <a:prstGeom xmlns:a="http://schemas.openxmlformats.org/drawingml/2006/main" prst="roundRect">
+            <a:avLst>
+              <a:gd name="adj" fmla="val 6338"/>
+            </a:avLst>
+          </a:prstGeom>
+          <a:solidFill xmlns:a="http://schemas.openxmlformats.org/drawingml/2006/main">
+            <a:srgbClr val="161C26"/>
+          </a:solidFill>
+          <a:ln xmlns:a="http://schemas.openxmlformats.org/drawingml/2006/main" w="12700">
+            <a:solidFill>
+              <a:srgbClr val="2A3545"/>
+            </a:solidFill>
+            <a:prstDash val="solid"/>
+          </a:ln>
+          <a:effectLst xmlns:a="http://schemas.openxmlformats.org/drawingml/2006/main">
+            <a:outerShdw blurRad="114300" dist="38100" dir="5400000" sx="100000" sy="100000" kx="0" ky="0" algn="bl" rotWithShape="0">
+              <a:srgbClr val="000000">
+                <a:alpha val="35000"/>
+              </a:srgbClr>
+            </a:outerShdw>
+          </a:effectLst>
+        </p:spPr>
+      </p:sp>
+      <p:sp>
+        <p:nvSpPr>
+          <p:cNvPr id="5" name="Text 3">
+            <a:extLst xmlns:a="http://schemas.openxmlformats.org/drawingml/2006/main">
+              <a:ext uri="{FF2B5EF4-FFF2-40B4-BE49-F238E27FC236}">
+                <a16:creationId xmlns:a16="http://schemas.microsoft.com/office/drawing/2014/main" id="{0BAF6590-10C1-4CA4-B7FF-DE15396B0CFC}"/>
+              </a:ext>
+            </a:extLst>
+          </p:cNvPr>
+          <p:cNvSpPr>
+            <a:spLocks xmlns:a="http://schemas.openxmlformats.org/drawingml/2006/main" noGrp="1"/>
+          </p:cNvSpPr>
+          <p:nvPr/>
+        </p:nvSpPr>
+        <p:spPr>
+          <a:xfrm xmlns:a="http://schemas.openxmlformats.org/drawingml/2006/main">
+            <a:off x="960120" y="1920240"/>
+            <a:ext cx="3291840" cy="914400"/>
+          </a:xfrm>
+          <a:prstGeom xmlns:a="http://schemas.openxmlformats.org/drawingml/2006/main" prst="rect">
+            <a:avLst/>
+          </a:prstGeom>
+          <a:noFill xmlns:a="http://schemas.openxmlformats.org/drawingml/2006/main"/>
+        </p:spPr>
+        <p:txBody>
+          <a:bodyPr xmlns:a="http://schemas.openxmlformats.org/drawingml/2006/main" wrap="square" lIns="0" tIns="0" rIns="0" bIns="0" anchor="ctr"/>
+          <a:lstStyle xmlns:a="http://schemas.openxmlformats.org/drawingml/2006/main"/>
+          <a:p xmlns:a="http://schemas.openxmlformats.org/drawingml/2006/main">
+            <a:pPr marL="0" indent="0">
+              <a:buNone/>
+            </a:pPr>
+            <a:r>
+              <a:rPr sz="1800" b="1">
+                <a:solidFill>
+                  <a:srgbClr val="2E9BFF"/>
+                </a:solidFill>
+                <a:latin typeface="Calibri"/>
+                <a:ea typeface="Calibri"/>
+                <a:cs typeface="Calibri"/>
+              </a:rPr>
+              <a:t>Short-term · 10–18 mo</a:t>
+            </a:r>
+          </a:p>
+        </p:txBody>
+      </p:sp>
+      <p:sp>
+        <p:nvSpPr>
+          <p:cNvPr id="6" name="Text 4">
+            <a:extLst xmlns:a="http://schemas.openxmlformats.org/drawingml/2006/main">
+              <a:ext uri="{FF2B5EF4-FFF2-40B4-BE49-F238E27FC236}">
+                <a16:creationId xmlns:a16="http://schemas.microsoft.com/office/drawing/2014/main" id="{2C3F2881-9357-48C1-BA34-02E2A4DDA481}"/>
+              </a:ext>
+            </a:extLst>
+          </p:cNvPr>
+          <p:cNvSpPr>
+            <a:spLocks xmlns:a="http://schemas.openxmlformats.org/drawingml/2006/main" noGrp="1"/>
+          </p:cNvSpPr>
+          <p:nvPr/>
+        </p:nvSpPr>
+        <p:spPr>
+          <a:xfrm xmlns:a="http://schemas.openxmlformats.org/drawingml/2006/main">
+            <a:off x="4389120" y="1920240"/>
+            <a:ext cx="6949440" cy="914400"/>
+          </a:xfrm>
+          <a:prstGeom xmlns:a="http://schemas.openxmlformats.org/drawingml/2006/main" prst="rect">
+            <a:avLst/>
+          </a:prstGeom>
+          <a:noFill xmlns:a="http://schemas.openxmlformats.org/drawingml/2006/main"/>
+        </p:spPr>
+        <p:txBody>
+          <a:bodyPr xmlns:a="http://schemas.openxmlformats.org/drawingml/2006/main" wrap="square" lIns="0" tIns="0" rIns="0" bIns="0" anchor="ctr"/>
+          <a:lstStyle xmlns:a="http://schemas.openxmlformats.org/drawingml/2006/main"/>
+          <a:p xmlns:a="http://schemas.openxmlformats.org/drawingml/2006/main">
+            <a:pPr marL="0" indent="0">
+              <a:lnSpc>
+                <a:spcPct val="110000"/>
+              </a:lnSpc>
+              <a:buNone/>
+            </a:pPr>
+            <a:r>
+              <a:rPr sz="1550">
+                <a:solidFill>
+                  <a:srgbClr val="D6E2F2"/>
+                </a:solidFill>
+                <a:latin typeface="Calibri"/>
+                <a:ea typeface="Calibri"/>
+                <a:cs typeface="Calibri"/>
+              </a:rPr>
+              <a:t>Real-time personalisation · supply-chain smart labels · advanced data-quality suites</a:t>
+            </a:r>
+          </a:p>
+        </p:txBody>
+      </p:sp>
+      <p:sp>
+        <p:nvSpPr>
+          <p:cNvPr id="7" name="Shape 5">
+            <a:extLst xmlns:a="http://schemas.openxmlformats.org/drawingml/2006/main">
+              <a:ext uri="{FF2B5EF4-FFF2-40B4-BE49-F238E27FC236}">
+                <a16:creationId xmlns:a16="http://schemas.microsoft.com/office/drawing/2014/main" id="{A9C4D3CA-AC8E-48E2-B20C-B0A025A403A5}"/>
+              </a:ext>
+            </a:extLst>
+          </p:cNvPr>
+          <p:cNvSpPr>
+            <a:spLocks xmlns:a="http://schemas.openxmlformats.org/drawingml/2006/main" noGrp="1"/>
+          </p:cNvSpPr>
+          <p:nvPr/>
+        </p:nvSpPr>
+        <p:spPr>
+          <a:xfrm xmlns:a="http://schemas.openxmlformats.org/drawingml/2006/main">
+            <a:off x="640080" y="3218688"/>
+            <a:ext cx="10972800" cy="1298448"/>
+          </a:xfrm>
+          <a:prstGeom xmlns:a="http://schemas.openxmlformats.org/drawingml/2006/main" prst="roundRect">
+            <a:avLst>
+              <a:gd name="adj" fmla="val 6338"/>
+            </a:avLst>
+          </a:prstGeom>
+          <a:solidFill xmlns:a="http://schemas.openxmlformats.org/drawingml/2006/main">
+            <a:srgbClr val="161C26"/>
+          </a:solidFill>
+          <a:ln xmlns:a="http://schemas.openxmlformats.org/drawingml/2006/main" w="12700">
+            <a:solidFill>
+              <a:srgbClr val="2A3545"/>
+            </a:solidFill>
+            <a:prstDash val="solid"/>
+          </a:ln>
+          <a:effectLst xmlns:a="http://schemas.openxmlformats.org/drawingml/2006/main">
+            <a:outerShdw blurRad="114300" dist="38100" dir="5400000" sx="100000" sy="100000" kx="0" ky="0" algn="bl" rotWithShape="0">
+              <a:srgbClr val="000000">
+                <a:alpha val="35000"/>
+              </a:srgbClr>
+            </a:outerShdw>
+          </a:effectLst>
+        </p:spPr>
+      </p:sp>
+      <p:sp>
+        <p:nvSpPr>
+          <p:cNvPr id="8" name="Text 6">
+            <a:extLst xmlns:a="http://schemas.openxmlformats.org/drawingml/2006/main">
+              <a:ext uri="{FF2B5EF4-FFF2-40B4-BE49-F238E27FC236}">
+                <a16:creationId xmlns:a16="http://schemas.microsoft.com/office/drawing/2014/main" id="{E1FE9C99-E80E-469C-AD97-5B8D1A4CA9E5}"/>
+              </a:ext>
+            </a:extLst>
+          </p:cNvPr>
+          <p:cNvSpPr>
+            <a:spLocks xmlns:a="http://schemas.openxmlformats.org/drawingml/2006/main" noGrp="1"/>
+          </p:cNvSpPr>
+          <p:nvPr/>
+        </p:nvSpPr>
+        <p:spPr>
+          <a:xfrm xmlns:a="http://schemas.openxmlformats.org/drawingml/2006/main">
+            <a:off x="960120" y="3401568"/>
+            <a:ext cx="3291840" cy="914400"/>
+          </a:xfrm>
+          <a:prstGeom xmlns:a="http://schemas.openxmlformats.org/drawingml/2006/main" prst="rect">
+            <a:avLst/>
+          </a:prstGeom>
+          <a:noFill xmlns:a="http://schemas.openxmlformats.org/drawingml/2006/main"/>
+        </p:spPr>
+        <p:txBody>
+          <a:bodyPr xmlns:a="http://schemas.openxmlformats.org/drawingml/2006/main" wrap="square" lIns="0" tIns="0" rIns="0" bIns="0" anchor="ctr"/>
+          <a:lstStyle xmlns:a="http://schemas.openxmlformats.org/drawingml/2006/main"/>
+          <a:p xmlns:a="http://schemas.openxmlformats.org/drawingml/2006/main">
+            <a:pPr marL="0" indent="0">
+              <a:buNone/>
+            </a:pPr>
+            <a:r>
+              <a:rPr sz="1800" b="1">
+                <a:solidFill>
+                  <a:srgbClr val="8A6CF6"/>
+                </a:solidFill>
+                <a:latin typeface="Calibri"/>
+                <a:ea typeface="Calibri"/>
+                <a:cs typeface="Calibri"/>
+              </a:rPr>
+              <a:t>Medium-term · 18–30 mo</a:t>
+            </a:r>
+          </a:p>
+        </p:txBody>
+      </p:sp>
+      <p:sp>
+        <p:nvSpPr>
+          <p:cNvPr id="9" name="Text 7">
+            <a:extLst xmlns:a="http://schemas.openxmlformats.org/drawingml/2006/main">
+              <a:ext uri="{FF2B5EF4-FFF2-40B4-BE49-F238E27FC236}">
+                <a16:creationId xmlns:a16="http://schemas.microsoft.com/office/drawing/2014/main" id="{CB789598-390D-4A0E-A1B4-388731EBBE80}"/>
+              </a:ext>
+            </a:extLst>
+          </p:cNvPr>
+          <p:cNvSpPr>
+            <a:spLocks xmlns:a="http://schemas.openxmlformats.org/drawingml/2006/main" noGrp="1"/>
+          </p:cNvSpPr>
+          <p:nvPr/>
+        </p:nvSpPr>
+        <p:spPr>
+          <a:xfrm xmlns:a="http://schemas.openxmlformats.org/drawingml/2006/main">
+            <a:off x="4389120" y="3401568"/>
+            <a:ext cx="6949440" cy="914400"/>
+          </a:xfrm>
+          <a:prstGeom xmlns:a="http://schemas.openxmlformats.org/drawingml/2006/main" prst="rect">
+            <a:avLst/>
+          </a:prstGeom>
+          <a:noFill xmlns:a="http://schemas.openxmlformats.org/drawingml/2006/main"/>
+        </p:spPr>
+        <p:txBody>
+          <a:bodyPr xmlns:a="http://schemas.openxmlformats.org/drawingml/2006/main" wrap="square" lIns="0" tIns="0" rIns="0" bIns="0" anchor="ctr"/>
+          <a:lstStyle xmlns:a="http://schemas.openxmlformats.org/drawingml/2006/main"/>
+          <a:p xmlns:a="http://schemas.openxmlformats.org/drawingml/2006/main">
+            <a:pPr marL="0" indent="0">
+              <a:lnSpc>
+                <a:spcPct val="110000"/>
+              </a:lnSpc>
+              <a:buNone/>
+            </a:pPr>
+            <a:r>
+              <a:rPr sz="1550">
+                <a:solidFill>
+                  <a:srgbClr val="D6E2F2"/>
+                </a:solidFill>
+                <a:latin typeface="Calibri"/>
+                <a:ea typeface="Calibri"/>
+                <a:cs typeface="Calibri"/>
+              </a:rPr>
+              <a:t>Bedrock virtual shopping assistant · external data monetisation · data mesh</a:t>
+            </a:r>
+          </a:p>
+        </p:txBody>
+      </p:sp>
+      <p:sp>
+        <p:nvSpPr>
+          <p:cNvPr id="10" name="Shape 8">
+            <a:extLst xmlns:a="http://schemas.openxmlformats.org/drawingml/2006/main">
+              <a:ext uri="{FF2B5EF4-FFF2-40B4-BE49-F238E27FC236}">
+                <a16:creationId xmlns:a16="http://schemas.microsoft.com/office/drawing/2014/main" id="{921DF04D-CFE7-4434-986F-C044A5EE6A08}"/>
+              </a:ext>
+            </a:extLst>
+          </p:cNvPr>
+          <p:cNvSpPr>
+            <a:spLocks xmlns:a="http://schemas.openxmlformats.org/drawingml/2006/main" noGrp="1"/>
+          </p:cNvSpPr>
+          <p:nvPr/>
+        </p:nvSpPr>
+        <p:spPr>
+          <a:xfrm xmlns:a="http://schemas.openxmlformats.org/drawingml/2006/main">
+            <a:off x="640080" y="4700016"/>
+            <a:ext cx="10972800" cy="1298448"/>
+          </a:xfrm>
+          <a:prstGeom xmlns:a="http://schemas.openxmlformats.org/drawingml/2006/main" prst="roundRect">
+            <a:avLst>
+              <a:gd name="adj" fmla="val 6338"/>
+            </a:avLst>
+          </a:prstGeom>
+          <a:solidFill xmlns:a="http://schemas.openxmlformats.org/drawingml/2006/main">
+            <a:srgbClr val="161C26"/>
+          </a:solidFill>
+          <a:ln xmlns:a="http://schemas.openxmlformats.org/drawingml/2006/main" w="12700">
+            <a:solidFill>
+              <a:srgbClr val="2A3545"/>
+            </a:solidFill>
+            <a:prstDash val="solid"/>
+          </a:ln>
+          <a:effectLst xmlns:a="http://schemas.openxmlformats.org/drawingml/2006/main">
+            <a:outerShdw blurRad="114300" dist="38100" dir="5400000" sx="100000" sy="100000" kx="0" ky="0" algn="bl" rotWithShape="0">
+              <a:srgbClr val="000000">
+                <a:alpha val="35000"/>
+              </a:srgbClr>
+            </a:outerShdw>
+          </a:effectLst>
+        </p:spPr>
+      </p:sp>
+      <p:sp>
+        <p:nvSpPr>
+          <p:cNvPr id="11" name="Text 9">
+            <a:extLst xmlns:a="http://schemas.openxmlformats.org/drawingml/2006/main">
+              <a:ext uri="{FF2B5EF4-FFF2-40B4-BE49-F238E27FC236}">
+                <a16:creationId xmlns:a16="http://schemas.microsoft.com/office/drawing/2014/main" id="{C8C19642-8362-4361-801D-5046CC38012D}"/>
+              </a:ext>
+            </a:extLst>
+          </p:cNvPr>
+          <p:cNvSpPr>
+            <a:spLocks xmlns:a="http://schemas.openxmlformats.org/drawingml/2006/main" noGrp="1"/>
+          </p:cNvSpPr>
+          <p:nvPr/>
+        </p:nvSpPr>
+        <p:spPr>
+          <a:xfrm xmlns:a="http://schemas.openxmlformats.org/drawingml/2006/main">
+            <a:off x="960120" y="4882896"/>
+            <a:ext cx="3291840" cy="914400"/>
+          </a:xfrm>
+          <a:prstGeom xmlns:a="http://schemas.openxmlformats.org/drawingml/2006/main" prst="rect">
+            <a:avLst/>
+          </a:prstGeom>
+          <a:noFill xmlns:a="http://schemas.openxmlformats.org/drawingml/2006/main"/>
+        </p:spPr>
+        <p:txBody>
+          <a:bodyPr xmlns:a="http://schemas.openxmlformats.org/drawingml/2006/main" wrap="square" lIns="0" tIns="0" rIns="0" bIns="0" anchor="ctr"/>
+          <a:lstStyle xmlns:a="http://schemas.openxmlformats.org/drawingml/2006/main"/>
+          <a:p xmlns:a="http://schemas.openxmlformats.org/drawingml/2006/main">
+            <a:pPr marL="0" indent="0">
+              <a:buNone/>
+            </a:pPr>
+            <a:r>
+              <a:rPr sz="1800" b="1">
+                <a:solidFill>
+                  <a:srgbClr val="4FD08A"/>
+                </a:solidFill>
+                <a:latin typeface="Calibri"/>
+                <a:ea typeface="Calibri"/>
+                <a:cs typeface="Calibri"/>
+              </a:rPr>
+              <a:t>Long-term · 30+ mo</a:t>
+            </a:r>
+          </a:p>
+        </p:txBody>
+      </p:sp>
+      <p:sp>
+        <p:nvSpPr>
+          <p:cNvPr id="12" name="Text 10">
+            <a:extLst xmlns:a="http://schemas.openxmlformats.org/drawingml/2006/main">
+              <a:ext uri="{FF2B5EF4-FFF2-40B4-BE49-F238E27FC236}">
+                <a16:creationId xmlns:a16="http://schemas.microsoft.com/office/drawing/2014/main" id="{66137B0A-52A8-4F0E-A42E-C3BA79762296}"/>
+              </a:ext>
+            </a:extLst>
+          </p:cNvPr>
+          <p:cNvSpPr>
+            <a:spLocks xmlns:a="http://schemas.openxmlformats.org/drawingml/2006/main" noGrp="1"/>
+          </p:cNvSpPr>
+          <p:nvPr/>
+        </p:nvSpPr>
+        <p:spPr>
+          <a:xfrm xmlns:a="http://schemas.openxmlformats.org/drawingml/2006/main">
+            <a:off x="4389120" y="4882896"/>
+            <a:ext cx="6949440" cy="914400"/>
+          </a:xfrm>
+          <a:prstGeom xmlns:a="http://schemas.openxmlformats.org/drawingml/2006/main" prst="rect">
+            <a:avLst/>
+          </a:prstGeom>
+          <a:noFill xmlns:a="http://schemas.openxmlformats.org/drawingml/2006/main"/>
+        </p:spPr>
+        <p:txBody>
+          <a:bodyPr xmlns:a="http://schemas.openxmlformats.org/drawingml/2006/main" wrap="square" lIns="0" tIns="0" rIns="0" bIns="0" anchor="ctr"/>
+          <a:lstStyle xmlns:a="http://schemas.openxmlformats.org/drawingml/2006/main"/>
+          <a:p xmlns:a="http://schemas.openxmlformats.org/drawingml/2006/main">
+            <a:pPr marL="0" indent="0">
+              <a:lnSpc>
+                <a:spcPct val="110000"/>
+              </a:lnSpc>
+              <a:buNone/>
+            </a:pPr>
+            <a:r>
+              <a:rPr sz="1550">
+                <a:solidFill>
+                  <a:srgbClr val="D6E2F2"/>
+                </a:solidFill>
+                <a:latin typeface="Calibri"/>
+                <a:ea typeface="Calibri"/>
+                <a:cs typeface="Calibri"/>
+              </a:rPr>
+              <a:t>AI-agent ecosystem · federated ML across partners · carbon-neutrality roadmap</a:t>
+            </a:r>
+          </a:p>
+        </p:txBody>
+      </p:sp>
+    </p:spTree>
+    <p:extLst>
+      <p:ext uri="{BB962C8B-B14F-4D97-AF65-F5344CB8AC3E}">
+        <p14:creationId xmlns:p14="http://schemas.microsoft.com/office/powerpoint/2010/main" val="226776170"/>
+      </p:ext>
+    </p:extLst>
+  </p:cSld>
+</p:sld>
+</file>
+
+<file path=ppt/slides/slide13.xml><?xml version="1.0" encoding="utf-8"?>
+<p:sld xmlns:p="http://schemas.openxmlformats.org/presentationml/2006/main">
+  <p:cSld>
+    <p:bg>
+      <p:bgPr>
         <a:blipFill xmlns:a="http://schemas.openxmlformats.org/drawingml/2006/main" rotWithShape="1">
-          <a:blip xmlns:r="http://schemas.openxmlformats.org/officeDocument/2006/relationships" r:embed="Rec8341efc87c49b0">
+          <a:blip xmlns:r="http://schemas.openxmlformats.org/officeDocument/2006/relationships" r:embed="R896149e80c2a40c3">
             <a:lum/>
           </a:blip>
           <a:srcRect l="0" t="0" r="0" b="0"/>
@@ -3637,7 +4412,7 @@
       <p:sp>
         <p:nvSpPr>
           <p:cNvPr id="5" name="Text 3">
-            <a:hlinkClick xmlns:r="http://schemas.openxmlformats.org/officeDocument/2006/relationships" xmlns:a="http://schemas.openxmlformats.org/drawingml/2006/main" r:id="R6d2e4a4ed5484d06"/>
+            <a:hlinkClick xmlns:r="http://schemas.openxmlformats.org/officeDocument/2006/relationships" xmlns:a="http://schemas.openxmlformats.org/drawingml/2006/main" r:id="Rfc7faa80c5e04678"/>
             <a:extLst xmlns:a="http://schemas.openxmlformats.org/drawingml/2006/main">
               <a:ext uri="{FF2B5EF4-FFF2-40B4-BE49-F238E27FC236}">
                 <a16:creationId xmlns:a16="http://schemas.microsoft.com/office/drawing/2014/main" id="{73980F81-C257-44E7-9D56-34C252CA46A7}"/>
@@ -3674,7 +4449,7 @@
                 <a:latin typeface="Calibri"/>
                 <a:ea typeface="Calibri"/>
                 <a:cs typeface="Calibri"/>
-                <a:hlinkClick xmlns:r="http://schemas.openxmlformats.org/officeDocument/2006/relationships" r:id="R2b817a7f5d4449dd"/>
+                <a:hlinkClick xmlns:r="http://schemas.openxmlformats.org/officeDocument/2006/relationships" r:id="R2612f8517baa4c31"/>
               </a:rPr>
               <a:t>mangacloud-khaki.vercel.app</a:t>
             </a:r>
@@ -6041,7 +6816,7 @@
           <p:nvPr/>
         </p:nvPicPr>
         <p:blipFill>
-          <a:blip xmlns:r="http://schemas.openxmlformats.org/officeDocument/2006/relationships" xmlns:a="http://schemas.openxmlformats.org/drawingml/2006/main" r:embed="R38d6832982b44d4b"/>
+          <a:blip xmlns:r="http://schemas.openxmlformats.org/officeDocument/2006/relationships" xmlns:a="http://schemas.openxmlformats.org/drawingml/2006/main" r:embed="R03abef8b6ef1422b"/>
           <a:srcRect xmlns:a="http://schemas.openxmlformats.org/drawingml/2006/main" l="0" t="0" r="0" b="0"/>
           <a:stretch xmlns:a="http://schemas.openxmlformats.org/drawingml/2006/main"/>
         </p:blipFill>
@@ -6753,7 +7528,7 @@
           <p:nvPr/>
         </p:nvPicPr>
         <p:blipFill>
-          <a:blip xmlns:r="http://schemas.openxmlformats.org/officeDocument/2006/relationships" xmlns:a="http://schemas.openxmlformats.org/drawingml/2006/main" r:embed="R8e5fff791a6f426f"/>
+          <a:blip xmlns:r="http://schemas.openxmlformats.org/officeDocument/2006/relationships" xmlns:a="http://schemas.openxmlformats.org/drawingml/2006/main" r:embed="R86b0e0ccdeb04c4c"/>
           <a:srcRect xmlns:a="http://schemas.openxmlformats.org/drawingml/2006/main" l="0" t="0" r="0" b="0"/>
           <a:stretch xmlns:a="http://schemas.openxmlformats.org/drawingml/2006/main"/>
         </p:blipFill>
@@ -8958,7 +9733,7 @@
           <p:nvPr/>
         </p:nvPicPr>
         <p:blipFill>
-          <a:blip xmlns:r="http://schemas.openxmlformats.org/officeDocument/2006/relationships" xmlns:a="http://schemas.openxmlformats.org/drawingml/2006/main" r:embed="R7928a1c714e34661"/>
+          <a:blip xmlns:r="http://schemas.openxmlformats.org/officeDocument/2006/relationships" xmlns:a="http://schemas.openxmlformats.org/drawingml/2006/main" r:embed="R507ba32970f84f69"/>
           <a:srcRect xmlns:a="http://schemas.openxmlformats.org/drawingml/2006/main" l="0" t="0" r="0" b="0"/>
           <a:stretch xmlns:a="http://schemas.openxmlformats.org/drawingml/2006/main"/>
         </p:blipFill>
@@ -9513,13 +10288,6 @@
 <file path=ppt/slides/slide9.xml><?xml version="1.0" encoding="utf-8"?>
 <p:sld xmlns:p="http://schemas.openxmlformats.org/presentationml/2006/main">
   <p:cSld>
-    <p:bg>
-      <p:bgPr>
-        <a:solidFill xmlns:a="http://schemas.openxmlformats.org/drawingml/2006/main">
-          <a:srgbClr val="0B0E14"/>
-        </a:solidFill>
-      </p:bgPr>
-    </p:bg>
     <p:spTree>
       <p:nvGrpSpPr>
         <p:cNvPr id="1" name=""/>
@@ -9531,675 +10299,2188 @@
       </p:grpSpPr>
       <p:sp>
         <p:nvSpPr>
-          <p:cNvPr id="2" name="Text 0">
-            <a:extLst xmlns:a="http://schemas.openxmlformats.org/drawingml/2006/main">
-              <a:ext uri="{FF2B5EF4-FFF2-40B4-BE49-F238E27FC236}">
-                <a16:creationId xmlns:a16="http://schemas.microsoft.com/office/drawing/2014/main" id="{FE238A48-E564-4A12-A16E-33229AEA48CF}"/>
-              </a:ext>
-            </a:extLst>
-          </p:cNvPr>
-          <p:cNvSpPr>
-            <a:spLocks xmlns:a="http://schemas.openxmlformats.org/drawingml/2006/main" noGrp="1"/>
-          </p:cNvSpPr>
-          <p:nvPr/>
-        </p:nvSpPr>
-        <p:spPr>
-          <a:xfrm xmlns:a="http://schemas.openxmlformats.org/drawingml/2006/main">
-            <a:off x="640080" y="420624"/>
-            <a:ext cx="10058400" cy="274320"/>
-          </a:xfrm>
-          <a:prstGeom xmlns:a="http://schemas.openxmlformats.org/drawingml/2006/main" prst="rect">
-            <a:avLst/>
-          </a:prstGeom>
-          <a:noFill xmlns:a="http://schemas.openxmlformats.org/drawingml/2006/main"/>
-        </p:spPr>
-        <p:txBody>
-          <a:bodyPr xmlns:a="http://schemas.openxmlformats.org/drawingml/2006/main" wrap="square" lIns="0" tIns="0" rIns="0" bIns="0" anchor="ctr"/>
-          <a:lstStyle xmlns:a="http://schemas.openxmlformats.org/drawingml/2006/main"/>
-          <a:p xmlns:a="http://schemas.openxmlformats.org/drawingml/2006/main">
-            <a:pPr marL="0" indent="0">
-              <a:buNone/>
-            </a:pPr>
-            <a:r>
-              <a:rPr sz="1200" b="1" spc="300">
-                <a:solidFill>
-                  <a:srgbClr val="2E9BFF"/>
-                </a:solidFill>
-                <a:latin typeface="Calibri"/>
-                <a:ea typeface="Calibri"/>
-                <a:cs typeface="Calibri"/>
-              </a:rPr>
-              <a:t>DELIVERY</a:t>
-            </a:r>
-          </a:p>
-        </p:txBody>
-      </p:sp>
-      <p:sp>
-        <p:nvSpPr>
-          <p:cNvPr id="3" name="Text 1">
-            <a:extLst xmlns:a="http://schemas.openxmlformats.org/drawingml/2006/main">
-              <a:ext uri="{FF2B5EF4-FFF2-40B4-BE49-F238E27FC236}">
-                <a16:creationId xmlns:a16="http://schemas.microsoft.com/office/drawing/2014/main" id="{6200C253-2B54-47B5-AE07-86A60EF0A297}"/>
-              </a:ext>
-            </a:extLst>
-          </p:cNvPr>
-          <p:cNvSpPr>
-            <a:spLocks xmlns:a="http://schemas.openxmlformats.org/drawingml/2006/main" noGrp="1"/>
-          </p:cNvSpPr>
-          <p:nvPr/>
-        </p:nvSpPr>
-        <p:spPr>
-          <a:xfrm xmlns:a="http://schemas.openxmlformats.org/drawingml/2006/main">
-            <a:off x="640080" y="676656"/>
-            <a:ext cx="10972800" cy="822960"/>
-          </a:xfrm>
-          <a:prstGeom xmlns:a="http://schemas.openxmlformats.org/drawingml/2006/main" prst="rect">
-            <a:avLst/>
-          </a:prstGeom>
-          <a:noFill xmlns:a="http://schemas.openxmlformats.org/drawingml/2006/main"/>
-        </p:spPr>
-        <p:txBody>
-          <a:bodyPr xmlns:a="http://schemas.openxmlformats.org/drawingml/2006/main" wrap="square" lIns="0" tIns="0" rIns="0" bIns="0" anchor="ctr"/>
-          <a:lstStyle xmlns:a="http://schemas.openxmlformats.org/drawingml/2006/main"/>
-          <a:p xmlns:a="http://schemas.openxmlformats.org/drawingml/2006/main">
-            <a:pPr marL="0" indent="0">
-              <a:buNone/>
-            </a:pPr>
-            <a:r>
-              <a:rPr sz="3200" b="1">
+          <p:cNvPr id="1" name="background">
+            <a:extLst xmlns:a="http://schemas.openxmlformats.org/drawingml/2006/main">
+              <a:ext uri="{FF2B5EF4-FFF2-40B4-BE49-F238E27FC236}">
+                <a16:creationId xmlns:a16="http://schemas.microsoft.com/office/drawing/2014/main" id="{CC740F68-34C1-4C7B-B0BC-09D5EBAA1111}"/>
+              </a:ext>
+            </a:extLst>
+          </p:cNvPr>
+          <p:cNvSpPr>
+            <a:spLocks xmlns:a="http://schemas.openxmlformats.org/drawingml/2006/main" noGrp="1"/>
+          </p:cNvSpPr>
+          <p:nvPr/>
+        </p:nvSpPr>
+        <p:spPr>
+          <a:xfrm xmlns:a="http://schemas.openxmlformats.org/drawingml/2006/main">
+            <a:off x="0" y="0"/>
+            <a:ext cx="12192000" cy="6858000"/>
+          </a:xfrm>
+          <a:prstGeom xmlns:a="http://schemas.openxmlformats.org/drawingml/2006/main" prst="rect">
+            <a:avLst/>
+          </a:prstGeom>
+          <a:solidFill xmlns:a="http://schemas.openxmlformats.org/drawingml/2006/main">
+            <a:srgbClr val="070A0D"/>
+          </a:solidFill>
+          <a:ln xmlns:a="http://schemas.openxmlformats.org/drawingml/2006/main" w="0">
+            <a:noFill/>
+            <a:prstDash val="solid"/>
+          </a:ln>
+        </p:spPr>
+      </p:sp>
+      <p:sp>
+        <p:nvSpPr>
+          <p:cNvPr id="2" name="top-accent-line">
+            <a:extLst xmlns:a="http://schemas.openxmlformats.org/drawingml/2006/main">
+              <a:ext uri="{FF2B5EF4-FFF2-40B4-BE49-F238E27FC236}">
+                <a16:creationId xmlns:a16="http://schemas.microsoft.com/office/drawing/2014/main" id="{29E1ED5A-00F6-499D-AA64-DA8185229131}"/>
+              </a:ext>
+            </a:extLst>
+          </p:cNvPr>
+          <p:cNvSpPr>
+            <a:spLocks xmlns:a="http://schemas.openxmlformats.org/drawingml/2006/main" noGrp="1"/>
+          </p:cNvSpPr>
+          <p:nvPr/>
+        </p:nvSpPr>
+        <p:spPr>
+          <a:xfrm xmlns:a="http://schemas.openxmlformats.org/drawingml/2006/main">
+            <a:off x="552450" y="762000"/>
+            <a:ext cx="1428750" cy="28575"/>
+          </a:xfrm>
+          <a:prstGeom xmlns:a="http://schemas.openxmlformats.org/drawingml/2006/main" prst="rect">
+            <a:avLst/>
+          </a:prstGeom>
+          <a:solidFill xmlns:a="http://schemas.openxmlformats.org/drawingml/2006/main">
+            <a:srgbClr val="00A8FF"/>
+          </a:solidFill>
+          <a:ln xmlns:a="http://schemas.openxmlformats.org/drawingml/2006/main" w="0">
+            <a:noFill/>
+            <a:prstDash val="solid"/>
+          </a:ln>
+        </p:spPr>
+      </p:sp>
+      <p:sp>
+        <p:nvSpPr>
+          <p:cNvPr id="3" name="bottom-line">
+            <a:extLst xmlns:a="http://schemas.openxmlformats.org/drawingml/2006/main">
+              <a:ext uri="{FF2B5EF4-FFF2-40B4-BE49-F238E27FC236}">
+                <a16:creationId xmlns:a16="http://schemas.microsoft.com/office/drawing/2014/main" id="{559A9470-1386-48CF-B827-A150A9F88202}"/>
+              </a:ext>
+            </a:extLst>
+          </p:cNvPr>
+          <p:cNvSpPr>
+            <a:spLocks xmlns:a="http://schemas.openxmlformats.org/drawingml/2006/main" noGrp="1"/>
+          </p:cNvSpPr>
+          <p:nvPr/>
+        </p:nvSpPr>
+        <p:spPr>
+          <a:xfrm xmlns:a="http://schemas.openxmlformats.org/drawingml/2006/main">
+            <a:off x="552450" y="6096000"/>
+            <a:ext cx="11087100" cy="9525"/>
+          </a:xfrm>
+          <a:prstGeom xmlns:a="http://schemas.openxmlformats.org/drawingml/2006/main" prst="rect">
+            <a:avLst/>
+          </a:prstGeom>
+          <a:solidFill xmlns:a="http://schemas.openxmlformats.org/drawingml/2006/main">
+            <a:srgbClr val="253140"/>
+          </a:solidFill>
+          <a:ln xmlns:a="http://schemas.openxmlformats.org/drawingml/2006/main" w="0">
+            <a:noFill/>
+            <a:prstDash val="solid"/>
+          </a:ln>
+        </p:spPr>
+      </p:sp>
+      <p:sp>
+        <p:nvSpPr>
+          <p:cNvPr id="4" name="kicker">
+            <a:extLst xmlns:a="http://schemas.openxmlformats.org/drawingml/2006/main">
+              <a:ext uri="{FF2B5EF4-FFF2-40B4-BE49-F238E27FC236}">
+                <a16:creationId xmlns:a16="http://schemas.microsoft.com/office/drawing/2014/main" id="{F90FA417-08EC-458F-895B-E741586A9F9F}"/>
+              </a:ext>
+            </a:extLst>
+          </p:cNvPr>
+          <p:cNvSpPr>
+            <a:spLocks xmlns:a="http://schemas.openxmlformats.org/drawingml/2006/main" noGrp="1"/>
+          </p:cNvSpPr>
+          <p:nvPr/>
+        </p:nvSpPr>
+        <p:spPr>
+          <a:xfrm xmlns:a="http://schemas.openxmlformats.org/drawingml/2006/main">
+            <a:off x="552450" y="457200"/>
+            <a:ext cx="2667000" cy="228600"/>
+          </a:xfrm>
+          <a:prstGeom xmlns:a="http://schemas.openxmlformats.org/drawingml/2006/main" prst="rect">
+            <a:avLst/>
+          </a:prstGeom>
+          <a:noFill xmlns:a="http://schemas.openxmlformats.org/drawingml/2006/main"/>
+          <a:ln xmlns:a="http://schemas.openxmlformats.org/drawingml/2006/main" w="0">
+            <a:noFill/>
+            <a:prstDash val="solid"/>
+          </a:ln>
+        </p:spPr>
+        <p:txBody>
+          <a:bodyPr xmlns:a="http://schemas.openxmlformats.org/drawingml/2006/main"/>
+          <a:lstStyle xmlns:a="http://schemas.openxmlformats.org/drawingml/2006/main"/>
+          <a:p xmlns:a="http://schemas.openxmlformats.org/drawingml/2006/main">
+            <a:pPr>
+              <a:defRPr sz="900" b="1">
+                <a:solidFill>
+                  <a:srgbClr val="7F8B99"/>
+                </a:solidFill>
+                <a:latin typeface="Aptos"/>
+                <a:ea typeface="Aptos"/>
+                <a:cs typeface="Aptos"/>
+              </a:defRPr>
+            </a:pPr>
+            <a:r>
+              <a:rPr sz="900" b="1">
+                <a:solidFill>
+                  <a:srgbClr val="7F8B99"/>
+                </a:solidFill>
+                <a:latin typeface="Aptos"/>
+                <a:ea typeface="Aptos"/>
+                <a:cs typeface="Aptos"/>
+              </a:rPr>
+              <a:t>SECTION 4 · R6 BACKUP</a:t>
+            </a:r>
+          </a:p>
+        </p:txBody>
+      </p:sp>
+      <p:sp>
+        <p:nvSpPr>
+          <p:cNvPr id="5" name="slide-number">
+            <a:extLst xmlns:a="http://schemas.openxmlformats.org/drawingml/2006/main">
+              <a:ext uri="{FF2B5EF4-FFF2-40B4-BE49-F238E27FC236}">
+                <a16:creationId xmlns:a16="http://schemas.microsoft.com/office/drawing/2014/main" id="{F0FBC9C2-EFB6-47C7-B14B-6FFC1E33FB1F}"/>
+              </a:ext>
+            </a:extLst>
+          </p:cNvPr>
+          <p:cNvSpPr>
+            <a:spLocks xmlns:a="http://schemas.openxmlformats.org/drawingml/2006/main" noGrp="1"/>
+          </p:cNvSpPr>
+          <p:nvPr/>
+        </p:nvSpPr>
+        <p:spPr>
+          <a:xfrm xmlns:a="http://schemas.openxmlformats.org/drawingml/2006/main">
+            <a:off x="10801350" y="438150"/>
+            <a:ext cx="838200" cy="228600"/>
+          </a:xfrm>
+          <a:prstGeom xmlns:a="http://schemas.openxmlformats.org/drawingml/2006/main" prst="rect">
+            <a:avLst/>
+          </a:prstGeom>
+          <a:noFill xmlns:a="http://schemas.openxmlformats.org/drawingml/2006/main"/>
+          <a:ln xmlns:a="http://schemas.openxmlformats.org/drawingml/2006/main" w="0">
+            <a:noFill/>
+            <a:prstDash val="solid"/>
+          </a:ln>
+        </p:spPr>
+        <p:txBody>
+          <a:bodyPr xmlns:a="http://schemas.openxmlformats.org/drawingml/2006/main"/>
+          <a:lstStyle xmlns:a="http://schemas.openxmlformats.org/drawingml/2006/main"/>
+          <a:p xmlns:a="http://schemas.openxmlformats.org/drawingml/2006/main">
+            <a:pPr algn="r">
+              <a:defRPr sz="1050">
+                <a:solidFill>
+                  <a:srgbClr val="6E7A88"/>
+                </a:solidFill>
+                <a:latin typeface="Aptos"/>
+                <a:ea typeface="Aptos"/>
+                <a:cs typeface="Aptos"/>
+              </a:defRPr>
+            </a:pPr>
+            <a:r>
+              <a:rPr sz="1050">
+                <a:solidFill>
+                  <a:srgbClr val="6E7A88"/>
+                </a:solidFill>
+                <a:latin typeface="Aptos"/>
+                <a:ea typeface="Aptos"/>
+                <a:cs typeface="Aptos"/>
+              </a:rPr>
+              <a:t>09 / 13</a:t>
+            </a:r>
+          </a:p>
+        </p:txBody>
+      </p:sp>
+      <p:sp>
+        <p:nvSpPr>
+          <p:cNvPr id="6" name="title">
+            <a:extLst xmlns:a="http://schemas.openxmlformats.org/drawingml/2006/main">
+              <a:ext uri="{FF2B5EF4-FFF2-40B4-BE49-F238E27FC236}">
+                <a16:creationId xmlns:a16="http://schemas.microsoft.com/office/drawing/2014/main" id="{0F8B994F-5508-4760-BA0E-EC31D405630B}"/>
+              </a:ext>
+            </a:extLst>
+          </p:cNvPr>
+          <p:cNvSpPr>
+            <a:spLocks xmlns:a="http://schemas.openxmlformats.org/drawingml/2006/main" noGrp="1"/>
+          </p:cNvSpPr>
+          <p:nvPr/>
+        </p:nvSpPr>
+        <p:spPr>
+          <a:xfrm xmlns:a="http://schemas.openxmlformats.org/drawingml/2006/main">
+            <a:off x="552450" y="990600"/>
+            <a:ext cx="6667500" cy="590550"/>
+          </a:xfrm>
+          <a:prstGeom xmlns:a="http://schemas.openxmlformats.org/drawingml/2006/main" prst="rect">
+            <a:avLst/>
+          </a:prstGeom>
+          <a:noFill xmlns:a="http://schemas.openxmlformats.org/drawingml/2006/main"/>
+          <a:ln xmlns:a="http://schemas.openxmlformats.org/drawingml/2006/main" w="0">
+            <a:noFill/>
+            <a:prstDash val="solid"/>
+          </a:ln>
+        </p:spPr>
+        <p:txBody>
+          <a:bodyPr xmlns:a="http://schemas.openxmlformats.org/drawingml/2006/main"/>
+          <a:lstStyle xmlns:a="http://schemas.openxmlformats.org/drawingml/2006/main"/>
+          <a:p xmlns:a="http://schemas.openxmlformats.org/drawingml/2006/main">
+            <a:pPr>
+              <a:defRPr sz="3300" b="1">
                 <a:solidFill>
                   <a:srgbClr val="FFFFFF"/>
                 </a:solidFill>
-                <a:latin typeface="Calibri"/>
-                <a:ea typeface="Calibri"/>
-                <a:cs typeface="Calibri"/>
-              </a:rPr>
-              <a:t>Nine-month delivery in three phases</a:t>
-            </a:r>
-          </a:p>
-        </p:txBody>
-      </p:sp>
-      <p:sp>
-        <p:nvSpPr>
-          <p:cNvPr id="4" name="Shape 2">
-            <a:extLst xmlns:a="http://schemas.openxmlformats.org/drawingml/2006/main">
-              <a:ext uri="{FF2B5EF4-FFF2-40B4-BE49-F238E27FC236}">
-                <a16:creationId xmlns:a16="http://schemas.microsoft.com/office/drawing/2014/main" id="{BDF7982D-8C4D-4A3F-A05A-2789B6FF2FFB}"/>
-              </a:ext>
-            </a:extLst>
-          </p:cNvPr>
-          <p:cNvSpPr>
-            <a:spLocks xmlns:a="http://schemas.openxmlformats.org/drawingml/2006/main" noGrp="1"/>
-          </p:cNvSpPr>
-          <p:nvPr/>
-        </p:nvSpPr>
-        <p:spPr>
-          <a:xfrm xmlns:a="http://schemas.openxmlformats.org/drawingml/2006/main">
-            <a:off x="640080" y="1737360"/>
-            <a:ext cx="3474720" cy="3383280"/>
+                <a:latin typeface="Aptos Display"/>
+                <a:ea typeface="Aptos Display"/>
+                <a:cs typeface="Aptos Display"/>
+              </a:defRPr>
+            </a:pPr>
+            <a:r>
+              <a:rPr sz="3300" b="1">
+                <a:solidFill>
+                  <a:srgbClr val="FFFFFF"/>
+                </a:solidFill>
+                <a:latin typeface="Aptos Display"/>
+                <a:ea typeface="Aptos Display"/>
+                <a:cs typeface="Aptos Display"/>
+              </a:rPr>
+              <a:t>Detailed cost analysis brief.</a:t>
+            </a:r>
+          </a:p>
+        </p:txBody>
+      </p:sp>
+      <p:sp>
+        <p:nvSpPr>
+          <p:cNvPr id="7" name="subtitle">
+            <a:extLst xmlns:a="http://schemas.openxmlformats.org/drawingml/2006/main">
+              <a:ext uri="{FF2B5EF4-FFF2-40B4-BE49-F238E27FC236}">
+                <a16:creationId xmlns:a16="http://schemas.microsoft.com/office/drawing/2014/main" id="{DAC22508-5218-4FA5-B0CB-CD1E0743454B}"/>
+              </a:ext>
+            </a:extLst>
+          </p:cNvPr>
+          <p:cNvSpPr>
+            <a:spLocks xmlns:a="http://schemas.openxmlformats.org/drawingml/2006/main" noGrp="1"/>
+          </p:cNvSpPr>
+          <p:nvPr/>
+        </p:nvSpPr>
+        <p:spPr>
+          <a:xfrm xmlns:a="http://schemas.openxmlformats.org/drawingml/2006/main">
+            <a:off x="552450" y="1581150"/>
+            <a:ext cx="8096250" cy="323850"/>
+          </a:xfrm>
+          <a:prstGeom xmlns:a="http://schemas.openxmlformats.org/drawingml/2006/main" prst="rect">
+            <a:avLst/>
+          </a:prstGeom>
+          <a:noFill xmlns:a="http://schemas.openxmlformats.org/drawingml/2006/main"/>
+          <a:ln xmlns:a="http://schemas.openxmlformats.org/drawingml/2006/main" w="0">
+            <a:noFill/>
+            <a:prstDash val="solid"/>
+          </a:ln>
+        </p:spPr>
+        <p:txBody>
+          <a:bodyPr xmlns:a="http://schemas.openxmlformats.org/drawingml/2006/main"/>
+          <a:lstStyle xmlns:a="http://schemas.openxmlformats.org/drawingml/2006/main"/>
+          <a:p xmlns:a="http://schemas.openxmlformats.org/drawingml/2006/main">
+            <a:pPr>
+              <a:defRPr sz="1500">
+                <a:solidFill>
+                  <a:srgbClr val="A7B0BC"/>
+                </a:solidFill>
+                <a:latin typeface="Aptos"/>
+                <a:ea typeface="Aptos"/>
+                <a:cs typeface="Aptos"/>
+              </a:defRPr>
+            </a:pPr>
+            <a:r>
+              <a:rPr sz="1500">
+                <a:solidFill>
+                  <a:srgbClr val="A7B0BC"/>
+                </a:solidFill>
+                <a:latin typeface="Aptos"/>
+                <a:ea typeface="Aptos"/>
+                <a:cs typeface="Aptos"/>
+              </a:rPr>
+              <a:t>How the EUR 560k AWS run-rate and 57% reduction are calculated.</a:t>
+            </a:r>
+          </a:p>
+        </p:txBody>
+      </p:sp>
+      <p:sp>
+        <p:nvSpPr>
+          <p:cNvPr id="8" name="formula-card">
+            <a:extLst xmlns:a="http://schemas.openxmlformats.org/drawingml/2006/main">
+              <a:ext uri="{FF2B5EF4-FFF2-40B4-BE49-F238E27FC236}">
+                <a16:creationId xmlns:a16="http://schemas.microsoft.com/office/drawing/2014/main" id="{9A5BB280-FC92-444F-B8AD-27523616E4D7}"/>
+              </a:ext>
+            </a:extLst>
+          </p:cNvPr>
+          <p:cNvSpPr>
+            <a:spLocks xmlns:a="http://schemas.openxmlformats.org/drawingml/2006/main" noGrp="1"/>
+          </p:cNvSpPr>
+          <p:nvPr/>
+        </p:nvSpPr>
+        <p:spPr>
+          <a:xfrm xmlns:a="http://schemas.openxmlformats.org/drawingml/2006/main">
+            <a:off x="552450" y="2209800"/>
+            <a:ext cx="5143500" cy="3124200"/>
           </a:xfrm>
           <a:prstGeom xmlns:a="http://schemas.openxmlformats.org/drawingml/2006/main" prst="roundRect">
             <a:avLst>
-              <a:gd name="adj" fmla="val 2432"/>
+              <a:gd name="adj" fmla="val 3659"/>
             </a:avLst>
           </a:prstGeom>
           <a:solidFill xmlns:a="http://schemas.openxmlformats.org/drawingml/2006/main">
-            <a:srgbClr val="161C26"/>
+            <a:srgbClr val="11161D"/>
           </a:solidFill>
-          <a:ln xmlns:a="http://schemas.openxmlformats.org/drawingml/2006/main" w="12700">
+          <a:ln xmlns:a="http://schemas.openxmlformats.org/drawingml/2006/main" w="9525">
             <a:solidFill>
               <a:srgbClr val="2A3545"/>
             </a:solidFill>
             <a:prstDash val="solid"/>
           </a:ln>
-          <a:effectLst xmlns:a="http://schemas.openxmlformats.org/drawingml/2006/main">
-            <a:outerShdw blurRad="114300" dist="38100" dir="5400000" sx="100000" sy="100000" kx="0" ky="0" algn="bl" rotWithShape="0">
-              <a:srgbClr val="000000">
-                <a:alpha val="35000"/>
-              </a:srgbClr>
-            </a:outerShdw>
-          </a:effectLst>
-        </p:spPr>
-      </p:sp>
-      <p:sp>
-        <p:nvSpPr>
-          <p:cNvPr id="5" name="Text 3">
-            <a:extLst xmlns:a="http://schemas.openxmlformats.org/drawingml/2006/main">
-              <a:ext uri="{FF2B5EF4-FFF2-40B4-BE49-F238E27FC236}">
-                <a16:creationId xmlns:a16="http://schemas.microsoft.com/office/drawing/2014/main" id="{39E58C2F-AC5F-4918-89AC-ECC6DEE46F28}"/>
-              </a:ext>
-            </a:extLst>
-          </p:cNvPr>
-          <p:cNvSpPr>
-            <a:spLocks xmlns:a="http://schemas.openxmlformats.org/drawingml/2006/main" noGrp="1"/>
-          </p:cNvSpPr>
-          <p:nvPr/>
-        </p:nvSpPr>
-        <p:spPr>
-          <a:xfrm xmlns:a="http://schemas.openxmlformats.org/drawingml/2006/main">
-            <a:off x="896112" y="1965960"/>
-            <a:ext cx="3017520" cy="457200"/>
-          </a:xfrm>
-          <a:prstGeom xmlns:a="http://schemas.openxmlformats.org/drawingml/2006/main" prst="rect">
-            <a:avLst/>
-          </a:prstGeom>
-          <a:noFill xmlns:a="http://schemas.openxmlformats.org/drawingml/2006/main"/>
-        </p:spPr>
-        <p:txBody>
-          <a:bodyPr xmlns:a="http://schemas.openxmlformats.org/drawingml/2006/main" wrap="square" lIns="0" tIns="0" rIns="0" bIns="0" anchor="ctr"/>
-          <a:lstStyle xmlns:a="http://schemas.openxmlformats.org/drawingml/2006/main"/>
-          <a:p xmlns:a="http://schemas.openxmlformats.org/drawingml/2006/main">
-            <a:pPr marL="0" indent="0">
-              <a:buNone/>
-            </a:pPr>
-            <a:r>
-              <a:rPr sz="1900" b="1">
-                <a:solidFill>
-                  <a:srgbClr val="2E9BFF"/>
-                </a:solidFill>
-                <a:latin typeface="Calibri"/>
-                <a:ea typeface="Calibri"/>
-                <a:cs typeface="Calibri"/>
-              </a:rPr>
-              <a:t>Phase 1 · Foundation</a:t>
-            </a:r>
-          </a:p>
-        </p:txBody>
-      </p:sp>
-      <p:sp>
-        <p:nvSpPr>
-          <p:cNvPr id="6" name="Text 4">
-            <a:extLst xmlns:a="http://schemas.openxmlformats.org/drawingml/2006/main">
-              <a:ext uri="{FF2B5EF4-FFF2-40B4-BE49-F238E27FC236}">
-                <a16:creationId xmlns:a16="http://schemas.microsoft.com/office/drawing/2014/main" id="{4B67E3B5-B6CA-4E6C-8EFD-9AA14BC55959}"/>
-              </a:ext>
-            </a:extLst>
-          </p:cNvPr>
-          <p:cNvSpPr>
-            <a:spLocks xmlns:a="http://schemas.openxmlformats.org/drawingml/2006/main" noGrp="1"/>
-          </p:cNvSpPr>
-          <p:nvPr/>
-        </p:nvSpPr>
-        <p:spPr>
-          <a:xfrm xmlns:a="http://schemas.openxmlformats.org/drawingml/2006/main">
-            <a:off x="896112" y="2432304"/>
-            <a:ext cx="3017520" cy="320040"/>
-          </a:xfrm>
-          <a:prstGeom xmlns:a="http://schemas.openxmlformats.org/drawingml/2006/main" prst="rect">
-            <a:avLst/>
-          </a:prstGeom>
-          <a:noFill xmlns:a="http://schemas.openxmlformats.org/drawingml/2006/main"/>
-        </p:spPr>
-        <p:txBody>
-          <a:bodyPr xmlns:a="http://schemas.openxmlformats.org/drawingml/2006/main" wrap="square" lIns="0" tIns="0" rIns="0" bIns="0" anchor="ctr"/>
-          <a:lstStyle xmlns:a="http://schemas.openxmlformats.org/drawingml/2006/main"/>
-          <a:p xmlns:a="http://schemas.openxmlformats.org/drawingml/2006/main">
-            <a:pPr marL="0" indent="0">
-              <a:buNone/>
-            </a:pPr>
-            <a:r>
-              <a:rPr sz="1300" b="1">
-                <a:solidFill>
-                  <a:srgbClr val="9FB0C3"/>
-                </a:solidFill>
-                <a:latin typeface="Calibri"/>
-                <a:ea typeface="Calibri"/>
-                <a:cs typeface="Calibri"/>
-              </a:rPr>
-              <a:t>Months 1–3</a:t>
-            </a:r>
-          </a:p>
-        </p:txBody>
-      </p:sp>
-      <p:sp>
-        <p:nvSpPr>
-          <p:cNvPr id="7" name="Text 5">
-            <a:extLst xmlns:a="http://schemas.openxmlformats.org/drawingml/2006/main">
-              <a:ext uri="{FF2B5EF4-FFF2-40B4-BE49-F238E27FC236}">
-                <a16:creationId xmlns:a16="http://schemas.microsoft.com/office/drawing/2014/main" id="{B7410B09-221C-404E-A866-027A04BBBFC9}"/>
-              </a:ext>
-            </a:extLst>
-          </p:cNvPr>
-          <p:cNvSpPr>
-            <a:spLocks xmlns:a="http://schemas.openxmlformats.org/drawingml/2006/main" noGrp="1"/>
-          </p:cNvSpPr>
-          <p:nvPr/>
-        </p:nvSpPr>
-        <p:spPr>
-          <a:xfrm xmlns:a="http://schemas.openxmlformats.org/drawingml/2006/main">
-            <a:off x="896112" y="2834640"/>
-            <a:ext cx="3017520" cy="2103120"/>
-          </a:xfrm>
-          <a:prstGeom xmlns:a="http://schemas.openxmlformats.org/drawingml/2006/main" prst="rect">
-            <a:avLst/>
-          </a:prstGeom>
-          <a:noFill xmlns:a="http://schemas.openxmlformats.org/drawingml/2006/main"/>
-        </p:spPr>
-        <p:txBody>
-          <a:bodyPr xmlns:a="http://schemas.openxmlformats.org/drawingml/2006/main" wrap="square" lIns="0" tIns="0" rIns="0" bIns="0" anchor="ctr"/>
-          <a:lstStyle xmlns:a="http://schemas.openxmlformats.org/drawingml/2006/main"/>
-          <a:p xmlns:a="http://schemas.openxmlformats.org/drawingml/2006/main">
-            <a:pPr marL="0" indent="0">
-              <a:lnSpc>
-                <a:spcPct val="115000"/>
-              </a:lnSpc>
-              <a:buNone/>
-            </a:pPr>
-            <a:r>
-              <a:rPr sz="1450">
-                <a:solidFill>
-                  <a:srgbClr val="D6E2F2"/>
-                </a:solidFill>
-                <a:latin typeface="Calibri"/>
-                <a:ea typeface="Calibri"/>
-                <a:cs typeface="Calibri"/>
-              </a:rPr>
-              <a:t>AWS accounts, Terraform baseline, Dev live, DMS migration, Catalog + MWAA, first batch pipelines.</a:t>
-            </a:r>
-          </a:p>
-        </p:txBody>
-      </p:sp>
-      <p:sp>
-        <p:nvSpPr>
-          <p:cNvPr id="8" name="Shape 6">
-            <a:extLst xmlns:a="http://schemas.openxmlformats.org/drawingml/2006/main">
-              <a:ext uri="{FF2B5EF4-FFF2-40B4-BE49-F238E27FC236}">
-                <a16:creationId xmlns:a16="http://schemas.microsoft.com/office/drawing/2014/main" id="{94C66EDE-B777-4654-813A-212B305D3258}"/>
-              </a:ext>
-            </a:extLst>
-          </p:cNvPr>
-          <p:cNvSpPr>
-            <a:spLocks xmlns:a="http://schemas.openxmlformats.org/drawingml/2006/main" noGrp="1"/>
-          </p:cNvSpPr>
-          <p:nvPr/>
-        </p:nvSpPr>
-        <p:spPr>
-          <a:xfrm xmlns:a="http://schemas.openxmlformats.org/drawingml/2006/main">
-            <a:off x="4361688" y="1737360"/>
-            <a:ext cx="3474720" cy="3383280"/>
+        </p:spPr>
+        <p:style>
+          <a:lnRef xmlns:a="http://schemas.openxmlformats.org/drawingml/2006/main" idx="0"/>
+          <a:fillRef xmlns:a="http://schemas.openxmlformats.org/drawingml/2006/main" idx="0"/>
+          <a:effectRef xmlns:a="http://schemas.openxmlformats.org/drawingml/2006/main" idx="4"/>
+          <a:fontRef xmlns:a="http://schemas.openxmlformats.org/drawingml/2006/main" idx="major"/>
+        </p:style>
+      </p:sp>
+      <p:sp>
+        <p:nvSpPr>
+          <p:cNvPr id="9" name="formula-label">
+            <a:extLst xmlns:a="http://schemas.openxmlformats.org/drawingml/2006/main">
+              <a:ext uri="{FF2B5EF4-FFF2-40B4-BE49-F238E27FC236}">
+                <a16:creationId xmlns:a16="http://schemas.microsoft.com/office/drawing/2014/main" id="{0A0B7AEB-A8D7-4692-B798-0D5DA291F80D}"/>
+              </a:ext>
+            </a:extLst>
+          </p:cNvPr>
+          <p:cNvSpPr>
+            <a:spLocks xmlns:a="http://schemas.openxmlformats.org/drawingml/2006/main" noGrp="1"/>
+          </p:cNvSpPr>
+          <p:nvPr/>
+        </p:nvSpPr>
+        <p:spPr>
+          <a:xfrm xmlns:a="http://schemas.openxmlformats.org/drawingml/2006/main">
+            <a:off x="819150" y="2476500"/>
+            <a:ext cx="2095500" cy="228600"/>
+          </a:xfrm>
+          <a:prstGeom xmlns:a="http://schemas.openxmlformats.org/drawingml/2006/main" prst="rect">
+            <a:avLst/>
+          </a:prstGeom>
+          <a:noFill xmlns:a="http://schemas.openxmlformats.org/drawingml/2006/main"/>
+          <a:ln xmlns:a="http://schemas.openxmlformats.org/drawingml/2006/main" w="0">
+            <a:noFill/>
+            <a:prstDash val="solid"/>
+          </a:ln>
+        </p:spPr>
+        <p:txBody>
+          <a:bodyPr xmlns:a="http://schemas.openxmlformats.org/drawingml/2006/main"/>
+          <a:lstStyle xmlns:a="http://schemas.openxmlformats.org/drawingml/2006/main"/>
+          <a:p xmlns:a="http://schemas.openxmlformats.org/drawingml/2006/main">
+            <a:pPr>
+              <a:defRPr sz="900" b="1">
+                <a:solidFill>
+                  <a:srgbClr val="7F8B99"/>
+                </a:solidFill>
+                <a:latin typeface="Aptos"/>
+                <a:ea typeface="Aptos"/>
+                <a:cs typeface="Aptos"/>
+              </a:defRPr>
+            </a:pPr>
+            <a:r>
+              <a:rPr sz="900" b="1">
+                <a:solidFill>
+                  <a:srgbClr val="7F8B99"/>
+                </a:solidFill>
+                <a:latin typeface="Aptos"/>
+                <a:ea typeface="Aptos"/>
+                <a:cs typeface="Aptos"/>
+              </a:rPr>
+              <a:t>SAVINGS FORMULA</a:t>
+            </a:r>
+          </a:p>
+        </p:txBody>
+      </p:sp>
+      <p:sp>
+        <p:nvSpPr>
+          <p:cNvPr id="10" name="formula-main">
+            <a:extLst xmlns:a="http://schemas.openxmlformats.org/drawingml/2006/main">
+              <a:ext uri="{FF2B5EF4-FFF2-40B4-BE49-F238E27FC236}">
+                <a16:creationId xmlns:a16="http://schemas.microsoft.com/office/drawing/2014/main" id="{50E991FE-3BE5-4893-9823-25A8CB97AA40}"/>
+              </a:ext>
+            </a:extLst>
+          </p:cNvPr>
+          <p:cNvSpPr>
+            <a:spLocks xmlns:a="http://schemas.openxmlformats.org/drawingml/2006/main" noGrp="1"/>
+          </p:cNvSpPr>
+          <p:nvPr/>
+        </p:nvSpPr>
+        <p:spPr>
+          <a:xfrm xmlns:a="http://schemas.openxmlformats.org/drawingml/2006/main">
+            <a:off x="819150" y="2819400"/>
+            <a:ext cx="4572000" cy="781050"/>
+          </a:xfrm>
+          <a:prstGeom xmlns:a="http://schemas.openxmlformats.org/drawingml/2006/main" prst="rect">
+            <a:avLst/>
+          </a:prstGeom>
+          <a:noFill xmlns:a="http://schemas.openxmlformats.org/drawingml/2006/main"/>
+          <a:ln xmlns:a="http://schemas.openxmlformats.org/drawingml/2006/main" w="0">
+            <a:noFill/>
+            <a:prstDash val="solid"/>
+          </a:ln>
+        </p:spPr>
+        <p:txBody>
+          <a:bodyPr xmlns:a="http://schemas.openxmlformats.org/drawingml/2006/main"/>
+          <a:lstStyle xmlns:a="http://schemas.openxmlformats.org/drawingml/2006/main"/>
+          <a:p xmlns:a="http://schemas.openxmlformats.org/drawingml/2006/main">
+            <a:pPr>
+              <a:defRPr sz="2250" b="1">
+                <a:solidFill>
+                  <a:srgbClr val="FFFFFF"/>
+                </a:solidFill>
+                <a:latin typeface="Aptos Display"/>
+                <a:ea typeface="Aptos Display"/>
+                <a:cs typeface="Aptos Display"/>
+              </a:defRPr>
+            </a:pPr>
+            <a:r>
+              <a:rPr sz="2250" b="1">
+                <a:solidFill>
+                  <a:srgbClr val="FFFFFF"/>
+                </a:solidFill>
+                <a:latin typeface="Aptos Display"/>
+                <a:ea typeface="Aptos Display"/>
+                <a:cs typeface="Aptos Display"/>
+              </a:rPr>
+              <a:t>EUR 1.30M - EUR 0.56M = EUR 0.74M saved</a:t>
+            </a:r>
+          </a:p>
+        </p:txBody>
+      </p:sp>
+      <p:sp>
+        <p:nvSpPr>
+          <p:cNvPr id="11" name="baseline-copy">
+            <a:extLst xmlns:a="http://schemas.openxmlformats.org/drawingml/2006/main">
+              <a:ext uri="{FF2B5EF4-FFF2-40B4-BE49-F238E27FC236}">
+                <a16:creationId xmlns:a16="http://schemas.microsoft.com/office/drawing/2014/main" id="{0BC8426B-62FA-40A2-AEB6-ECC0A97F2BDA}"/>
+              </a:ext>
+            </a:extLst>
+          </p:cNvPr>
+          <p:cNvSpPr>
+            <a:spLocks xmlns:a="http://schemas.openxmlformats.org/drawingml/2006/main" noGrp="1"/>
+          </p:cNvSpPr>
+          <p:nvPr/>
+        </p:nvSpPr>
+        <p:spPr>
+          <a:xfrm xmlns:a="http://schemas.openxmlformats.org/drawingml/2006/main">
+            <a:off x="819150" y="3733800"/>
+            <a:ext cx="4362450" cy="685800"/>
+          </a:xfrm>
+          <a:prstGeom xmlns:a="http://schemas.openxmlformats.org/drawingml/2006/main" prst="rect">
+            <a:avLst/>
+          </a:prstGeom>
+          <a:noFill xmlns:a="http://schemas.openxmlformats.org/drawingml/2006/main"/>
+          <a:ln xmlns:a="http://schemas.openxmlformats.org/drawingml/2006/main" w="0">
+            <a:noFill/>
+            <a:prstDash val="solid"/>
+          </a:ln>
+        </p:spPr>
+        <p:txBody>
+          <a:bodyPr xmlns:a="http://schemas.openxmlformats.org/drawingml/2006/main"/>
+          <a:lstStyle xmlns:a="http://schemas.openxmlformats.org/drawingml/2006/main"/>
+          <a:p xmlns:a="http://schemas.openxmlformats.org/drawingml/2006/main">
+            <a:pPr>
+              <a:defRPr sz="1200">
+                <a:solidFill>
+                  <a:srgbClr val="B9C3CF"/>
+                </a:solidFill>
+                <a:latin typeface="Aptos"/>
+                <a:ea typeface="Aptos"/>
+                <a:cs typeface="Aptos"/>
+              </a:defRPr>
+            </a:pPr>
+            <a:r>
+              <a:rPr sz="1200">
+                <a:solidFill>
+                  <a:srgbClr val="B9C3CF"/>
+                </a:solidFill>
+                <a:latin typeface="Aptos"/>
+                <a:ea typeface="Aptos"/>
+                <a:cs typeface="Aptos"/>
+              </a:rPr>
+              <a:t>Baseline comes from the RFP problem statement: Manga pays about 2x competitors. We model competitor-normal cost at EUR 650k/year, so current run-rate = EUR 1.30M/year.</a:t>
+            </a:r>
+          </a:p>
+        </p:txBody>
+      </p:sp>
+      <p:sp>
+        <p:nvSpPr>
+          <p:cNvPr id="12" name="reduction-pill-bg">
+            <a:extLst xmlns:a="http://schemas.openxmlformats.org/drawingml/2006/main">
+              <a:ext uri="{FF2B5EF4-FFF2-40B4-BE49-F238E27FC236}">
+                <a16:creationId xmlns:a16="http://schemas.microsoft.com/office/drawing/2014/main" id="{7CBA5F4E-A19E-4D34-A80D-A1ED73730E44}"/>
+              </a:ext>
+            </a:extLst>
+          </p:cNvPr>
+          <p:cNvSpPr>
+            <a:spLocks xmlns:a="http://schemas.openxmlformats.org/drawingml/2006/main" noGrp="1"/>
+          </p:cNvSpPr>
+          <p:nvPr/>
+        </p:nvSpPr>
+        <p:spPr>
+          <a:xfrm xmlns:a="http://schemas.openxmlformats.org/drawingml/2006/main">
+            <a:off x="819150" y="4686300"/>
+            <a:ext cx="2133600" cy="419100"/>
           </a:xfrm>
           <a:prstGeom xmlns:a="http://schemas.openxmlformats.org/drawingml/2006/main" prst="roundRect">
             <a:avLst>
-              <a:gd name="adj" fmla="val 2432"/>
+              <a:gd name="adj" fmla="val 27273"/>
             </a:avLst>
           </a:prstGeom>
           <a:solidFill xmlns:a="http://schemas.openxmlformats.org/drawingml/2006/main">
-            <a:srgbClr val="161C26"/>
+            <a:srgbClr val="061F31"/>
           </a:solidFill>
-          <a:ln xmlns:a="http://schemas.openxmlformats.org/drawingml/2006/main" w="12700">
+          <a:ln xmlns:a="http://schemas.openxmlformats.org/drawingml/2006/main" w="9525">
+            <a:solidFill>
+              <a:srgbClr val="0B8FD3"/>
+            </a:solidFill>
+            <a:prstDash val="solid"/>
+          </a:ln>
+        </p:spPr>
+      </p:sp>
+      <p:sp>
+        <p:nvSpPr>
+          <p:cNvPr id="13" name="reduction-pill-text">
+            <a:extLst xmlns:a="http://schemas.openxmlformats.org/drawingml/2006/main">
+              <a:ext uri="{FF2B5EF4-FFF2-40B4-BE49-F238E27FC236}">
+                <a16:creationId xmlns:a16="http://schemas.microsoft.com/office/drawing/2014/main" id="{850DED13-9128-43DD-B731-983504A320AC}"/>
+              </a:ext>
+            </a:extLst>
+          </p:cNvPr>
+          <p:cNvSpPr>
+            <a:spLocks xmlns:a="http://schemas.openxmlformats.org/drawingml/2006/main" noGrp="1"/>
+          </p:cNvSpPr>
+          <p:nvPr/>
+        </p:nvSpPr>
+        <p:spPr>
+          <a:xfrm xmlns:a="http://schemas.openxmlformats.org/drawingml/2006/main">
+            <a:off x="990600" y="4791075"/>
+            <a:ext cx="1790700" cy="209550"/>
+          </a:xfrm>
+          <a:prstGeom xmlns:a="http://schemas.openxmlformats.org/drawingml/2006/main" prst="rect">
+            <a:avLst/>
+          </a:prstGeom>
+          <a:noFill xmlns:a="http://schemas.openxmlformats.org/drawingml/2006/main"/>
+          <a:ln xmlns:a="http://schemas.openxmlformats.org/drawingml/2006/main" w="0">
+            <a:noFill/>
+            <a:prstDash val="solid"/>
+          </a:ln>
+        </p:spPr>
+        <p:txBody>
+          <a:bodyPr xmlns:a="http://schemas.openxmlformats.org/drawingml/2006/main"/>
+          <a:lstStyle xmlns:a="http://schemas.openxmlformats.org/drawingml/2006/main"/>
+          <a:p xmlns:a="http://schemas.openxmlformats.org/drawingml/2006/main">
+            <a:pPr>
+              <a:defRPr sz="1275" b="1">
+                <a:solidFill>
+                  <a:srgbClr val="FFFFFF"/>
+                </a:solidFill>
+                <a:latin typeface="Aptos"/>
+                <a:ea typeface="Aptos"/>
+                <a:cs typeface="Aptos"/>
+              </a:defRPr>
+            </a:pPr>
+            <a:r>
+              <a:rPr sz="1275" b="1">
+                <a:solidFill>
+                  <a:srgbClr val="FFFFFF"/>
+                </a:solidFill>
+                <a:latin typeface="Aptos"/>
+                <a:ea typeface="Aptos"/>
+                <a:cs typeface="Aptos"/>
+              </a:rPr>
+              <a:t>56.9% reduction</a:t>
+            </a:r>
+          </a:p>
+        </p:txBody>
+      </p:sp>
+      <p:sp>
+        <p:nvSpPr>
+          <p:cNvPr id="14" name="rounding-note">
+            <a:extLst xmlns:a="http://schemas.openxmlformats.org/drawingml/2006/main">
+              <a:ext uri="{FF2B5EF4-FFF2-40B4-BE49-F238E27FC236}">
+                <a16:creationId xmlns:a16="http://schemas.microsoft.com/office/drawing/2014/main" id="{123289A1-BD43-4807-B759-B013801CA34F}"/>
+              </a:ext>
+            </a:extLst>
+          </p:cNvPr>
+          <p:cNvSpPr>
+            <a:spLocks xmlns:a="http://schemas.openxmlformats.org/drawingml/2006/main" noGrp="1"/>
+          </p:cNvSpPr>
+          <p:nvPr/>
+        </p:nvSpPr>
+        <p:spPr>
+          <a:xfrm xmlns:a="http://schemas.openxmlformats.org/drawingml/2006/main">
+            <a:off x="3143250" y="4791075"/>
+            <a:ext cx="2000250" cy="209550"/>
+          </a:xfrm>
+          <a:prstGeom xmlns:a="http://schemas.openxmlformats.org/drawingml/2006/main" prst="rect">
+            <a:avLst/>
+          </a:prstGeom>
+          <a:noFill xmlns:a="http://schemas.openxmlformats.org/drawingml/2006/main"/>
+          <a:ln xmlns:a="http://schemas.openxmlformats.org/drawingml/2006/main" w="0">
+            <a:noFill/>
+            <a:prstDash val="solid"/>
+          </a:ln>
+        </p:spPr>
+        <p:txBody>
+          <a:bodyPr xmlns:a="http://schemas.openxmlformats.org/drawingml/2006/main"/>
+          <a:lstStyle xmlns:a="http://schemas.openxmlformats.org/drawingml/2006/main"/>
+          <a:p xmlns:a="http://schemas.openxmlformats.org/drawingml/2006/main">
+            <a:pPr>
+              <a:defRPr sz="1125">
+                <a:solidFill>
+                  <a:srgbClr val="8FA0B2"/>
+                </a:solidFill>
+                <a:latin typeface="Aptos"/>
+                <a:ea typeface="Aptos"/>
+                <a:cs typeface="Aptos"/>
+              </a:defRPr>
+            </a:pPr>
+            <a:r>
+              <a:rPr sz="1125">
+                <a:solidFill>
+                  <a:srgbClr val="8FA0B2"/>
+                </a:solidFill>
+                <a:latin typeface="Aptos"/>
+                <a:ea typeface="Aptos"/>
+                <a:cs typeface="Aptos"/>
+              </a:rPr>
+              <a:t>Rounded to 57% in the proposal.</a:t>
+            </a:r>
+          </a:p>
+        </p:txBody>
+      </p:sp>
+      <p:sp>
+        <p:nvSpPr>
+          <p:cNvPr id="15" name="budget-card">
+            <a:extLst xmlns:a="http://schemas.openxmlformats.org/drawingml/2006/main">
+              <a:ext uri="{FF2B5EF4-FFF2-40B4-BE49-F238E27FC236}">
+                <a16:creationId xmlns:a16="http://schemas.microsoft.com/office/drawing/2014/main" id="{D9C1E6BD-990C-458C-BCBA-512EE15875EB}"/>
+              </a:ext>
+            </a:extLst>
+          </p:cNvPr>
+          <p:cNvSpPr>
+            <a:spLocks xmlns:a="http://schemas.openxmlformats.org/drawingml/2006/main" noGrp="1"/>
+          </p:cNvSpPr>
+          <p:nvPr/>
+        </p:nvSpPr>
+        <p:spPr>
+          <a:xfrm xmlns:a="http://schemas.openxmlformats.org/drawingml/2006/main">
+            <a:off x="5943600" y="2209800"/>
+            <a:ext cx="2819400" cy="3124200"/>
+          </a:xfrm>
+          <a:prstGeom xmlns:a="http://schemas.openxmlformats.org/drawingml/2006/main" prst="roundRect">
+            <a:avLst>
+              <a:gd name="adj" fmla="val 4054"/>
+            </a:avLst>
+          </a:prstGeom>
+          <a:solidFill xmlns:a="http://schemas.openxmlformats.org/drawingml/2006/main">
+            <a:srgbClr val="101820"/>
+          </a:solidFill>
+          <a:ln xmlns:a="http://schemas.openxmlformats.org/drawingml/2006/main" w="9525">
             <a:solidFill>
               <a:srgbClr val="2A3545"/>
             </a:solidFill>
             <a:prstDash val="solid"/>
           </a:ln>
-          <a:effectLst xmlns:a="http://schemas.openxmlformats.org/drawingml/2006/main">
-            <a:outerShdw blurRad="114300" dist="38100" dir="5400000" sx="100000" sy="100000" kx="0" ky="0" algn="bl" rotWithShape="0">
-              <a:srgbClr val="000000">
-                <a:alpha val="35000"/>
-              </a:srgbClr>
-            </a:outerShdw>
-          </a:effectLst>
-        </p:spPr>
-      </p:sp>
-      <p:sp>
-        <p:nvSpPr>
-          <p:cNvPr id="9" name="Text 7">
-            <a:extLst xmlns:a="http://schemas.openxmlformats.org/drawingml/2006/main">
-              <a:ext uri="{FF2B5EF4-FFF2-40B4-BE49-F238E27FC236}">
-                <a16:creationId xmlns:a16="http://schemas.microsoft.com/office/drawing/2014/main" id="{674FEA85-50D2-4997-ACEF-F4CDC10D0CEE}"/>
-              </a:ext>
-            </a:extLst>
-          </p:cNvPr>
-          <p:cNvSpPr>
-            <a:spLocks xmlns:a="http://schemas.openxmlformats.org/drawingml/2006/main" noGrp="1"/>
-          </p:cNvSpPr>
-          <p:nvPr/>
-        </p:nvSpPr>
-        <p:spPr>
-          <a:xfrm xmlns:a="http://schemas.openxmlformats.org/drawingml/2006/main">
-            <a:off x="4617720" y="1965960"/>
-            <a:ext cx="3017520" cy="457200"/>
-          </a:xfrm>
-          <a:prstGeom xmlns:a="http://schemas.openxmlformats.org/drawingml/2006/main" prst="rect">
-            <a:avLst/>
-          </a:prstGeom>
-          <a:noFill xmlns:a="http://schemas.openxmlformats.org/drawingml/2006/main"/>
-        </p:spPr>
-        <p:txBody>
-          <a:bodyPr xmlns:a="http://schemas.openxmlformats.org/drawingml/2006/main" wrap="square" lIns="0" tIns="0" rIns="0" bIns="0" anchor="ctr"/>
-          <a:lstStyle xmlns:a="http://schemas.openxmlformats.org/drawingml/2006/main"/>
-          <a:p xmlns:a="http://schemas.openxmlformats.org/drawingml/2006/main">
-            <a:pPr marL="0" indent="0">
-              <a:buNone/>
-            </a:pPr>
-            <a:r>
-              <a:rPr sz="1900" b="1">
-                <a:solidFill>
-                  <a:srgbClr val="8A6CF6"/>
-                </a:solidFill>
-                <a:latin typeface="Calibri"/>
-                <a:ea typeface="Calibri"/>
-                <a:cs typeface="Calibri"/>
-              </a:rPr>
-              <a:t>Phase 2 · Build &amp; Validate</a:t>
-            </a:r>
-          </a:p>
-        </p:txBody>
-      </p:sp>
-      <p:sp>
-        <p:nvSpPr>
-          <p:cNvPr id="10" name="Text 8">
-            <a:extLst xmlns:a="http://schemas.openxmlformats.org/drawingml/2006/main">
-              <a:ext uri="{FF2B5EF4-FFF2-40B4-BE49-F238E27FC236}">
-                <a16:creationId xmlns:a16="http://schemas.microsoft.com/office/drawing/2014/main" id="{F2AA2822-3AB2-4E4E-922E-0985B3BE6213}"/>
-              </a:ext>
-            </a:extLst>
-          </p:cNvPr>
-          <p:cNvSpPr>
-            <a:spLocks xmlns:a="http://schemas.openxmlformats.org/drawingml/2006/main" noGrp="1"/>
-          </p:cNvSpPr>
-          <p:nvPr/>
-        </p:nvSpPr>
-        <p:spPr>
-          <a:xfrm xmlns:a="http://schemas.openxmlformats.org/drawingml/2006/main">
-            <a:off x="4617720" y="2432304"/>
-            <a:ext cx="3017520" cy="320040"/>
-          </a:xfrm>
-          <a:prstGeom xmlns:a="http://schemas.openxmlformats.org/drawingml/2006/main" prst="rect">
-            <a:avLst/>
-          </a:prstGeom>
-          <a:noFill xmlns:a="http://schemas.openxmlformats.org/drawingml/2006/main"/>
-        </p:spPr>
-        <p:txBody>
-          <a:bodyPr xmlns:a="http://schemas.openxmlformats.org/drawingml/2006/main" wrap="square" lIns="0" tIns="0" rIns="0" bIns="0" anchor="ctr"/>
-          <a:lstStyle xmlns:a="http://schemas.openxmlformats.org/drawingml/2006/main"/>
-          <a:p xmlns:a="http://schemas.openxmlformats.org/drawingml/2006/main">
-            <a:pPr marL="0" indent="0">
-              <a:buNone/>
-            </a:pPr>
-            <a:r>
-              <a:rPr sz="1300" b="1">
-                <a:solidFill>
-                  <a:srgbClr val="9FB0C3"/>
-                </a:solidFill>
-                <a:latin typeface="Calibri"/>
-                <a:ea typeface="Calibri"/>
-                <a:cs typeface="Calibri"/>
-              </a:rPr>
-              <a:t>Months 4–6</a:t>
-            </a:r>
-          </a:p>
-        </p:txBody>
-      </p:sp>
-      <p:sp>
-        <p:nvSpPr>
-          <p:cNvPr id="11" name="Text 9">
-            <a:extLst xmlns:a="http://schemas.openxmlformats.org/drawingml/2006/main">
-              <a:ext uri="{FF2B5EF4-FFF2-40B4-BE49-F238E27FC236}">
-                <a16:creationId xmlns:a16="http://schemas.microsoft.com/office/drawing/2014/main" id="{96D7CA3F-8860-4E19-B1AA-10F2C3ADBFC7}"/>
-              </a:ext>
-            </a:extLst>
-          </p:cNvPr>
-          <p:cNvSpPr>
-            <a:spLocks xmlns:a="http://schemas.openxmlformats.org/drawingml/2006/main" noGrp="1"/>
-          </p:cNvSpPr>
-          <p:nvPr/>
-        </p:nvSpPr>
-        <p:spPr>
-          <a:xfrm xmlns:a="http://schemas.openxmlformats.org/drawingml/2006/main">
-            <a:off x="4617720" y="2834640"/>
-            <a:ext cx="3017520" cy="2103120"/>
-          </a:xfrm>
-          <a:prstGeom xmlns:a="http://schemas.openxmlformats.org/drawingml/2006/main" prst="rect">
-            <a:avLst/>
-          </a:prstGeom>
-          <a:noFill xmlns:a="http://schemas.openxmlformats.org/drawingml/2006/main"/>
-        </p:spPr>
-        <p:txBody>
-          <a:bodyPr xmlns:a="http://schemas.openxmlformats.org/drawingml/2006/main" wrap="square" lIns="0" tIns="0" rIns="0" bIns="0" anchor="ctr"/>
-          <a:lstStyle xmlns:a="http://schemas.openxmlformats.org/drawingml/2006/main"/>
-          <a:p xmlns:a="http://schemas.openxmlformats.org/drawingml/2006/main">
-            <a:pPr marL="0" indent="0">
-              <a:lnSpc>
-                <a:spcPct val="115000"/>
-              </a:lnSpc>
-              <a:buNone/>
-            </a:pPr>
-            <a:r>
-              <a:rPr sz="1450">
-                <a:solidFill>
-                  <a:srgbClr val="D6E2F2"/>
-                </a:solidFill>
-                <a:latin typeface="Calibri"/>
-                <a:ea typeface="Calibri"/>
-                <a:cs typeface="Calibri"/>
-              </a:rPr>
-              <a:t>Pre-Prod live, Kinesis streaming, Glue DQ + Lake Formation, QuickSight replacing Excel, first ML model.</a:t>
-            </a:r>
-          </a:p>
-        </p:txBody>
-      </p:sp>
-      <p:sp>
-        <p:nvSpPr>
-          <p:cNvPr id="12" name="Shape 10">
-            <a:extLst xmlns:a="http://schemas.openxmlformats.org/drawingml/2006/main">
-              <a:ext uri="{FF2B5EF4-FFF2-40B4-BE49-F238E27FC236}">
-                <a16:creationId xmlns:a16="http://schemas.microsoft.com/office/drawing/2014/main" id="{7DD6A566-276A-48CC-A5B7-44975A040F95}"/>
-              </a:ext>
-            </a:extLst>
-          </p:cNvPr>
-          <p:cNvSpPr>
-            <a:spLocks xmlns:a="http://schemas.openxmlformats.org/drawingml/2006/main" noGrp="1"/>
-          </p:cNvSpPr>
-          <p:nvPr/>
-        </p:nvSpPr>
-        <p:spPr>
-          <a:xfrm xmlns:a="http://schemas.openxmlformats.org/drawingml/2006/main">
-            <a:off x="8083296" y="1737360"/>
-            <a:ext cx="3474720" cy="3383280"/>
+        </p:spPr>
+        <p:style>
+          <a:lnRef xmlns:a="http://schemas.openxmlformats.org/drawingml/2006/main" idx="0"/>
+          <a:fillRef xmlns:a="http://schemas.openxmlformats.org/drawingml/2006/main" idx="0"/>
+          <a:effectRef xmlns:a="http://schemas.openxmlformats.org/drawingml/2006/main" idx="4"/>
+          <a:fontRef xmlns:a="http://schemas.openxmlformats.org/drawingml/2006/main" idx="major"/>
+        </p:style>
+      </p:sp>
+      <p:sp>
+        <p:nvSpPr>
+          <p:cNvPr id="16" name="budget-label">
+            <a:extLst xmlns:a="http://schemas.openxmlformats.org/drawingml/2006/main">
+              <a:ext uri="{FF2B5EF4-FFF2-40B4-BE49-F238E27FC236}">
+                <a16:creationId xmlns:a16="http://schemas.microsoft.com/office/drawing/2014/main" id="{93C1FB78-1C46-408E-A1DA-794008A213B9}"/>
+              </a:ext>
+            </a:extLst>
+          </p:cNvPr>
+          <p:cNvSpPr>
+            <a:spLocks xmlns:a="http://schemas.openxmlformats.org/drawingml/2006/main" noGrp="1"/>
+          </p:cNvSpPr>
+          <p:nvPr/>
+        </p:nvSpPr>
+        <p:spPr>
+          <a:xfrm xmlns:a="http://schemas.openxmlformats.org/drawingml/2006/main">
+            <a:off x="6172200" y="2476500"/>
+            <a:ext cx="2095500" cy="228600"/>
+          </a:xfrm>
+          <a:prstGeom xmlns:a="http://schemas.openxmlformats.org/drawingml/2006/main" prst="rect">
+            <a:avLst/>
+          </a:prstGeom>
+          <a:noFill xmlns:a="http://schemas.openxmlformats.org/drawingml/2006/main"/>
+          <a:ln xmlns:a="http://schemas.openxmlformats.org/drawingml/2006/main" w="0">
+            <a:noFill/>
+            <a:prstDash val="solid"/>
+          </a:ln>
+        </p:spPr>
+        <p:txBody>
+          <a:bodyPr xmlns:a="http://schemas.openxmlformats.org/drawingml/2006/main"/>
+          <a:lstStyle xmlns:a="http://schemas.openxmlformats.org/drawingml/2006/main"/>
+          <a:p xmlns:a="http://schemas.openxmlformats.org/drawingml/2006/main">
+            <a:pPr>
+              <a:defRPr sz="900" b="1">
+                <a:solidFill>
+                  <a:srgbClr val="7F8B99"/>
+                </a:solidFill>
+                <a:latin typeface="Aptos"/>
+                <a:ea typeface="Aptos"/>
+                <a:cs typeface="Aptos"/>
+              </a:defRPr>
+            </a:pPr>
+            <a:r>
+              <a:rPr sz="900" b="1">
+                <a:solidFill>
+                  <a:srgbClr val="7F8B99"/>
+                </a:solidFill>
+                <a:latin typeface="Aptos"/>
+                <a:ea typeface="Aptos"/>
+                <a:cs typeface="Aptos"/>
+              </a:rPr>
+              <a:t>AWS BUDGET BRIDGE</a:t>
+            </a:r>
+          </a:p>
+        </p:txBody>
+      </p:sp>
+      <p:sp>
+        <p:nvSpPr>
+          <p:cNvPr id="17" name="budget-rule-Direct AWS meters">
+            <a:extLst xmlns:a="http://schemas.openxmlformats.org/drawingml/2006/main">
+              <a:ext uri="{FF2B5EF4-FFF2-40B4-BE49-F238E27FC236}">
+                <a16:creationId xmlns:a16="http://schemas.microsoft.com/office/drawing/2014/main" id="{E65C7F04-0A18-44A4-9980-A5DA97BD5143}"/>
+              </a:ext>
+            </a:extLst>
+          </p:cNvPr>
+          <p:cNvSpPr>
+            <a:spLocks xmlns:a="http://schemas.openxmlformats.org/drawingml/2006/main" noGrp="1"/>
+          </p:cNvSpPr>
+          <p:nvPr/>
+        </p:nvSpPr>
+        <p:spPr>
+          <a:xfrm xmlns:a="http://schemas.openxmlformats.org/drawingml/2006/main">
+            <a:off x="6172200" y="3181350"/>
+            <a:ext cx="2362200" cy="9525"/>
+          </a:xfrm>
+          <a:prstGeom xmlns:a="http://schemas.openxmlformats.org/drawingml/2006/main" prst="rect">
+            <a:avLst/>
+          </a:prstGeom>
+          <a:solidFill xmlns:a="http://schemas.openxmlformats.org/drawingml/2006/main">
+            <a:srgbClr val="263241"/>
+          </a:solidFill>
+          <a:ln xmlns:a="http://schemas.openxmlformats.org/drawingml/2006/main" w="0">
+            <a:noFill/>
+            <a:prstDash val="solid"/>
+          </a:ln>
+        </p:spPr>
+      </p:sp>
+      <p:sp>
+        <p:nvSpPr>
+          <p:cNvPr id="18" name="budget-label-Direct AWS meters">
+            <a:extLst xmlns:a="http://schemas.openxmlformats.org/drawingml/2006/main">
+              <a:ext uri="{FF2B5EF4-FFF2-40B4-BE49-F238E27FC236}">
+                <a16:creationId xmlns:a16="http://schemas.microsoft.com/office/drawing/2014/main" id="{8E857C03-83CA-4DB4-83EA-0C5ACDD90894}"/>
+              </a:ext>
+            </a:extLst>
+          </p:cNvPr>
+          <p:cNvSpPr>
+            <a:spLocks xmlns:a="http://schemas.openxmlformats.org/drawingml/2006/main" noGrp="1"/>
+          </p:cNvSpPr>
+          <p:nvPr/>
+        </p:nvSpPr>
+        <p:spPr>
+          <a:xfrm xmlns:a="http://schemas.openxmlformats.org/drawingml/2006/main">
+            <a:off x="6172200" y="2895600"/>
+            <a:ext cx="1504950" cy="228600"/>
+          </a:xfrm>
+          <a:prstGeom xmlns:a="http://schemas.openxmlformats.org/drawingml/2006/main" prst="rect">
+            <a:avLst/>
+          </a:prstGeom>
+          <a:noFill xmlns:a="http://schemas.openxmlformats.org/drawingml/2006/main"/>
+          <a:ln xmlns:a="http://schemas.openxmlformats.org/drawingml/2006/main" w="0">
+            <a:noFill/>
+            <a:prstDash val="solid"/>
+          </a:ln>
+        </p:spPr>
+        <p:txBody>
+          <a:bodyPr xmlns:a="http://schemas.openxmlformats.org/drawingml/2006/main"/>
+          <a:lstStyle xmlns:a="http://schemas.openxmlformats.org/drawingml/2006/main"/>
+          <a:p xmlns:a="http://schemas.openxmlformats.org/drawingml/2006/main">
+            <a:pPr>
+              <a:defRPr sz="1050">
+                <a:solidFill>
+                  <a:srgbClr val="B9C3CF"/>
+                </a:solidFill>
+                <a:latin typeface="Aptos"/>
+                <a:ea typeface="Aptos"/>
+                <a:cs typeface="Aptos"/>
+              </a:defRPr>
+            </a:pPr>
+            <a:r>
+              <a:rPr sz="1050">
+                <a:solidFill>
+                  <a:srgbClr val="B9C3CF"/>
+                </a:solidFill>
+                <a:latin typeface="Aptos"/>
+                <a:ea typeface="Aptos"/>
+                <a:cs typeface="Aptos"/>
+              </a:rPr>
+              <a:t>Direct AWS meters</a:t>
+            </a:r>
+          </a:p>
+        </p:txBody>
+      </p:sp>
+      <p:sp>
+        <p:nvSpPr>
+          <p:cNvPr id="19" name="budget-value-Direct AWS meters">
+            <a:extLst xmlns:a="http://schemas.openxmlformats.org/drawingml/2006/main">
+              <a:ext uri="{FF2B5EF4-FFF2-40B4-BE49-F238E27FC236}">
+                <a16:creationId xmlns:a16="http://schemas.microsoft.com/office/drawing/2014/main" id="{EBBA60DE-1F04-4D3E-8B9B-F39343F05954}"/>
+              </a:ext>
+            </a:extLst>
+          </p:cNvPr>
+          <p:cNvSpPr>
+            <a:spLocks xmlns:a="http://schemas.openxmlformats.org/drawingml/2006/main" noGrp="1"/>
+          </p:cNvSpPr>
+          <p:nvPr/>
+        </p:nvSpPr>
+        <p:spPr>
+          <a:xfrm xmlns:a="http://schemas.openxmlformats.org/drawingml/2006/main">
+            <a:off x="7677150" y="2895600"/>
+            <a:ext cx="857250" cy="228600"/>
+          </a:xfrm>
+          <a:prstGeom xmlns:a="http://schemas.openxmlformats.org/drawingml/2006/main" prst="rect">
+            <a:avLst/>
+          </a:prstGeom>
+          <a:noFill xmlns:a="http://schemas.openxmlformats.org/drawingml/2006/main"/>
+          <a:ln xmlns:a="http://schemas.openxmlformats.org/drawingml/2006/main" w="0">
+            <a:noFill/>
+            <a:prstDash val="solid"/>
+          </a:ln>
+        </p:spPr>
+        <p:txBody>
+          <a:bodyPr xmlns:a="http://schemas.openxmlformats.org/drawingml/2006/main"/>
+          <a:lstStyle xmlns:a="http://schemas.openxmlformats.org/drawingml/2006/main"/>
+          <a:p xmlns:a="http://schemas.openxmlformats.org/drawingml/2006/main">
+            <a:pPr algn="r">
+              <a:defRPr sz="1050" b="1">
+                <a:solidFill>
+                  <a:srgbClr val="FFFFFF"/>
+                </a:solidFill>
+                <a:latin typeface="Aptos"/>
+                <a:ea typeface="Aptos"/>
+                <a:cs typeface="Aptos"/>
+              </a:defRPr>
+            </a:pPr>
+            <a:r>
+              <a:rPr sz="1050" b="1">
+                <a:solidFill>
+                  <a:srgbClr val="FFFFFF"/>
+                </a:solidFill>
+                <a:latin typeface="Aptos"/>
+                <a:ea typeface="Aptos"/>
+                <a:cs typeface="Aptos"/>
+              </a:rPr>
+              <a:t>EUR 217k</a:t>
+            </a:r>
+          </a:p>
+        </p:txBody>
+      </p:sp>
+      <p:sp>
+        <p:nvSpPr>
+          <p:cNvPr id="20" name="budget-rule-Platform ops + FinOps">
+            <a:extLst xmlns:a="http://schemas.openxmlformats.org/drawingml/2006/main">
+              <a:ext uri="{FF2B5EF4-FFF2-40B4-BE49-F238E27FC236}">
+                <a16:creationId xmlns:a16="http://schemas.microsoft.com/office/drawing/2014/main" id="{95D5F787-A209-4F2D-82CA-61EA22A331F3}"/>
+              </a:ext>
+            </a:extLst>
+          </p:cNvPr>
+          <p:cNvSpPr>
+            <a:spLocks xmlns:a="http://schemas.openxmlformats.org/drawingml/2006/main" noGrp="1"/>
+          </p:cNvSpPr>
+          <p:nvPr/>
+        </p:nvSpPr>
+        <p:spPr>
+          <a:xfrm xmlns:a="http://schemas.openxmlformats.org/drawingml/2006/main">
+            <a:off x="6172200" y="3638550"/>
+            <a:ext cx="2362200" cy="9525"/>
+          </a:xfrm>
+          <a:prstGeom xmlns:a="http://schemas.openxmlformats.org/drawingml/2006/main" prst="rect">
+            <a:avLst/>
+          </a:prstGeom>
+          <a:solidFill xmlns:a="http://schemas.openxmlformats.org/drawingml/2006/main">
+            <a:srgbClr val="263241"/>
+          </a:solidFill>
+          <a:ln xmlns:a="http://schemas.openxmlformats.org/drawingml/2006/main" w="0">
+            <a:noFill/>
+            <a:prstDash val="solid"/>
+          </a:ln>
+        </p:spPr>
+      </p:sp>
+      <p:sp>
+        <p:nvSpPr>
+          <p:cNvPr id="21" name="budget-label-Platform ops + FinOps">
+            <a:extLst xmlns:a="http://schemas.openxmlformats.org/drawingml/2006/main">
+              <a:ext uri="{FF2B5EF4-FFF2-40B4-BE49-F238E27FC236}">
+                <a16:creationId xmlns:a16="http://schemas.microsoft.com/office/drawing/2014/main" id="{24D0ED3D-4E3F-49DE-96F3-D3AB0393DA56}"/>
+              </a:ext>
+            </a:extLst>
+          </p:cNvPr>
+          <p:cNvSpPr>
+            <a:spLocks xmlns:a="http://schemas.openxmlformats.org/drawingml/2006/main" noGrp="1"/>
+          </p:cNvSpPr>
+          <p:nvPr/>
+        </p:nvSpPr>
+        <p:spPr>
+          <a:xfrm xmlns:a="http://schemas.openxmlformats.org/drawingml/2006/main">
+            <a:off x="6172200" y="3352800"/>
+            <a:ext cx="1504950" cy="228600"/>
+          </a:xfrm>
+          <a:prstGeom xmlns:a="http://schemas.openxmlformats.org/drawingml/2006/main" prst="rect">
+            <a:avLst/>
+          </a:prstGeom>
+          <a:noFill xmlns:a="http://schemas.openxmlformats.org/drawingml/2006/main"/>
+          <a:ln xmlns:a="http://schemas.openxmlformats.org/drawingml/2006/main" w="0">
+            <a:noFill/>
+            <a:prstDash val="solid"/>
+          </a:ln>
+        </p:spPr>
+        <p:txBody>
+          <a:bodyPr xmlns:a="http://schemas.openxmlformats.org/drawingml/2006/main"/>
+          <a:lstStyle xmlns:a="http://schemas.openxmlformats.org/drawingml/2006/main"/>
+          <a:p xmlns:a="http://schemas.openxmlformats.org/drawingml/2006/main">
+            <a:pPr>
+              <a:defRPr sz="1050">
+                <a:solidFill>
+                  <a:srgbClr val="B9C3CF"/>
+                </a:solidFill>
+                <a:latin typeface="Aptos"/>
+                <a:ea typeface="Aptos"/>
+                <a:cs typeface="Aptos"/>
+              </a:defRPr>
+            </a:pPr>
+            <a:r>
+              <a:rPr sz="1050">
+                <a:solidFill>
+                  <a:srgbClr val="B9C3CF"/>
+                </a:solidFill>
+                <a:latin typeface="Aptos"/>
+                <a:ea typeface="Aptos"/>
+                <a:cs typeface="Aptos"/>
+              </a:rPr>
+              <a:t>Platform ops + FinOps</a:t>
+            </a:r>
+          </a:p>
+        </p:txBody>
+      </p:sp>
+      <p:sp>
+        <p:nvSpPr>
+          <p:cNvPr id="22" name="budget-value-Platform ops + FinOps">
+            <a:extLst xmlns:a="http://schemas.openxmlformats.org/drawingml/2006/main">
+              <a:ext uri="{FF2B5EF4-FFF2-40B4-BE49-F238E27FC236}">
+                <a16:creationId xmlns:a16="http://schemas.microsoft.com/office/drawing/2014/main" id="{0D8E9624-8C8F-4EC5-9EFC-D9A08CDD7BF8}"/>
+              </a:ext>
+            </a:extLst>
+          </p:cNvPr>
+          <p:cNvSpPr>
+            <a:spLocks xmlns:a="http://schemas.openxmlformats.org/drawingml/2006/main" noGrp="1"/>
+          </p:cNvSpPr>
+          <p:nvPr/>
+        </p:nvSpPr>
+        <p:spPr>
+          <a:xfrm xmlns:a="http://schemas.openxmlformats.org/drawingml/2006/main">
+            <a:off x="7677150" y="3352800"/>
+            <a:ext cx="857250" cy="228600"/>
+          </a:xfrm>
+          <a:prstGeom xmlns:a="http://schemas.openxmlformats.org/drawingml/2006/main" prst="rect">
+            <a:avLst/>
+          </a:prstGeom>
+          <a:noFill xmlns:a="http://schemas.openxmlformats.org/drawingml/2006/main"/>
+          <a:ln xmlns:a="http://schemas.openxmlformats.org/drawingml/2006/main" w="0">
+            <a:noFill/>
+            <a:prstDash val="solid"/>
+          </a:ln>
+        </p:spPr>
+        <p:txBody>
+          <a:bodyPr xmlns:a="http://schemas.openxmlformats.org/drawingml/2006/main"/>
+          <a:lstStyle xmlns:a="http://schemas.openxmlformats.org/drawingml/2006/main"/>
+          <a:p xmlns:a="http://schemas.openxmlformats.org/drawingml/2006/main">
+            <a:pPr algn="r">
+              <a:defRPr sz="1050" b="1">
+                <a:solidFill>
+                  <a:srgbClr val="FFFFFF"/>
+                </a:solidFill>
+                <a:latin typeface="Aptos"/>
+                <a:ea typeface="Aptos"/>
+                <a:cs typeface="Aptos"/>
+              </a:defRPr>
+            </a:pPr>
+            <a:r>
+              <a:rPr sz="1050" b="1">
+                <a:solidFill>
+                  <a:srgbClr val="FFFFFF"/>
+                </a:solidFill>
+                <a:latin typeface="Aptos"/>
+                <a:ea typeface="Aptos"/>
+                <a:cs typeface="Aptos"/>
+              </a:rPr>
+              <a:t>EUR 175k</a:t>
+            </a:r>
+          </a:p>
+        </p:txBody>
+      </p:sp>
+      <p:sp>
+        <p:nvSpPr>
+          <p:cNvPr id="23" name="budget-rule-Security / gov / DR">
+            <a:extLst xmlns:a="http://schemas.openxmlformats.org/drawingml/2006/main">
+              <a:ext uri="{FF2B5EF4-FFF2-40B4-BE49-F238E27FC236}">
+                <a16:creationId xmlns:a16="http://schemas.microsoft.com/office/drawing/2014/main" id="{55C70864-5305-4530-B5C5-96507FDB0942}"/>
+              </a:ext>
+            </a:extLst>
+          </p:cNvPr>
+          <p:cNvSpPr>
+            <a:spLocks xmlns:a="http://schemas.openxmlformats.org/drawingml/2006/main" noGrp="1"/>
+          </p:cNvSpPr>
+          <p:nvPr/>
+        </p:nvSpPr>
+        <p:spPr>
+          <a:xfrm xmlns:a="http://schemas.openxmlformats.org/drawingml/2006/main">
+            <a:off x="6172200" y="4095750"/>
+            <a:ext cx="2362200" cy="9525"/>
+          </a:xfrm>
+          <a:prstGeom xmlns:a="http://schemas.openxmlformats.org/drawingml/2006/main" prst="rect">
+            <a:avLst/>
+          </a:prstGeom>
+          <a:solidFill xmlns:a="http://schemas.openxmlformats.org/drawingml/2006/main">
+            <a:srgbClr val="263241"/>
+          </a:solidFill>
+          <a:ln xmlns:a="http://schemas.openxmlformats.org/drawingml/2006/main" w="0">
+            <a:noFill/>
+            <a:prstDash val="solid"/>
+          </a:ln>
+        </p:spPr>
+      </p:sp>
+      <p:sp>
+        <p:nvSpPr>
+          <p:cNvPr id="24" name="budget-label-Security / gov / DR">
+            <a:extLst xmlns:a="http://schemas.openxmlformats.org/drawingml/2006/main">
+              <a:ext uri="{FF2B5EF4-FFF2-40B4-BE49-F238E27FC236}">
+                <a16:creationId xmlns:a16="http://schemas.microsoft.com/office/drawing/2014/main" id="{AA50E7B1-9439-431F-8874-7895AA831A0F}"/>
+              </a:ext>
+            </a:extLst>
+          </p:cNvPr>
+          <p:cNvSpPr>
+            <a:spLocks xmlns:a="http://schemas.openxmlformats.org/drawingml/2006/main" noGrp="1"/>
+          </p:cNvSpPr>
+          <p:nvPr/>
+        </p:nvSpPr>
+        <p:spPr>
+          <a:xfrm xmlns:a="http://schemas.openxmlformats.org/drawingml/2006/main">
+            <a:off x="6172200" y="3810000"/>
+            <a:ext cx="1504950" cy="228600"/>
+          </a:xfrm>
+          <a:prstGeom xmlns:a="http://schemas.openxmlformats.org/drawingml/2006/main" prst="rect">
+            <a:avLst/>
+          </a:prstGeom>
+          <a:noFill xmlns:a="http://schemas.openxmlformats.org/drawingml/2006/main"/>
+          <a:ln xmlns:a="http://schemas.openxmlformats.org/drawingml/2006/main" w="0">
+            <a:noFill/>
+            <a:prstDash val="solid"/>
+          </a:ln>
+        </p:spPr>
+        <p:txBody>
+          <a:bodyPr xmlns:a="http://schemas.openxmlformats.org/drawingml/2006/main"/>
+          <a:lstStyle xmlns:a="http://schemas.openxmlformats.org/drawingml/2006/main"/>
+          <a:p xmlns:a="http://schemas.openxmlformats.org/drawingml/2006/main">
+            <a:pPr>
+              <a:defRPr sz="1050">
+                <a:solidFill>
+                  <a:srgbClr val="B9C3CF"/>
+                </a:solidFill>
+                <a:latin typeface="Aptos"/>
+                <a:ea typeface="Aptos"/>
+                <a:cs typeface="Aptos"/>
+              </a:defRPr>
+            </a:pPr>
+            <a:r>
+              <a:rPr sz="1050">
+                <a:solidFill>
+                  <a:srgbClr val="B9C3CF"/>
+                </a:solidFill>
+                <a:latin typeface="Aptos"/>
+                <a:ea typeface="Aptos"/>
+                <a:cs typeface="Aptos"/>
+              </a:rPr>
+              <a:t>Security / gov / DR</a:t>
+            </a:r>
+          </a:p>
+        </p:txBody>
+      </p:sp>
+      <p:sp>
+        <p:nvSpPr>
+          <p:cNvPr id="25" name="budget-value-Security / gov / DR">
+            <a:extLst xmlns:a="http://schemas.openxmlformats.org/drawingml/2006/main">
+              <a:ext uri="{FF2B5EF4-FFF2-40B4-BE49-F238E27FC236}">
+                <a16:creationId xmlns:a16="http://schemas.microsoft.com/office/drawing/2014/main" id="{817E8487-1611-481E-B674-D59555725255}"/>
+              </a:ext>
+            </a:extLst>
+          </p:cNvPr>
+          <p:cNvSpPr>
+            <a:spLocks xmlns:a="http://schemas.openxmlformats.org/drawingml/2006/main" noGrp="1"/>
+          </p:cNvSpPr>
+          <p:nvPr/>
+        </p:nvSpPr>
+        <p:spPr>
+          <a:xfrm xmlns:a="http://schemas.openxmlformats.org/drawingml/2006/main">
+            <a:off x="7677150" y="3810000"/>
+            <a:ext cx="857250" cy="228600"/>
+          </a:xfrm>
+          <a:prstGeom xmlns:a="http://schemas.openxmlformats.org/drawingml/2006/main" prst="rect">
+            <a:avLst/>
+          </a:prstGeom>
+          <a:noFill xmlns:a="http://schemas.openxmlformats.org/drawingml/2006/main"/>
+          <a:ln xmlns:a="http://schemas.openxmlformats.org/drawingml/2006/main" w="0">
+            <a:noFill/>
+            <a:prstDash val="solid"/>
+          </a:ln>
+        </p:spPr>
+        <p:txBody>
+          <a:bodyPr xmlns:a="http://schemas.openxmlformats.org/drawingml/2006/main"/>
+          <a:lstStyle xmlns:a="http://schemas.openxmlformats.org/drawingml/2006/main"/>
+          <a:p xmlns:a="http://schemas.openxmlformats.org/drawingml/2006/main">
+            <a:pPr algn="r">
+              <a:defRPr sz="1050" b="1">
+                <a:solidFill>
+                  <a:srgbClr val="FFFFFF"/>
+                </a:solidFill>
+                <a:latin typeface="Aptos"/>
+                <a:ea typeface="Aptos"/>
+                <a:cs typeface="Aptos"/>
+              </a:defRPr>
+            </a:pPr>
+            <a:r>
+              <a:rPr sz="1050" b="1">
+                <a:solidFill>
+                  <a:srgbClr val="FFFFFF"/>
+                </a:solidFill>
+                <a:latin typeface="Aptos"/>
+                <a:ea typeface="Aptos"/>
+                <a:cs typeface="Aptos"/>
+              </a:rPr>
+              <a:t>EUR 65k</a:t>
+            </a:r>
+          </a:p>
+        </p:txBody>
+      </p:sp>
+      <p:sp>
+        <p:nvSpPr>
+          <p:cNvPr id="26" name="budget-rule-Contingency">
+            <a:extLst xmlns:a="http://schemas.openxmlformats.org/drawingml/2006/main">
+              <a:ext uri="{FF2B5EF4-FFF2-40B4-BE49-F238E27FC236}">
+                <a16:creationId xmlns:a16="http://schemas.microsoft.com/office/drawing/2014/main" id="{AAD5630C-F84A-4363-82D0-5F8EBB59BD1A}"/>
+              </a:ext>
+            </a:extLst>
+          </p:cNvPr>
+          <p:cNvSpPr>
+            <a:spLocks xmlns:a="http://schemas.openxmlformats.org/drawingml/2006/main" noGrp="1"/>
+          </p:cNvSpPr>
+          <p:nvPr/>
+        </p:nvSpPr>
+        <p:spPr>
+          <a:xfrm xmlns:a="http://schemas.openxmlformats.org/drawingml/2006/main">
+            <a:off x="6172200" y="4552950"/>
+            <a:ext cx="2362200" cy="9525"/>
+          </a:xfrm>
+          <a:prstGeom xmlns:a="http://schemas.openxmlformats.org/drawingml/2006/main" prst="rect">
+            <a:avLst/>
+          </a:prstGeom>
+          <a:solidFill xmlns:a="http://schemas.openxmlformats.org/drawingml/2006/main">
+            <a:srgbClr val="263241"/>
+          </a:solidFill>
+          <a:ln xmlns:a="http://schemas.openxmlformats.org/drawingml/2006/main" w="0">
+            <a:noFill/>
+            <a:prstDash val="solid"/>
+          </a:ln>
+        </p:spPr>
+      </p:sp>
+      <p:sp>
+        <p:nvSpPr>
+          <p:cNvPr id="27" name="budget-label-Contingency">
+            <a:extLst xmlns:a="http://schemas.openxmlformats.org/drawingml/2006/main">
+              <a:ext uri="{FF2B5EF4-FFF2-40B4-BE49-F238E27FC236}">
+                <a16:creationId xmlns:a16="http://schemas.microsoft.com/office/drawing/2014/main" id="{629C161D-1CA5-45F0-9D5D-2E9A00824BF9}"/>
+              </a:ext>
+            </a:extLst>
+          </p:cNvPr>
+          <p:cNvSpPr>
+            <a:spLocks xmlns:a="http://schemas.openxmlformats.org/drawingml/2006/main" noGrp="1"/>
+          </p:cNvSpPr>
+          <p:nvPr/>
+        </p:nvSpPr>
+        <p:spPr>
+          <a:xfrm xmlns:a="http://schemas.openxmlformats.org/drawingml/2006/main">
+            <a:off x="6172200" y="4267200"/>
+            <a:ext cx="1504950" cy="228600"/>
+          </a:xfrm>
+          <a:prstGeom xmlns:a="http://schemas.openxmlformats.org/drawingml/2006/main" prst="rect">
+            <a:avLst/>
+          </a:prstGeom>
+          <a:noFill xmlns:a="http://schemas.openxmlformats.org/drawingml/2006/main"/>
+          <a:ln xmlns:a="http://schemas.openxmlformats.org/drawingml/2006/main" w="0">
+            <a:noFill/>
+            <a:prstDash val="solid"/>
+          </a:ln>
+        </p:spPr>
+        <p:txBody>
+          <a:bodyPr xmlns:a="http://schemas.openxmlformats.org/drawingml/2006/main"/>
+          <a:lstStyle xmlns:a="http://schemas.openxmlformats.org/drawingml/2006/main"/>
+          <a:p xmlns:a="http://schemas.openxmlformats.org/drawingml/2006/main">
+            <a:pPr>
+              <a:defRPr sz="1050">
+                <a:solidFill>
+                  <a:srgbClr val="B9C3CF"/>
+                </a:solidFill>
+                <a:latin typeface="Aptos"/>
+                <a:ea typeface="Aptos"/>
+                <a:cs typeface="Aptos"/>
+              </a:defRPr>
+            </a:pPr>
+            <a:r>
+              <a:rPr sz="1050">
+                <a:solidFill>
+                  <a:srgbClr val="B9C3CF"/>
+                </a:solidFill>
+                <a:latin typeface="Aptos"/>
+                <a:ea typeface="Aptos"/>
+                <a:cs typeface="Aptos"/>
+              </a:rPr>
+              <a:t>Contingency</a:t>
+            </a:r>
+          </a:p>
+        </p:txBody>
+      </p:sp>
+      <p:sp>
+        <p:nvSpPr>
+          <p:cNvPr id="28" name="budget-value-Contingency">
+            <a:extLst xmlns:a="http://schemas.openxmlformats.org/drawingml/2006/main">
+              <a:ext uri="{FF2B5EF4-FFF2-40B4-BE49-F238E27FC236}">
+                <a16:creationId xmlns:a16="http://schemas.microsoft.com/office/drawing/2014/main" id="{B1C163A9-3927-4265-874D-BA3758E037B1}"/>
+              </a:ext>
+            </a:extLst>
+          </p:cNvPr>
+          <p:cNvSpPr>
+            <a:spLocks xmlns:a="http://schemas.openxmlformats.org/drawingml/2006/main" noGrp="1"/>
+          </p:cNvSpPr>
+          <p:nvPr/>
+        </p:nvSpPr>
+        <p:spPr>
+          <a:xfrm xmlns:a="http://schemas.openxmlformats.org/drawingml/2006/main">
+            <a:off x="7677150" y="4267200"/>
+            <a:ext cx="857250" cy="228600"/>
+          </a:xfrm>
+          <a:prstGeom xmlns:a="http://schemas.openxmlformats.org/drawingml/2006/main" prst="rect">
+            <a:avLst/>
+          </a:prstGeom>
+          <a:noFill xmlns:a="http://schemas.openxmlformats.org/drawingml/2006/main"/>
+          <a:ln xmlns:a="http://schemas.openxmlformats.org/drawingml/2006/main" w="0">
+            <a:noFill/>
+            <a:prstDash val="solid"/>
+          </a:ln>
+        </p:spPr>
+        <p:txBody>
+          <a:bodyPr xmlns:a="http://schemas.openxmlformats.org/drawingml/2006/main"/>
+          <a:lstStyle xmlns:a="http://schemas.openxmlformats.org/drawingml/2006/main"/>
+          <a:p xmlns:a="http://schemas.openxmlformats.org/drawingml/2006/main">
+            <a:pPr algn="r">
+              <a:defRPr sz="1050" b="1">
+                <a:solidFill>
+                  <a:srgbClr val="FFFFFF"/>
+                </a:solidFill>
+                <a:latin typeface="Aptos"/>
+                <a:ea typeface="Aptos"/>
+                <a:cs typeface="Aptos"/>
+              </a:defRPr>
+            </a:pPr>
+            <a:r>
+              <a:rPr sz="1050" b="1">
+                <a:solidFill>
+                  <a:srgbClr val="FFFFFF"/>
+                </a:solidFill>
+                <a:latin typeface="Aptos"/>
+                <a:ea typeface="Aptos"/>
+                <a:cs typeface="Aptos"/>
+              </a:rPr>
+              <a:t>EUR 103k</a:t>
+            </a:r>
+          </a:p>
+        </p:txBody>
+      </p:sp>
+      <p:sp>
+        <p:nvSpPr>
+          <p:cNvPr id="29" name="total-band">
+            <a:extLst xmlns:a="http://schemas.openxmlformats.org/drawingml/2006/main">
+              <a:ext uri="{FF2B5EF4-FFF2-40B4-BE49-F238E27FC236}">
+                <a16:creationId xmlns:a16="http://schemas.microsoft.com/office/drawing/2014/main" id="{9B185692-AE4B-478B-8480-3617F0B67A2D}"/>
+              </a:ext>
+            </a:extLst>
+          </p:cNvPr>
+          <p:cNvSpPr>
+            <a:spLocks xmlns:a="http://schemas.openxmlformats.org/drawingml/2006/main" noGrp="1"/>
+          </p:cNvSpPr>
+          <p:nvPr/>
+        </p:nvSpPr>
+        <p:spPr>
+          <a:xfrm xmlns:a="http://schemas.openxmlformats.org/drawingml/2006/main">
+            <a:off x="6172200" y="4838700"/>
+            <a:ext cx="2362200" cy="361950"/>
           </a:xfrm>
           <a:prstGeom xmlns:a="http://schemas.openxmlformats.org/drawingml/2006/main" prst="roundRect">
             <a:avLst>
-              <a:gd name="adj" fmla="val 2432"/>
+              <a:gd name="adj" fmla="val 31579"/>
             </a:avLst>
           </a:prstGeom>
           <a:solidFill xmlns:a="http://schemas.openxmlformats.org/drawingml/2006/main">
-            <a:srgbClr val="161C26"/>
+            <a:srgbClr val="092C1E"/>
           </a:solidFill>
-          <a:ln xmlns:a="http://schemas.openxmlformats.org/drawingml/2006/main" w="12700">
+          <a:ln xmlns:a="http://schemas.openxmlformats.org/drawingml/2006/main" w="9525">
+            <a:solidFill>
+              <a:srgbClr val="28A66F"/>
+            </a:solidFill>
+            <a:prstDash val="solid"/>
+          </a:ln>
+        </p:spPr>
+      </p:sp>
+      <p:sp>
+        <p:nvSpPr>
+          <p:cNvPr id="30" name="total-label">
+            <a:extLst xmlns:a="http://schemas.openxmlformats.org/drawingml/2006/main">
+              <a:ext uri="{FF2B5EF4-FFF2-40B4-BE49-F238E27FC236}">
+                <a16:creationId xmlns:a16="http://schemas.microsoft.com/office/drawing/2014/main" id="{B1FC2FCF-AFD6-48AC-829D-BB860C6E3DFF}"/>
+              </a:ext>
+            </a:extLst>
+          </p:cNvPr>
+          <p:cNvSpPr>
+            <a:spLocks xmlns:a="http://schemas.openxmlformats.org/drawingml/2006/main" noGrp="1"/>
+          </p:cNvSpPr>
+          <p:nvPr/>
+        </p:nvSpPr>
+        <p:spPr>
+          <a:xfrm xmlns:a="http://schemas.openxmlformats.org/drawingml/2006/main">
+            <a:off x="6324600" y="4933950"/>
+            <a:ext cx="1143000" cy="190500"/>
+          </a:xfrm>
+          <a:prstGeom xmlns:a="http://schemas.openxmlformats.org/drawingml/2006/main" prst="rect">
+            <a:avLst/>
+          </a:prstGeom>
+          <a:noFill xmlns:a="http://schemas.openxmlformats.org/drawingml/2006/main"/>
+          <a:ln xmlns:a="http://schemas.openxmlformats.org/drawingml/2006/main" w="0">
+            <a:noFill/>
+            <a:prstDash val="solid"/>
+          </a:ln>
+        </p:spPr>
+        <p:txBody>
+          <a:bodyPr xmlns:a="http://schemas.openxmlformats.org/drawingml/2006/main"/>
+          <a:lstStyle xmlns:a="http://schemas.openxmlformats.org/drawingml/2006/main"/>
+          <a:p xmlns:a="http://schemas.openxmlformats.org/drawingml/2006/main">
+            <a:pPr>
+              <a:defRPr sz="975">
+                <a:solidFill>
+                  <a:srgbClr val="B9D7C8"/>
+                </a:solidFill>
+                <a:latin typeface="Aptos"/>
+                <a:ea typeface="Aptos"/>
+                <a:cs typeface="Aptos"/>
+              </a:defRPr>
+            </a:pPr>
+            <a:r>
+              <a:rPr sz="975">
+                <a:solidFill>
+                  <a:srgbClr val="B9D7C8"/>
+                </a:solidFill>
+                <a:latin typeface="Aptos"/>
+                <a:ea typeface="Aptos"/>
+                <a:cs typeface="Aptos"/>
+              </a:rPr>
+              <a:t>Target run-rate</a:t>
+            </a:r>
+          </a:p>
+        </p:txBody>
+      </p:sp>
+      <p:sp>
+        <p:nvSpPr>
+          <p:cNvPr id="31" name="total-value">
+            <a:extLst xmlns:a="http://schemas.openxmlformats.org/drawingml/2006/main">
+              <a:ext uri="{FF2B5EF4-FFF2-40B4-BE49-F238E27FC236}">
+                <a16:creationId xmlns:a16="http://schemas.microsoft.com/office/drawing/2014/main" id="{D6D52234-DA50-4E76-A2E0-A058CE7C548F}"/>
+              </a:ext>
+            </a:extLst>
+          </p:cNvPr>
+          <p:cNvSpPr>
+            <a:spLocks xmlns:a="http://schemas.openxmlformats.org/drawingml/2006/main" noGrp="1"/>
+          </p:cNvSpPr>
+          <p:nvPr/>
+        </p:nvSpPr>
+        <p:spPr>
+          <a:xfrm xmlns:a="http://schemas.openxmlformats.org/drawingml/2006/main">
+            <a:off x="7543800" y="4914900"/>
+            <a:ext cx="838200" cy="209550"/>
+          </a:xfrm>
+          <a:prstGeom xmlns:a="http://schemas.openxmlformats.org/drawingml/2006/main" prst="rect">
+            <a:avLst/>
+          </a:prstGeom>
+          <a:noFill xmlns:a="http://schemas.openxmlformats.org/drawingml/2006/main"/>
+          <a:ln xmlns:a="http://schemas.openxmlformats.org/drawingml/2006/main" w="0">
+            <a:noFill/>
+            <a:prstDash val="solid"/>
+          </a:ln>
+        </p:spPr>
+        <p:txBody>
+          <a:bodyPr xmlns:a="http://schemas.openxmlformats.org/drawingml/2006/main"/>
+          <a:lstStyle xmlns:a="http://schemas.openxmlformats.org/drawingml/2006/main"/>
+          <a:p xmlns:a="http://schemas.openxmlformats.org/drawingml/2006/main">
+            <a:pPr algn="r">
+              <a:defRPr sz="1200" b="1">
+                <a:solidFill>
+                  <a:srgbClr val="FFFFFF"/>
+                </a:solidFill>
+                <a:latin typeface="Aptos"/>
+                <a:ea typeface="Aptos"/>
+                <a:cs typeface="Aptos"/>
+              </a:defRPr>
+            </a:pPr>
+            <a:r>
+              <a:rPr sz="1200" b="1">
+                <a:solidFill>
+                  <a:srgbClr val="FFFFFF"/>
+                </a:solidFill>
+                <a:latin typeface="Aptos"/>
+                <a:ea typeface="Aptos"/>
+                <a:cs typeface="Aptos"/>
+              </a:rPr>
+              <a:t>EUR 560k</a:t>
+            </a:r>
+          </a:p>
+        </p:txBody>
+      </p:sp>
+      <p:sp>
+        <p:nvSpPr>
+          <p:cNvPr id="32" name="price-card">
+            <a:extLst xmlns:a="http://schemas.openxmlformats.org/drawingml/2006/main">
+              <a:ext uri="{FF2B5EF4-FFF2-40B4-BE49-F238E27FC236}">
+                <a16:creationId xmlns:a16="http://schemas.microsoft.com/office/drawing/2014/main" id="{E9A52887-DFCE-4CB2-8B3A-3DFDF9931CC2}"/>
+              </a:ext>
+            </a:extLst>
+          </p:cNvPr>
+          <p:cNvSpPr>
+            <a:spLocks xmlns:a="http://schemas.openxmlformats.org/drawingml/2006/main" noGrp="1"/>
+          </p:cNvSpPr>
+          <p:nvPr/>
+        </p:nvSpPr>
+        <p:spPr>
+          <a:xfrm xmlns:a="http://schemas.openxmlformats.org/drawingml/2006/main">
+            <a:off x="9010650" y="2209800"/>
+            <a:ext cx="2628900" cy="3124200"/>
+          </a:xfrm>
+          <a:prstGeom xmlns:a="http://schemas.openxmlformats.org/drawingml/2006/main" prst="roundRect">
+            <a:avLst>
+              <a:gd name="adj" fmla="val 4348"/>
+            </a:avLst>
+          </a:prstGeom>
+          <a:solidFill xmlns:a="http://schemas.openxmlformats.org/drawingml/2006/main">
+            <a:srgbClr val="11161D"/>
+          </a:solidFill>
+          <a:ln xmlns:a="http://schemas.openxmlformats.org/drawingml/2006/main" w="9525">
             <a:solidFill>
               <a:srgbClr val="2A3545"/>
             </a:solidFill>
             <a:prstDash val="solid"/>
           </a:ln>
-          <a:effectLst xmlns:a="http://schemas.openxmlformats.org/drawingml/2006/main">
-            <a:outerShdw blurRad="114300" dist="38100" dir="5400000" sx="100000" sy="100000" kx="0" ky="0" algn="bl" rotWithShape="0">
-              <a:srgbClr val="000000">
-                <a:alpha val="35000"/>
-              </a:srgbClr>
-            </a:outerShdw>
-          </a:effectLst>
-        </p:spPr>
-      </p:sp>
-      <p:sp>
-        <p:nvSpPr>
-          <p:cNvPr id="13" name="Text 11">
-            <a:extLst xmlns:a="http://schemas.openxmlformats.org/drawingml/2006/main">
-              <a:ext uri="{FF2B5EF4-FFF2-40B4-BE49-F238E27FC236}">
-                <a16:creationId xmlns:a16="http://schemas.microsoft.com/office/drawing/2014/main" id="{F7206F50-4D2D-43F8-B583-9C8F2EDBEE37}"/>
-              </a:ext>
-            </a:extLst>
-          </p:cNvPr>
-          <p:cNvSpPr>
-            <a:spLocks xmlns:a="http://schemas.openxmlformats.org/drawingml/2006/main" noGrp="1"/>
-          </p:cNvSpPr>
-          <p:nvPr/>
-        </p:nvSpPr>
-        <p:spPr>
-          <a:xfrm xmlns:a="http://schemas.openxmlformats.org/drawingml/2006/main">
-            <a:off x="8339328" y="1965960"/>
-            <a:ext cx="3017520" cy="457200"/>
-          </a:xfrm>
-          <a:prstGeom xmlns:a="http://schemas.openxmlformats.org/drawingml/2006/main" prst="rect">
-            <a:avLst/>
-          </a:prstGeom>
-          <a:noFill xmlns:a="http://schemas.openxmlformats.org/drawingml/2006/main"/>
-        </p:spPr>
-        <p:txBody>
-          <a:bodyPr xmlns:a="http://schemas.openxmlformats.org/drawingml/2006/main" wrap="square" lIns="0" tIns="0" rIns="0" bIns="0" anchor="ctr"/>
-          <a:lstStyle xmlns:a="http://schemas.openxmlformats.org/drawingml/2006/main"/>
-          <a:p xmlns:a="http://schemas.openxmlformats.org/drawingml/2006/main">
-            <a:pPr marL="0" indent="0">
-              <a:buNone/>
-            </a:pPr>
-            <a:r>
-              <a:rPr sz="1900" b="1">
-                <a:solidFill>
-                  <a:srgbClr val="4FD08A"/>
-                </a:solidFill>
-                <a:latin typeface="Calibri"/>
-                <a:ea typeface="Calibri"/>
-                <a:cs typeface="Calibri"/>
-              </a:rPr>
-              <a:t>Phase 3 · Cutover &amp; ML</a:t>
-            </a:r>
-          </a:p>
-        </p:txBody>
-      </p:sp>
-      <p:sp>
-        <p:nvSpPr>
-          <p:cNvPr id="14" name="Text 12">
-            <a:extLst xmlns:a="http://schemas.openxmlformats.org/drawingml/2006/main">
-              <a:ext uri="{FF2B5EF4-FFF2-40B4-BE49-F238E27FC236}">
-                <a16:creationId xmlns:a16="http://schemas.microsoft.com/office/drawing/2014/main" id="{2841B3B2-85C4-4668-99E8-95364584EA52}"/>
-              </a:ext>
-            </a:extLst>
-          </p:cNvPr>
-          <p:cNvSpPr>
-            <a:spLocks xmlns:a="http://schemas.openxmlformats.org/drawingml/2006/main" noGrp="1"/>
-          </p:cNvSpPr>
-          <p:nvPr/>
-        </p:nvSpPr>
-        <p:spPr>
-          <a:xfrm xmlns:a="http://schemas.openxmlformats.org/drawingml/2006/main">
-            <a:off x="8339328" y="2432304"/>
-            <a:ext cx="3017520" cy="320040"/>
-          </a:xfrm>
-          <a:prstGeom xmlns:a="http://schemas.openxmlformats.org/drawingml/2006/main" prst="rect">
-            <a:avLst/>
-          </a:prstGeom>
-          <a:noFill xmlns:a="http://schemas.openxmlformats.org/drawingml/2006/main"/>
-        </p:spPr>
-        <p:txBody>
-          <a:bodyPr xmlns:a="http://schemas.openxmlformats.org/drawingml/2006/main" wrap="square" lIns="0" tIns="0" rIns="0" bIns="0" anchor="ctr"/>
-          <a:lstStyle xmlns:a="http://schemas.openxmlformats.org/drawingml/2006/main"/>
-          <a:p xmlns:a="http://schemas.openxmlformats.org/drawingml/2006/main">
-            <a:pPr marL="0" indent="0">
-              <a:buNone/>
-            </a:pPr>
-            <a:r>
-              <a:rPr sz="1300" b="1">
-                <a:solidFill>
-                  <a:srgbClr val="9FB0C3"/>
-                </a:solidFill>
-                <a:latin typeface="Calibri"/>
-                <a:ea typeface="Calibri"/>
-                <a:cs typeface="Calibri"/>
-              </a:rPr>
-              <a:t>Months 7–9</a:t>
-            </a:r>
-          </a:p>
-        </p:txBody>
-      </p:sp>
-      <p:sp>
-        <p:nvSpPr>
-          <p:cNvPr id="15" name="Text 13">
-            <a:extLst xmlns:a="http://schemas.openxmlformats.org/drawingml/2006/main">
-              <a:ext uri="{FF2B5EF4-FFF2-40B4-BE49-F238E27FC236}">
-                <a16:creationId xmlns:a16="http://schemas.microsoft.com/office/drawing/2014/main" id="{0DB17314-8A89-424A-8DB8-92DA8DEECCFF}"/>
-              </a:ext>
-            </a:extLst>
-          </p:cNvPr>
-          <p:cNvSpPr>
-            <a:spLocks xmlns:a="http://schemas.openxmlformats.org/drawingml/2006/main" noGrp="1"/>
-          </p:cNvSpPr>
-          <p:nvPr/>
-        </p:nvSpPr>
-        <p:spPr>
-          <a:xfrm xmlns:a="http://schemas.openxmlformats.org/drawingml/2006/main">
-            <a:off x="8339328" y="2834640"/>
-            <a:ext cx="3017520" cy="2103120"/>
-          </a:xfrm>
-          <a:prstGeom xmlns:a="http://schemas.openxmlformats.org/drawingml/2006/main" prst="rect">
-            <a:avLst/>
-          </a:prstGeom>
-          <a:noFill xmlns:a="http://schemas.openxmlformats.org/drawingml/2006/main"/>
-        </p:spPr>
-        <p:txBody>
-          <a:bodyPr xmlns:a="http://schemas.openxmlformats.org/drawingml/2006/main" wrap="square" lIns="0" tIns="0" rIns="0" bIns="0" anchor="ctr"/>
-          <a:lstStyle xmlns:a="http://schemas.openxmlformats.org/drawingml/2006/main"/>
-          <a:p xmlns:a="http://schemas.openxmlformats.org/drawingml/2006/main">
-            <a:pPr marL="0" indent="0">
-              <a:lnSpc>
-                <a:spcPct val="115000"/>
-              </a:lnSpc>
-              <a:buNone/>
-            </a:pPr>
-            <a:r>
-              <a:rPr sz="1450">
-                <a:solidFill>
-                  <a:srgbClr val="D6E2F2"/>
-                </a:solidFill>
-                <a:latin typeface="Calibri"/>
-                <a:ea typeface="Calibri"/>
-                <a:cs typeface="Calibri"/>
-              </a:rPr>
-              <a:t>Production live, colocation decommissioned, recommendations + dynamic pricing, security audit, handover.</a:t>
-            </a:r>
-          </a:p>
-        </p:txBody>
-      </p:sp>
-      <p:sp>
-        <p:nvSpPr>
-          <p:cNvPr id="16" name="Text 14">
-            <a:extLst xmlns:a="http://schemas.openxmlformats.org/drawingml/2006/main">
-              <a:ext uri="{FF2B5EF4-FFF2-40B4-BE49-F238E27FC236}">
-                <a16:creationId xmlns:a16="http://schemas.microsoft.com/office/drawing/2014/main" id="{30F4A855-D73A-43A8-8B5A-7B6213424807}"/>
-              </a:ext>
-            </a:extLst>
-          </p:cNvPr>
-          <p:cNvSpPr>
-            <a:spLocks xmlns:a="http://schemas.openxmlformats.org/drawingml/2006/main" noGrp="1"/>
-          </p:cNvSpPr>
-          <p:nvPr/>
-        </p:nvSpPr>
-        <p:spPr>
-          <a:xfrm xmlns:a="http://schemas.openxmlformats.org/drawingml/2006/main">
-            <a:off x="640080" y="5440680"/>
-            <a:ext cx="10972800" cy="457200"/>
-          </a:xfrm>
-          <a:prstGeom xmlns:a="http://schemas.openxmlformats.org/drawingml/2006/main" prst="rect">
-            <a:avLst/>
-          </a:prstGeom>
-          <a:noFill xmlns:a="http://schemas.openxmlformats.org/drawingml/2006/main"/>
-        </p:spPr>
-        <p:txBody>
-          <a:bodyPr xmlns:a="http://schemas.openxmlformats.org/drawingml/2006/main" wrap="square" lIns="0" tIns="0" rIns="0" bIns="0" anchor="ctr"/>
-          <a:lstStyle xmlns:a="http://schemas.openxmlformats.org/drawingml/2006/main"/>
-          <a:p xmlns:a="http://schemas.openxmlformats.org/drawingml/2006/main">
-            <a:pPr marL="0" indent="0">
-              <a:buNone/>
-            </a:pPr>
-            <a:r>
-              <a:rPr sz="1400" i="1">
-                <a:solidFill>
-                  <a:srgbClr val="9FB0C3"/>
-                </a:solidFill>
-                <a:latin typeface="Calibri"/>
-                <a:ea typeface="Calibri"/>
-                <a:cs typeface="Calibri"/>
-              </a:rPr>
-              <a:t>Key risks mitigated: parallel DMS CDC before cutover · open-source for lock-in · DPIA before any personal data.</a:t>
+        </p:spPr>
+        <p:style>
+          <a:lnRef xmlns:a="http://schemas.openxmlformats.org/drawingml/2006/main" idx="0"/>
+          <a:fillRef xmlns:a="http://schemas.openxmlformats.org/drawingml/2006/main" idx="0"/>
+          <a:effectRef xmlns:a="http://schemas.openxmlformats.org/drawingml/2006/main" idx="4"/>
+          <a:fontRef xmlns:a="http://schemas.openxmlformats.org/drawingml/2006/main" idx="major"/>
+        </p:style>
+      </p:sp>
+      <p:sp>
+        <p:nvSpPr>
+          <p:cNvPr id="33" name="price-label">
+            <a:extLst xmlns:a="http://schemas.openxmlformats.org/drawingml/2006/main">
+              <a:ext uri="{FF2B5EF4-FFF2-40B4-BE49-F238E27FC236}">
+                <a16:creationId xmlns:a16="http://schemas.microsoft.com/office/drawing/2014/main" id="{0B8D1CFB-36A2-4245-B47C-8D5465A9D84C}"/>
+              </a:ext>
+            </a:extLst>
+          </p:cNvPr>
+          <p:cNvSpPr>
+            <a:spLocks xmlns:a="http://schemas.openxmlformats.org/drawingml/2006/main" noGrp="1"/>
+          </p:cNvSpPr>
+          <p:nvPr/>
+        </p:nvSpPr>
+        <p:spPr>
+          <a:xfrm xmlns:a="http://schemas.openxmlformats.org/drawingml/2006/main">
+            <a:off x="9239250" y="2476500"/>
+            <a:ext cx="2190750" cy="228600"/>
+          </a:xfrm>
+          <a:prstGeom xmlns:a="http://schemas.openxmlformats.org/drawingml/2006/main" prst="rect">
+            <a:avLst/>
+          </a:prstGeom>
+          <a:noFill xmlns:a="http://schemas.openxmlformats.org/drawingml/2006/main"/>
+          <a:ln xmlns:a="http://schemas.openxmlformats.org/drawingml/2006/main" w="0">
+            <a:noFill/>
+            <a:prstDash val="solid"/>
+          </a:ln>
+        </p:spPr>
+        <p:txBody>
+          <a:bodyPr xmlns:a="http://schemas.openxmlformats.org/drawingml/2006/main"/>
+          <a:lstStyle xmlns:a="http://schemas.openxmlformats.org/drawingml/2006/main"/>
+          <a:p xmlns:a="http://schemas.openxmlformats.org/drawingml/2006/main">
+            <a:pPr>
+              <a:defRPr sz="900" b="1">
+                <a:solidFill>
+                  <a:srgbClr val="7F8B99"/>
+                </a:solidFill>
+                <a:latin typeface="Aptos"/>
+                <a:ea typeface="Aptos"/>
+                <a:cs typeface="Aptos"/>
+              </a:defRPr>
+            </a:pPr>
+            <a:r>
+              <a:rPr sz="900" b="1">
+                <a:solidFill>
+                  <a:srgbClr val="7F8B99"/>
+                </a:solidFill>
+                <a:latin typeface="Aptos"/>
+                <a:ea typeface="Aptos"/>
+                <a:cs typeface="Aptos"/>
+              </a:rPr>
+              <a:t>PUBLIC AWS PRICE ANCHORS</a:t>
+            </a:r>
+          </a:p>
+        </p:txBody>
+      </p:sp>
+      <p:sp>
+        <p:nvSpPr>
+          <p:cNvPr id="34" name="pill-Glue: USD 0.44 / DPU-hour">
+            <a:extLst xmlns:a="http://schemas.openxmlformats.org/drawingml/2006/main">
+              <a:ext uri="{FF2B5EF4-FFF2-40B4-BE49-F238E27FC236}">
+                <a16:creationId xmlns:a16="http://schemas.microsoft.com/office/drawing/2014/main" id="{0A6E7060-D90B-4B09-A42A-CF1A41E5087A}"/>
+              </a:ext>
+            </a:extLst>
+          </p:cNvPr>
+          <p:cNvSpPr>
+            <a:spLocks xmlns:a="http://schemas.openxmlformats.org/drawingml/2006/main" noGrp="1"/>
+          </p:cNvSpPr>
+          <p:nvPr/>
+        </p:nvSpPr>
+        <p:spPr>
+          <a:xfrm xmlns:a="http://schemas.openxmlformats.org/drawingml/2006/main">
+            <a:off x="9239250" y="2876550"/>
+            <a:ext cx="2171700" cy="304800"/>
+          </a:xfrm>
+          <a:prstGeom xmlns:a="http://schemas.openxmlformats.org/drawingml/2006/main" prst="roundRect">
+            <a:avLst>
+              <a:gd name="adj" fmla="val 37500"/>
+            </a:avLst>
+          </a:prstGeom>
+          <a:solidFill xmlns:a="http://schemas.openxmlformats.org/drawingml/2006/main">
+            <a:srgbClr val="111820"/>
+          </a:solidFill>
+          <a:ln xmlns:a="http://schemas.openxmlformats.org/drawingml/2006/main" w="9525">
+            <a:solidFill>
+              <a:srgbClr val="2A3545"/>
+            </a:solidFill>
+            <a:prstDash val="solid"/>
+          </a:ln>
+        </p:spPr>
+      </p:sp>
+      <p:sp>
+        <p:nvSpPr>
+          <p:cNvPr id="35" name="pill-text-Glue: USD 0.44 / DPU-hour">
+            <a:extLst xmlns:a="http://schemas.openxmlformats.org/drawingml/2006/main">
+              <a:ext uri="{FF2B5EF4-FFF2-40B4-BE49-F238E27FC236}">
+                <a16:creationId xmlns:a16="http://schemas.microsoft.com/office/drawing/2014/main" id="{9152A0CC-D62C-4592-B301-1A9AF9A8D2FA}"/>
+              </a:ext>
+            </a:extLst>
+          </p:cNvPr>
+          <p:cNvSpPr>
+            <a:spLocks xmlns:a="http://schemas.openxmlformats.org/drawingml/2006/main" noGrp="1"/>
+          </p:cNvSpPr>
+          <p:nvPr/>
+        </p:nvSpPr>
+        <p:spPr>
+          <a:xfrm xmlns:a="http://schemas.openxmlformats.org/drawingml/2006/main">
+            <a:off x="9353550" y="2943225"/>
+            <a:ext cx="1943100" cy="190500"/>
+          </a:xfrm>
+          <a:prstGeom xmlns:a="http://schemas.openxmlformats.org/drawingml/2006/main" prst="rect">
+            <a:avLst/>
+          </a:prstGeom>
+          <a:noFill xmlns:a="http://schemas.openxmlformats.org/drawingml/2006/main"/>
+          <a:ln xmlns:a="http://schemas.openxmlformats.org/drawingml/2006/main" w="0">
+            <a:noFill/>
+            <a:prstDash val="solid"/>
+          </a:ln>
+        </p:spPr>
+        <p:txBody>
+          <a:bodyPr xmlns:a="http://schemas.openxmlformats.org/drawingml/2006/main"/>
+          <a:lstStyle xmlns:a="http://schemas.openxmlformats.org/drawingml/2006/main"/>
+          <a:p xmlns:a="http://schemas.openxmlformats.org/drawingml/2006/main">
+            <a:pPr>
+              <a:defRPr sz="975" b="1">
+                <a:solidFill>
+                  <a:srgbClr val="D9E3EF"/>
+                </a:solidFill>
+                <a:latin typeface="Aptos"/>
+                <a:ea typeface="Aptos"/>
+                <a:cs typeface="Aptos"/>
+              </a:defRPr>
+            </a:pPr>
+            <a:r>
+              <a:rPr sz="975" b="1">
+                <a:solidFill>
+                  <a:srgbClr val="D9E3EF"/>
+                </a:solidFill>
+                <a:latin typeface="Aptos"/>
+                <a:ea typeface="Aptos"/>
+                <a:cs typeface="Aptos"/>
+              </a:rPr>
+              <a:t>Glue: USD 0.44 / DPU-hour</a:t>
+            </a:r>
+          </a:p>
+        </p:txBody>
+      </p:sp>
+      <p:sp>
+        <p:nvSpPr>
+          <p:cNvPr id="36" name="pill-Firehose: USD 0.029 / GB ingest">
+            <a:extLst xmlns:a="http://schemas.openxmlformats.org/drawingml/2006/main">
+              <a:ext uri="{FF2B5EF4-FFF2-40B4-BE49-F238E27FC236}">
+                <a16:creationId xmlns:a16="http://schemas.microsoft.com/office/drawing/2014/main" id="{CECE9DA0-8E4C-483F-9A48-5080B71468D8}"/>
+              </a:ext>
+            </a:extLst>
+          </p:cNvPr>
+          <p:cNvSpPr>
+            <a:spLocks xmlns:a="http://schemas.openxmlformats.org/drawingml/2006/main" noGrp="1"/>
+          </p:cNvSpPr>
+          <p:nvPr/>
+        </p:nvSpPr>
+        <p:spPr>
+          <a:xfrm xmlns:a="http://schemas.openxmlformats.org/drawingml/2006/main">
+            <a:off x="9239250" y="3257550"/>
+            <a:ext cx="2171700" cy="304800"/>
+          </a:xfrm>
+          <a:prstGeom xmlns:a="http://schemas.openxmlformats.org/drawingml/2006/main" prst="roundRect">
+            <a:avLst>
+              <a:gd name="adj" fmla="val 37500"/>
+            </a:avLst>
+          </a:prstGeom>
+          <a:solidFill xmlns:a="http://schemas.openxmlformats.org/drawingml/2006/main">
+            <a:srgbClr val="111820"/>
+          </a:solidFill>
+          <a:ln xmlns:a="http://schemas.openxmlformats.org/drawingml/2006/main" w="9525">
+            <a:solidFill>
+              <a:srgbClr val="2A3545"/>
+            </a:solidFill>
+            <a:prstDash val="solid"/>
+          </a:ln>
+        </p:spPr>
+      </p:sp>
+      <p:sp>
+        <p:nvSpPr>
+          <p:cNvPr id="37" name="pill-text-Firehose: USD 0.029 / GB ingest">
+            <a:extLst xmlns:a="http://schemas.openxmlformats.org/drawingml/2006/main">
+              <a:ext uri="{FF2B5EF4-FFF2-40B4-BE49-F238E27FC236}">
+                <a16:creationId xmlns:a16="http://schemas.microsoft.com/office/drawing/2014/main" id="{81D7B864-9B22-4CA1-88FB-9DCC3D43A11C}"/>
+              </a:ext>
+            </a:extLst>
+          </p:cNvPr>
+          <p:cNvSpPr>
+            <a:spLocks xmlns:a="http://schemas.openxmlformats.org/drawingml/2006/main" noGrp="1"/>
+          </p:cNvSpPr>
+          <p:nvPr/>
+        </p:nvSpPr>
+        <p:spPr>
+          <a:xfrm xmlns:a="http://schemas.openxmlformats.org/drawingml/2006/main">
+            <a:off x="9353550" y="3324225"/>
+            <a:ext cx="1943100" cy="190500"/>
+          </a:xfrm>
+          <a:prstGeom xmlns:a="http://schemas.openxmlformats.org/drawingml/2006/main" prst="rect">
+            <a:avLst/>
+          </a:prstGeom>
+          <a:noFill xmlns:a="http://schemas.openxmlformats.org/drawingml/2006/main"/>
+          <a:ln xmlns:a="http://schemas.openxmlformats.org/drawingml/2006/main" w="0">
+            <a:noFill/>
+            <a:prstDash val="solid"/>
+          </a:ln>
+        </p:spPr>
+        <p:txBody>
+          <a:bodyPr xmlns:a="http://schemas.openxmlformats.org/drawingml/2006/main"/>
+          <a:lstStyle xmlns:a="http://schemas.openxmlformats.org/drawingml/2006/main"/>
+          <a:p xmlns:a="http://schemas.openxmlformats.org/drawingml/2006/main">
+            <a:pPr>
+              <a:defRPr sz="975" b="1">
+                <a:solidFill>
+                  <a:srgbClr val="D9E3EF"/>
+                </a:solidFill>
+                <a:latin typeface="Aptos"/>
+                <a:ea typeface="Aptos"/>
+                <a:cs typeface="Aptos"/>
+              </a:defRPr>
+            </a:pPr>
+            <a:r>
+              <a:rPr sz="975" b="1">
+                <a:solidFill>
+                  <a:srgbClr val="D9E3EF"/>
+                </a:solidFill>
+                <a:latin typeface="Aptos"/>
+                <a:ea typeface="Aptos"/>
+                <a:cs typeface="Aptos"/>
+              </a:rPr>
+              <a:t>Firehose: USD 0.029 / GB ingest</a:t>
+            </a:r>
+          </a:p>
+        </p:txBody>
+      </p:sp>
+      <p:sp>
+        <p:nvSpPr>
+          <p:cNvPr id="38" name="pill-Athena: USD 5 / TB scanned">
+            <a:extLst xmlns:a="http://schemas.openxmlformats.org/drawingml/2006/main">
+              <a:ext uri="{FF2B5EF4-FFF2-40B4-BE49-F238E27FC236}">
+                <a16:creationId xmlns:a16="http://schemas.microsoft.com/office/drawing/2014/main" id="{10194016-4B7B-4C19-ACD5-73B7C183AA05}"/>
+              </a:ext>
+            </a:extLst>
+          </p:cNvPr>
+          <p:cNvSpPr>
+            <a:spLocks xmlns:a="http://schemas.openxmlformats.org/drawingml/2006/main" noGrp="1"/>
+          </p:cNvSpPr>
+          <p:nvPr/>
+        </p:nvSpPr>
+        <p:spPr>
+          <a:xfrm xmlns:a="http://schemas.openxmlformats.org/drawingml/2006/main">
+            <a:off x="9239250" y="3638550"/>
+            <a:ext cx="2171700" cy="304800"/>
+          </a:xfrm>
+          <a:prstGeom xmlns:a="http://schemas.openxmlformats.org/drawingml/2006/main" prst="roundRect">
+            <a:avLst>
+              <a:gd name="adj" fmla="val 37500"/>
+            </a:avLst>
+          </a:prstGeom>
+          <a:solidFill xmlns:a="http://schemas.openxmlformats.org/drawingml/2006/main">
+            <a:srgbClr val="111820"/>
+          </a:solidFill>
+          <a:ln xmlns:a="http://schemas.openxmlformats.org/drawingml/2006/main" w="9525">
+            <a:solidFill>
+              <a:srgbClr val="2A3545"/>
+            </a:solidFill>
+            <a:prstDash val="solid"/>
+          </a:ln>
+        </p:spPr>
+      </p:sp>
+      <p:sp>
+        <p:nvSpPr>
+          <p:cNvPr id="39" name="pill-text-Athena: USD 5 / TB scanned">
+            <a:extLst xmlns:a="http://schemas.openxmlformats.org/drawingml/2006/main">
+              <a:ext uri="{FF2B5EF4-FFF2-40B4-BE49-F238E27FC236}">
+                <a16:creationId xmlns:a16="http://schemas.microsoft.com/office/drawing/2014/main" id="{9BEE3433-3E10-40F8-BE59-6BB8D37E4215}"/>
+              </a:ext>
+            </a:extLst>
+          </p:cNvPr>
+          <p:cNvSpPr>
+            <a:spLocks xmlns:a="http://schemas.openxmlformats.org/drawingml/2006/main" noGrp="1"/>
+          </p:cNvSpPr>
+          <p:nvPr/>
+        </p:nvSpPr>
+        <p:spPr>
+          <a:xfrm xmlns:a="http://schemas.openxmlformats.org/drawingml/2006/main">
+            <a:off x="9353550" y="3705225"/>
+            <a:ext cx="1943100" cy="190500"/>
+          </a:xfrm>
+          <a:prstGeom xmlns:a="http://schemas.openxmlformats.org/drawingml/2006/main" prst="rect">
+            <a:avLst/>
+          </a:prstGeom>
+          <a:noFill xmlns:a="http://schemas.openxmlformats.org/drawingml/2006/main"/>
+          <a:ln xmlns:a="http://schemas.openxmlformats.org/drawingml/2006/main" w="0">
+            <a:noFill/>
+            <a:prstDash val="solid"/>
+          </a:ln>
+        </p:spPr>
+        <p:txBody>
+          <a:bodyPr xmlns:a="http://schemas.openxmlformats.org/drawingml/2006/main"/>
+          <a:lstStyle xmlns:a="http://schemas.openxmlformats.org/drawingml/2006/main"/>
+          <a:p xmlns:a="http://schemas.openxmlformats.org/drawingml/2006/main">
+            <a:pPr>
+              <a:defRPr sz="975" b="1">
+                <a:solidFill>
+                  <a:srgbClr val="D9E3EF"/>
+                </a:solidFill>
+                <a:latin typeface="Aptos"/>
+                <a:ea typeface="Aptos"/>
+                <a:cs typeface="Aptos"/>
+              </a:defRPr>
+            </a:pPr>
+            <a:r>
+              <a:rPr sz="975" b="1">
+                <a:solidFill>
+                  <a:srgbClr val="D9E3EF"/>
+                </a:solidFill>
+                <a:latin typeface="Aptos"/>
+                <a:ea typeface="Aptos"/>
+                <a:cs typeface="Aptos"/>
+              </a:rPr>
+              <a:t>Athena: USD 5 / TB scanned</a:t>
+            </a:r>
+          </a:p>
+        </p:txBody>
+      </p:sp>
+      <p:sp>
+        <p:nvSpPr>
+          <p:cNvPr id="40" name="pill-QuickSight: USD 24 author, USD 3 reader">
+            <a:extLst xmlns:a="http://schemas.openxmlformats.org/drawingml/2006/main">
+              <a:ext uri="{FF2B5EF4-FFF2-40B4-BE49-F238E27FC236}">
+                <a16:creationId xmlns:a16="http://schemas.microsoft.com/office/drawing/2014/main" id="{FA2268D5-E033-4702-8F72-C503B6FF078A}"/>
+              </a:ext>
+            </a:extLst>
+          </p:cNvPr>
+          <p:cNvSpPr>
+            <a:spLocks xmlns:a="http://schemas.openxmlformats.org/drawingml/2006/main" noGrp="1"/>
+          </p:cNvSpPr>
+          <p:nvPr/>
+        </p:nvSpPr>
+        <p:spPr>
+          <a:xfrm xmlns:a="http://schemas.openxmlformats.org/drawingml/2006/main">
+            <a:off x="9239250" y="4019550"/>
+            <a:ext cx="2171700" cy="304800"/>
+          </a:xfrm>
+          <a:prstGeom xmlns:a="http://schemas.openxmlformats.org/drawingml/2006/main" prst="roundRect">
+            <a:avLst>
+              <a:gd name="adj" fmla="val 37500"/>
+            </a:avLst>
+          </a:prstGeom>
+          <a:solidFill xmlns:a="http://schemas.openxmlformats.org/drawingml/2006/main">
+            <a:srgbClr val="111820"/>
+          </a:solidFill>
+          <a:ln xmlns:a="http://schemas.openxmlformats.org/drawingml/2006/main" w="9525">
+            <a:solidFill>
+              <a:srgbClr val="2A3545"/>
+            </a:solidFill>
+            <a:prstDash val="solid"/>
+          </a:ln>
+        </p:spPr>
+      </p:sp>
+      <p:sp>
+        <p:nvSpPr>
+          <p:cNvPr id="41" name="pill-text-QuickSight: USD 24 author, USD 3 reader">
+            <a:extLst xmlns:a="http://schemas.openxmlformats.org/drawingml/2006/main">
+              <a:ext uri="{FF2B5EF4-FFF2-40B4-BE49-F238E27FC236}">
+                <a16:creationId xmlns:a16="http://schemas.microsoft.com/office/drawing/2014/main" id="{85760552-AC0E-4431-A9D5-BEEAAFEBBBEA}"/>
+              </a:ext>
+            </a:extLst>
+          </p:cNvPr>
+          <p:cNvSpPr>
+            <a:spLocks xmlns:a="http://schemas.openxmlformats.org/drawingml/2006/main" noGrp="1"/>
+          </p:cNvSpPr>
+          <p:nvPr/>
+        </p:nvSpPr>
+        <p:spPr>
+          <a:xfrm xmlns:a="http://schemas.openxmlformats.org/drawingml/2006/main">
+            <a:off x="9353550" y="4086225"/>
+            <a:ext cx="1943100" cy="190500"/>
+          </a:xfrm>
+          <a:prstGeom xmlns:a="http://schemas.openxmlformats.org/drawingml/2006/main" prst="rect">
+            <a:avLst/>
+          </a:prstGeom>
+          <a:noFill xmlns:a="http://schemas.openxmlformats.org/drawingml/2006/main"/>
+          <a:ln xmlns:a="http://schemas.openxmlformats.org/drawingml/2006/main" w="0">
+            <a:noFill/>
+            <a:prstDash val="solid"/>
+          </a:ln>
+        </p:spPr>
+        <p:txBody>
+          <a:bodyPr xmlns:a="http://schemas.openxmlformats.org/drawingml/2006/main"/>
+          <a:lstStyle xmlns:a="http://schemas.openxmlformats.org/drawingml/2006/main"/>
+          <a:p xmlns:a="http://schemas.openxmlformats.org/drawingml/2006/main">
+            <a:pPr>
+              <a:defRPr sz="975" b="1">
+                <a:solidFill>
+                  <a:srgbClr val="D9E3EF"/>
+                </a:solidFill>
+                <a:latin typeface="Aptos"/>
+                <a:ea typeface="Aptos"/>
+                <a:cs typeface="Aptos"/>
+              </a:defRPr>
+            </a:pPr>
+            <a:r>
+              <a:rPr sz="975" b="1">
+                <a:solidFill>
+                  <a:srgbClr val="D9E3EF"/>
+                </a:solidFill>
+                <a:latin typeface="Aptos"/>
+                <a:ea typeface="Aptos"/>
+                <a:cs typeface="Aptos"/>
+              </a:rPr>
+              <a:t>QuickSight: USD 24 author, USD 3 reader</a:t>
+            </a:r>
+          </a:p>
+        </p:txBody>
+      </p:sp>
+      <p:sp>
+        <p:nvSpPr>
+          <p:cNvPr id="42" name="pill-Redshift: starts USD 1.50 / hour">
+            <a:extLst xmlns:a="http://schemas.openxmlformats.org/drawingml/2006/main">
+              <a:ext uri="{FF2B5EF4-FFF2-40B4-BE49-F238E27FC236}">
+                <a16:creationId xmlns:a16="http://schemas.microsoft.com/office/drawing/2014/main" id="{8D5D4738-A4C6-4B0D-BF7F-79FC3BFFAE78}"/>
+              </a:ext>
+            </a:extLst>
+          </p:cNvPr>
+          <p:cNvSpPr>
+            <a:spLocks xmlns:a="http://schemas.openxmlformats.org/drawingml/2006/main" noGrp="1"/>
+          </p:cNvSpPr>
+          <p:nvPr/>
+        </p:nvSpPr>
+        <p:spPr>
+          <a:xfrm xmlns:a="http://schemas.openxmlformats.org/drawingml/2006/main">
+            <a:off x="9239250" y="4400550"/>
+            <a:ext cx="2171700" cy="304800"/>
+          </a:xfrm>
+          <a:prstGeom xmlns:a="http://schemas.openxmlformats.org/drawingml/2006/main" prst="roundRect">
+            <a:avLst>
+              <a:gd name="adj" fmla="val 37500"/>
+            </a:avLst>
+          </a:prstGeom>
+          <a:solidFill xmlns:a="http://schemas.openxmlformats.org/drawingml/2006/main">
+            <a:srgbClr val="111820"/>
+          </a:solidFill>
+          <a:ln xmlns:a="http://schemas.openxmlformats.org/drawingml/2006/main" w="9525">
+            <a:solidFill>
+              <a:srgbClr val="2A3545"/>
+            </a:solidFill>
+            <a:prstDash val="solid"/>
+          </a:ln>
+        </p:spPr>
+      </p:sp>
+      <p:sp>
+        <p:nvSpPr>
+          <p:cNvPr id="43" name="pill-text-Redshift: starts USD 1.50 / hour">
+            <a:extLst xmlns:a="http://schemas.openxmlformats.org/drawingml/2006/main">
+              <a:ext uri="{FF2B5EF4-FFF2-40B4-BE49-F238E27FC236}">
+                <a16:creationId xmlns:a16="http://schemas.microsoft.com/office/drawing/2014/main" id="{FAA9E2A0-9DA0-4AEB-A5E5-E5CD83FFC75F}"/>
+              </a:ext>
+            </a:extLst>
+          </p:cNvPr>
+          <p:cNvSpPr>
+            <a:spLocks xmlns:a="http://schemas.openxmlformats.org/drawingml/2006/main" noGrp="1"/>
+          </p:cNvSpPr>
+          <p:nvPr/>
+        </p:nvSpPr>
+        <p:spPr>
+          <a:xfrm xmlns:a="http://schemas.openxmlformats.org/drawingml/2006/main">
+            <a:off x="9353550" y="4467225"/>
+            <a:ext cx="1943100" cy="190500"/>
+          </a:xfrm>
+          <a:prstGeom xmlns:a="http://schemas.openxmlformats.org/drawingml/2006/main" prst="rect">
+            <a:avLst/>
+          </a:prstGeom>
+          <a:noFill xmlns:a="http://schemas.openxmlformats.org/drawingml/2006/main"/>
+          <a:ln xmlns:a="http://schemas.openxmlformats.org/drawingml/2006/main" w="0">
+            <a:noFill/>
+            <a:prstDash val="solid"/>
+          </a:ln>
+        </p:spPr>
+        <p:txBody>
+          <a:bodyPr xmlns:a="http://schemas.openxmlformats.org/drawingml/2006/main"/>
+          <a:lstStyle xmlns:a="http://schemas.openxmlformats.org/drawingml/2006/main"/>
+          <a:p xmlns:a="http://schemas.openxmlformats.org/drawingml/2006/main">
+            <a:pPr>
+              <a:defRPr sz="975" b="1">
+                <a:solidFill>
+                  <a:srgbClr val="D9E3EF"/>
+                </a:solidFill>
+                <a:latin typeface="Aptos"/>
+                <a:ea typeface="Aptos"/>
+                <a:cs typeface="Aptos"/>
+              </a:defRPr>
+            </a:pPr>
+            <a:r>
+              <a:rPr sz="975" b="1">
+                <a:solidFill>
+                  <a:srgbClr val="D9E3EF"/>
+                </a:solidFill>
+                <a:latin typeface="Aptos"/>
+                <a:ea typeface="Aptos"/>
+                <a:cs typeface="Aptos"/>
+              </a:rPr>
+              <a:t>Redshift: starts USD 1.50 / hour</a:t>
+            </a:r>
+          </a:p>
+        </p:txBody>
+      </p:sp>
+      <p:sp>
+        <p:nvSpPr>
+          <p:cNvPr id="44" name="pill-S3: USD 0.023 / GB-month standard">
+            <a:extLst xmlns:a="http://schemas.openxmlformats.org/drawingml/2006/main">
+              <a:ext uri="{FF2B5EF4-FFF2-40B4-BE49-F238E27FC236}">
+                <a16:creationId xmlns:a16="http://schemas.microsoft.com/office/drawing/2014/main" id="{11D0E575-9ED7-4CA3-A020-ADD865D09E95}"/>
+              </a:ext>
+            </a:extLst>
+          </p:cNvPr>
+          <p:cNvSpPr>
+            <a:spLocks xmlns:a="http://schemas.openxmlformats.org/drawingml/2006/main" noGrp="1"/>
+          </p:cNvSpPr>
+          <p:nvPr/>
+        </p:nvSpPr>
+        <p:spPr>
+          <a:xfrm xmlns:a="http://schemas.openxmlformats.org/drawingml/2006/main">
+            <a:off x="9239250" y="4781550"/>
+            <a:ext cx="2171700" cy="304800"/>
+          </a:xfrm>
+          <a:prstGeom xmlns:a="http://schemas.openxmlformats.org/drawingml/2006/main" prst="roundRect">
+            <a:avLst>
+              <a:gd name="adj" fmla="val 37500"/>
+            </a:avLst>
+          </a:prstGeom>
+          <a:solidFill xmlns:a="http://schemas.openxmlformats.org/drawingml/2006/main">
+            <a:srgbClr val="111820"/>
+          </a:solidFill>
+          <a:ln xmlns:a="http://schemas.openxmlformats.org/drawingml/2006/main" w="9525">
+            <a:solidFill>
+              <a:srgbClr val="2A3545"/>
+            </a:solidFill>
+            <a:prstDash val="solid"/>
+          </a:ln>
+        </p:spPr>
+      </p:sp>
+      <p:sp>
+        <p:nvSpPr>
+          <p:cNvPr id="45" name="pill-text-S3: USD 0.023 / GB-month standard">
+            <a:extLst xmlns:a="http://schemas.openxmlformats.org/drawingml/2006/main">
+              <a:ext uri="{FF2B5EF4-FFF2-40B4-BE49-F238E27FC236}">
+                <a16:creationId xmlns:a16="http://schemas.microsoft.com/office/drawing/2014/main" id="{AEDCB9BA-4F1D-4E57-B4DF-046348C21F9A}"/>
+              </a:ext>
+            </a:extLst>
+          </p:cNvPr>
+          <p:cNvSpPr>
+            <a:spLocks xmlns:a="http://schemas.openxmlformats.org/drawingml/2006/main" noGrp="1"/>
+          </p:cNvSpPr>
+          <p:nvPr/>
+        </p:nvSpPr>
+        <p:spPr>
+          <a:xfrm xmlns:a="http://schemas.openxmlformats.org/drawingml/2006/main">
+            <a:off x="9353550" y="4848225"/>
+            <a:ext cx="1943100" cy="190500"/>
+          </a:xfrm>
+          <a:prstGeom xmlns:a="http://schemas.openxmlformats.org/drawingml/2006/main" prst="rect">
+            <a:avLst/>
+          </a:prstGeom>
+          <a:noFill xmlns:a="http://schemas.openxmlformats.org/drawingml/2006/main"/>
+          <a:ln xmlns:a="http://schemas.openxmlformats.org/drawingml/2006/main" w="0">
+            <a:noFill/>
+            <a:prstDash val="solid"/>
+          </a:ln>
+        </p:spPr>
+        <p:txBody>
+          <a:bodyPr xmlns:a="http://schemas.openxmlformats.org/drawingml/2006/main"/>
+          <a:lstStyle xmlns:a="http://schemas.openxmlformats.org/drawingml/2006/main"/>
+          <a:p xmlns:a="http://schemas.openxmlformats.org/drawingml/2006/main">
+            <a:pPr>
+              <a:defRPr sz="975" b="1">
+                <a:solidFill>
+                  <a:srgbClr val="D9E3EF"/>
+                </a:solidFill>
+                <a:latin typeface="Aptos"/>
+                <a:ea typeface="Aptos"/>
+                <a:cs typeface="Aptos"/>
+              </a:defRPr>
+            </a:pPr>
+            <a:r>
+              <a:rPr sz="975" b="1">
+                <a:solidFill>
+                  <a:srgbClr val="D9E3EF"/>
+                </a:solidFill>
+                <a:latin typeface="Aptos"/>
+                <a:ea typeface="Aptos"/>
+                <a:cs typeface="Aptos"/>
+              </a:rPr>
+              <a:t>S3: USD 0.023 / GB-month standard</a:t>
+            </a:r>
+          </a:p>
+        </p:txBody>
+      </p:sp>
+      <p:sp>
+        <p:nvSpPr>
+          <p:cNvPr id="46" name="footer-source">
+            <a:extLst xmlns:a="http://schemas.openxmlformats.org/drawingml/2006/main">
+              <a:ext uri="{FF2B5EF4-FFF2-40B4-BE49-F238E27FC236}">
+                <a16:creationId xmlns:a16="http://schemas.microsoft.com/office/drawing/2014/main" id="{E5970F74-DE5B-45FC-BEB6-5B301E5A261C}"/>
+              </a:ext>
+            </a:extLst>
+          </p:cNvPr>
+          <p:cNvSpPr>
+            <a:spLocks xmlns:a="http://schemas.openxmlformats.org/drawingml/2006/main" noGrp="1"/>
+          </p:cNvSpPr>
+          <p:nvPr/>
+        </p:nvSpPr>
+        <p:spPr>
+          <a:xfrm xmlns:a="http://schemas.openxmlformats.org/drawingml/2006/main">
+            <a:off x="552450" y="6305550"/>
+            <a:ext cx="8477250" cy="228600"/>
+          </a:xfrm>
+          <a:prstGeom xmlns:a="http://schemas.openxmlformats.org/drawingml/2006/main" prst="rect">
+            <a:avLst/>
+          </a:prstGeom>
+          <a:noFill xmlns:a="http://schemas.openxmlformats.org/drawingml/2006/main"/>
+          <a:ln xmlns:a="http://schemas.openxmlformats.org/drawingml/2006/main" w="0">
+            <a:noFill/>
+            <a:prstDash val="solid"/>
+          </a:ln>
+        </p:spPr>
+        <p:txBody>
+          <a:bodyPr xmlns:a="http://schemas.openxmlformats.org/drawingml/2006/main"/>
+          <a:lstStyle xmlns:a="http://schemas.openxmlformats.org/drawingml/2006/main"/>
+          <a:p xmlns:a="http://schemas.openxmlformats.org/drawingml/2006/main">
+            <a:pPr>
+              <a:defRPr sz="900">
+                <a:solidFill>
+                  <a:srgbClr val="798695"/>
+                </a:solidFill>
+                <a:latin typeface="Aptos"/>
+                <a:ea typeface="Aptos"/>
+                <a:cs typeface="Aptos"/>
+              </a:defRPr>
+            </a:pPr>
+            <a:r>
+              <a:rPr sz="900">
+                <a:solidFill>
+                  <a:srgbClr val="798695"/>
+                </a:solidFill>
+                <a:latin typeface="Aptos"/>
+                <a:ea typeface="Aptos"/>
+                <a:cs typeface="Aptos"/>
+              </a:rPr>
+              <a:t>Sources: official AWS pricing pages. Full formulas, assumptions, and service-level calculation table are in the PDF cost appendix.</a:t>
             </a:r>
           </a:p>
         </p:txBody>
@@ -10207,7 +12488,7 @@
     </p:spTree>
     <p:extLst>
       <p:ext uri="{BB962C8B-B14F-4D97-AF65-F5344CB8AC3E}">
-        <p14:creationId xmlns:p14="http://schemas.microsoft.com/office/powerpoint/2010/main" val="2078827544"/>
+        <p14:creationId xmlns:p14="http://schemas.microsoft.com/office/powerpoint/2010/main" val="996977359"/>
       </p:ext>
     </p:extLst>
   </p:cSld>
